--- a/hr_demo/HR_AI_Tutorial.pptx
+++ b/hr_demo/HR_AI_Tutorial.pptx
@@ -4,6 +4,9 @@
   <p:sldMasterIdLst>
     <p:sldMasterId id="2147483648" r:id="rId1"/>
   </p:sldMasterIdLst>
+  <p:notesMasterIdLst>
+    <p:notesMasterId r:id="rId22"/>
+  </p:notesMasterIdLst>
   <p:sldIdLst>
     <p:sldId id="256" r:id="rId2"/>
     <p:sldId id="257" r:id="rId3"/>
@@ -26,10 +29,7 @@
     <p:sldId id="274" r:id="rId20"/>
     <p:sldId id="275" r:id="rId21"/>
   </p:sldIdLst>
-  <p:notesMasterIdLst>
-    <p:notesMasterId r:id="rId22"/>
-  </p:notesMasterIdLst>
-  <p:sldSz cx="9144000" cy="5143500"/>
+  <p:sldSz cx="9144000" cy="5143500" type="screen16x9"/>
   <p:notesSz cx="5143500" cy="9144000"/>
   <p:defaultTextStyle>
     <a:lvl1pPr marL="0" algn="l" defTabSz="914400" rtl="0" eaLnBrk="1" latinLnBrk="0" hangingPunct="1">
@@ -123,6 +123,11 @@
       </a:defRPr>
     </a:lvl9pPr>
   </p:defaultTextStyle>
+  <p:extLst>
+    <p:ext uri="{EFAFB233-063F-42B5-8137-9DF3F51BA10A}">
+      <p15:sldGuideLst xmlns:p15="http://schemas.microsoft.com/office/powerpoint/2012/main"/>
+    </p:ext>
+  </p:extLst>
 </p:presentation>
 </file>
 
@@ -148,234 +153,10 @@
           <a:chExt cx="0" cy="0"/>
         </a:xfrm>
       </p:grpSpPr>
-      <p:sp>
-        <p:nvSpPr>
-          <p:cNvPr id="2" name="Header Placeholder 1"/>
-          <p:cNvSpPr>
-            <a:spLocks noGrp="1"/>
-          </p:cNvSpPr>
-          <p:nvPr>
-            <p:ph type="hdr" sz="quarter"/>
-          </p:nvPr>
-        </p:nvSpPr>
-        <p:spPr>
-          <a:xfrm>
-            <a:off x="0" y="0"/>
-            <a:ext cx="2971800" cy="458788"/>
-          </a:xfrm>
-          <a:prstGeom prst="rect">
-            <a:avLst/>
-          </a:prstGeom>
-        </p:spPr>
-        <p:txBody>
-          <a:bodyPr vert="horz" lIns="91440" tIns="45720" rIns="91440" bIns="45720" rtlCol="0"/>
-          <a:lstStyle>
-            <a:lvl1pPr algn="l">
-              <a:defRPr sz="1200"/>
-            </a:lvl1pPr>
-          </a:lstStyle>
-          <a:p>
-            <a:endParaRPr lang="en-US"/>
-          </a:p>
-        </p:txBody>
-      </p:sp>
-      <p:sp>
-        <p:nvSpPr>
-          <p:cNvPr id="3" name="Date Placeholder 2"/>
-          <p:cNvSpPr>
-            <a:spLocks noGrp="1"/>
-          </p:cNvSpPr>
-          <p:nvPr>
-            <p:ph type="dt" idx="1"/>
-          </p:nvPr>
-        </p:nvSpPr>
-        <p:spPr>
-          <a:xfrm>
-            <a:off x="3884613" y="0"/>
-            <a:ext cx="2971800" cy="458788"/>
-          </a:xfrm>
-          <a:prstGeom prst="rect">
-            <a:avLst/>
-          </a:prstGeom>
-        </p:spPr>
-        <p:txBody>
-          <a:bodyPr vert="horz" lIns="91440" tIns="45720" rIns="91440" bIns="45720" rtlCol="0"/>
-          <a:lstStyle>
-            <a:lvl1pPr algn="r">
-              <a:defRPr sz="1200"/>
-            </a:lvl1pPr>
-          </a:lstStyle>
-          <a:p>
-            <a:fld id="{5282F153-3F37-0F45-9E97-73ACFA13230C}" type="datetimeFigureOut">
-              <a:rPr lang="en-US"/>
-              <a:t>7/23/19</a:t>
-            </a:fld>
-            <a:endParaRPr lang="en-US"/>
-          </a:p>
-        </p:txBody>
-      </p:sp>
-      <p:sp>
-        <p:nvSpPr>
-          <p:cNvPr id="4" name="Slide Image Placeholder 3"/>
-          <p:cNvSpPr>
-            <a:spLocks noGrp="1" noRot="1" noChangeAspect="1"/>
-          </p:cNvSpPr>
-          <p:nvPr>
-            <p:ph type="sldImg" idx="2"/>
-          </p:nvPr>
-        </p:nvSpPr>
-        <p:spPr>
-          <a:xfrm>
-            <a:off x="685800" y="1143000"/>
-            <a:ext cx="5486400" cy="3086100"/>
-          </a:xfrm>
-          <a:prstGeom prst="rect">
-            <a:avLst/>
-          </a:prstGeom>
-          <a:noFill/>
-          <a:ln w="12700">
-            <a:solidFill>
-              <a:prstClr val="black"/>
-            </a:solidFill>
-          </a:ln>
-        </p:spPr>
-        <p:txBody>
-          <a:bodyPr vert="horz" lIns="91440" tIns="45720" rIns="91440" bIns="45720" rtlCol="0" anchor="ctr"/>
-          <a:lstStyle/>
-          <a:p>
-            <a:endParaRPr lang="en-US"/>
-          </a:p>
-        </p:txBody>
-      </p:sp>
-      <p:sp>
-        <p:nvSpPr>
-          <p:cNvPr id="5" name="Notes Placeholder 4"/>
-          <p:cNvSpPr>
-            <a:spLocks noGrp="1"/>
-          </p:cNvSpPr>
-          <p:nvPr>
-            <p:ph type="body" sz="quarter" idx="3"/>
-          </p:nvPr>
-        </p:nvSpPr>
-        <p:spPr>
-          <a:xfrm>
-            <a:off x="685800" y="4400550"/>
-            <a:ext cx="5486400" cy="3600450"/>
-          </a:xfrm>
-          <a:prstGeom prst="rect">
-            <a:avLst/>
-          </a:prstGeom>
-        </p:spPr>
-        <p:txBody>
-          <a:bodyPr vert="horz" lIns="91440" tIns="45720" rIns="91440" bIns="45720" rtlCol="0"/>
-          <a:lstStyle/>
-          <a:p>
-            <a:pPr lvl="0"/>
-            <a:r>
-              <a:rPr lang="en-US"/>
-              <a:t>Click to edit Master text styles</a:t>
-            </a:r>
-          </a:p>
-          <a:p>
-            <a:pPr lvl="1"/>
-            <a:r>
-              <a:rPr lang="en-US"/>
-              <a:t>Second level</a:t>
-            </a:r>
-          </a:p>
-          <a:p>
-            <a:pPr lvl="2"/>
-            <a:r>
-              <a:rPr lang="en-US"/>
-              <a:t>Third level</a:t>
-            </a:r>
-          </a:p>
-          <a:p>
-            <a:pPr lvl="3"/>
-            <a:r>
-              <a:rPr lang="en-US"/>
-              <a:t>Fourth level</a:t>
-            </a:r>
-          </a:p>
-          <a:p>
-            <a:pPr lvl="4"/>
-            <a:r>
-              <a:rPr lang="en-US"/>
-              <a:t>Fifth level</a:t>
-            </a:r>
-          </a:p>
-        </p:txBody>
-      </p:sp>
-      <p:sp>
-        <p:nvSpPr>
-          <p:cNvPr id="6" name="Footer Placeholder 5"/>
-          <p:cNvSpPr>
-            <a:spLocks noGrp="1"/>
-          </p:cNvSpPr>
-          <p:nvPr>
-            <p:ph type="ftr" sz="quarter" idx="4"/>
-          </p:nvPr>
-        </p:nvSpPr>
-        <p:spPr>
-          <a:xfrm>
-            <a:off x="0" y="8685213"/>
-            <a:ext cx="2971800" cy="458787"/>
-          </a:xfrm>
-          <a:prstGeom prst="rect">
-            <a:avLst/>
-          </a:prstGeom>
-        </p:spPr>
-        <p:txBody>
-          <a:bodyPr vert="horz" lIns="91440" tIns="45720" rIns="91440" bIns="45720" rtlCol="0" anchor="b"/>
-          <a:lstStyle>
-            <a:lvl1pPr algn="l">
-              <a:defRPr sz="1200"/>
-            </a:lvl1pPr>
-          </a:lstStyle>
-          <a:p>
-            <a:endParaRPr lang="en-US"/>
-          </a:p>
-        </p:txBody>
-      </p:sp>
-      <p:sp>
-        <p:nvSpPr>
-          <p:cNvPr id="7" name="Slide Number Placeholder 6"/>
-          <p:cNvSpPr>
-            <a:spLocks noGrp="1"/>
-          </p:cNvSpPr>
-          <p:nvPr>
-            <p:ph type="sldNum" sz="quarter" idx="5"/>
-          </p:nvPr>
-        </p:nvSpPr>
-        <p:spPr>
-          <a:xfrm>
-            <a:off x="3884613" y="8685213"/>
-            <a:ext cx="2971800" cy="458787"/>
-          </a:xfrm>
-          <a:prstGeom prst="rect">
-            <a:avLst/>
-          </a:prstGeom>
-        </p:spPr>
-        <p:txBody>
-          <a:bodyPr vert="horz" lIns="91440" tIns="45720" rIns="91440" bIns="45720" rtlCol="0" anchor="b"/>
-          <a:lstStyle>
-            <a:lvl1pPr algn="r">
-              <a:defRPr sz="1200"/>
-            </a:lvl1pPr>
-          </a:lstStyle>
-          <a:p>
-            <a:fld id="{CE5E9CC1-C706-0F49-92D6-E571CC5EEA8F}" type="slidenum">
-              <a:rPr lang="en-US"/>
-              <a:t>‹#›</a:t>
-            </a:fld>
-            <a:endParaRPr lang="en-US"/>
-          </a:p>
-        </p:txBody>
-      </p:sp>
     </p:spTree>
     <p:extLst>
       <p:ext uri="{BB962C8B-B14F-4D97-AF65-F5344CB8AC3E}">
-        <p14:creationId xmlns:p14="http://schemas.microsoft.com/office/powerpoint/2010/main" val="1024086991"/>
+        <p14:creationId xmlns:p14="http://schemas.microsoft.com/office/powerpoint/2010/main" val="2736684956"/>
       </p:ext>
     </p:extLst>
   </p:cSld>
@@ -519,10 +300,6 @@
           <a:bodyPr/>
           <a:lstStyle/>
           <a:p>
-            <a:r>
-              <a:rPr lang="en-US" dirty="0"/>
-              <a:t/>
-            </a:r>
             <a:endParaRPr lang="en-US" dirty="0"/>
           </a:p>
         </p:txBody>
@@ -607,10 +384,6 @@
           <a:bodyPr/>
           <a:lstStyle/>
           <a:p>
-            <a:r>
-              <a:rPr lang="en-US" dirty="0"/>
-              <a:t/>
-            </a:r>
             <a:endParaRPr lang="en-US" dirty="0"/>
           </a:p>
         </p:txBody>
@@ -695,10 +468,6 @@
           <a:bodyPr/>
           <a:lstStyle/>
           <a:p>
-            <a:r>
-              <a:rPr lang="en-US" dirty="0"/>
-              <a:t/>
-            </a:r>
             <a:endParaRPr lang="en-US" dirty="0"/>
           </a:p>
         </p:txBody>
@@ -783,10 +552,6 @@
           <a:bodyPr/>
           <a:lstStyle/>
           <a:p>
-            <a:r>
-              <a:rPr lang="en-US" dirty="0"/>
-              <a:t/>
-            </a:r>
             <a:endParaRPr lang="en-US" dirty="0"/>
           </a:p>
         </p:txBody>
@@ -871,10 +636,6 @@
           <a:bodyPr/>
           <a:lstStyle/>
           <a:p>
-            <a:r>
-              <a:rPr lang="en-US" dirty="0"/>
-              <a:t/>
-            </a:r>
             <a:endParaRPr lang="en-US" dirty="0"/>
           </a:p>
         </p:txBody>
@@ -959,10 +720,6 @@
           <a:bodyPr/>
           <a:lstStyle/>
           <a:p>
-            <a:r>
-              <a:rPr lang="en-US" dirty="0"/>
-              <a:t/>
-            </a:r>
             <a:endParaRPr lang="en-US" dirty="0"/>
           </a:p>
         </p:txBody>
@@ -1047,10 +804,6 @@
           <a:bodyPr/>
           <a:lstStyle/>
           <a:p>
-            <a:r>
-              <a:rPr lang="en-US" dirty="0"/>
-              <a:t/>
-            </a:r>
             <a:endParaRPr lang="en-US" dirty="0"/>
           </a:p>
         </p:txBody>
@@ -1135,10 +888,6 @@
           <a:bodyPr/>
           <a:lstStyle/>
           <a:p>
-            <a:r>
-              <a:rPr lang="en-US" dirty="0"/>
-              <a:t/>
-            </a:r>
             <a:endParaRPr lang="en-US" dirty="0"/>
           </a:p>
         </p:txBody>
@@ -1223,10 +972,6 @@
           <a:bodyPr/>
           <a:lstStyle/>
           <a:p>
-            <a:r>
-              <a:rPr lang="en-US" dirty="0"/>
-              <a:t/>
-            </a:r>
             <a:endParaRPr lang="en-US" dirty="0"/>
           </a:p>
         </p:txBody>
@@ -1311,10 +1056,6 @@
           <a:bodyPr/>
           <a:lstStyle/>
           <a:p>
-            <a:r>
-              <a:rPr lang="en-US" dirty="0"/>
-              <a:t/>
-            </a:r>
             <a:endParaRPr lang="en-US" dirty="0"/>
           </a:p>
         </p:txBody>
@@ -1399,10 +1140,6 @@
           <a:bodyPr/>
           <a:lstStyle/>
           <a:p>
-            <a:r>
-              <a:rPr lang="en-US" dirty="0"/>
-              <a:t/>
-            </a:r>
             <a:endParaRPr lang="en-US" dirty="0"/>
           </a:p>
         </p:txBody>
@@ -1487,10 +1224,6 @@
           <a:bodyPr/>
           <a:lstStyle/>
           <a:p>
-            <a:r>
-              <a:rPr lang="en-US" dirty="0"/>
-              <a:t/>
-            </a:r>
             <a:endParaRPr lang="en-US" dirty="0"/>
           </a:p>
         </p:txBody>
@@ -1575,10 +1308,6 @@
           <a:bodyPr/>
           <a:lstStyle/>
           <a:p>
-            <a:r>
-              <a:rPr lang="en-US" dirty="0"/>
-              <a:t/>
-            </a:r>
             <a:endParaRPr lang="en-US" dirty="0"/>
           </a:p>
         </p:txBody>
@@ -1663,10 +1392,6 @@
           <a:bodyPr/>
           <a:lstStyle/>
           <a:p>
-            <a:r>
-              <a:rPr lang="en-US" dirty="0"/>
-              <a:t/>
-            </a:r>
             <a:endParaRPr lang="en-US" dirty="0"/>
           </a:p>
         </p:txBody>
@@ -1751,10 +1476,6 @@
           <a:bodyPr/>
           <a:lstStyle/>
           <a:p>
-            <a:r>
-              <a:rPr lang="en-US" dirty="0"/>
-              <a:t/>
-            </a:r>
             <a:endParaRPr lang="en-US" dirty="0"/>
           </a:p>
         </p:txBody>
@@ -1839,10 +1560,6 @@
           <a:bodyPr/>
           <a:lstStyle/>
           <a:p>
-            <a:r>
-              <a:rPr lang="en-US" dirty="0"/>
-              <a:t/>
-            </a:r>
             <a:endParaRPr lang="en-US" dirty="0"/>
           </a:p>
         </p:txBody>
@@ -1927,10 +1644,6 @@
           <a:bodyPr/>
           <a:lstStyle/>
           <a:p>
-            <a:r>
-              <a:rPr lang="en-US" dirty="0"/>
-              <a:t/>
-            </a:r>
             <a:endParaRPr lang="en-US" dirty="0"/>
           </a:p>
         </p:txBody>
@@ -2015,10 +1728,6 @@
           <a:bodyPr/>
           <a:lstStyle/>
           <a:p>
-            <a:r>
-              <a:rPr lang="en-US" dirty="0"/>
-              <a:t/>
-            </a:r>
             <a:endParaRPr lang="en-US" dirty="0"/>
           </a:p>
         </p:txBody>
@@ -2103,10 +1812,6 @@
           <a:bodyPr/>
           <a:lstStyle/>
           <a:p>
-            <a:r>
-              <a:rPr lang="en-US" dirty="0"/>
-              <a:t/>
-            </a:r>
             <a:endParaRPr lang="en-US" dirty="0"/>
           </a:p>
         </p:txBody>
@@ -2191,10 +1896,6 @@
           <a:bodyPr/>
           <a:lstStyle/>
           <a:p>
-            <a:r>
-              <a:rPr lang="en-US" dirty="0"/>
-              <a:t/>
-            </a:r>
             <a:endParaRPr lang="en-US" dirty="0"/>
           </a:p>
         </p:txBody>
@@ -2268,6 +1969,11 @@
 <file path=ppt/slideMasters/slideMaster1.xml><?xml version="1.0" encoding="utf-8"?>
 <p:sldMaster xmlns:a="http://schemas.openxmlformats.org/drawingml/2006/main" xmlns:r="http://schemas.openxmlformats.org/officeDocument/2006/relationships" xmlns:p="http://schemas.openxmlformats.org/presentationml/2006/main">
   <p:cSld>
+    <p:bg>
+      <p:bgRef idx="1001">
+        <a:schemeClr val="bg1"/>
+      </p:bgRef>
+    </p:bg>
     <p:spTree>
       <p:nvGrpSpPr>
         <p:cNvPr id="1" name=""/>
@@ -2550,6 +2256,7 @@
         <a:solidFill>
           <a:srgbClr val="1F4E79"/>
         </a:solidFill>
+        <a:effectLst/>
       </p:bgPr>
     </p:bg>
     <p:spTree>
@@ -2585,6 +2292,13 @@
           </a:solidFill>
           <a:ln/>
         </p:spPr>
+        <p:txBody>
+          <a:bodyPr/>
+          <a:lstStyle/>
+          <a:p>
+            <a:endParaRPr lang="zh-TW" altLang="en-US"/>
+          </a:p>
+        </p:txBody>
       </p:sp>
       <p:sp>
         <p:nvSpPr>
@@ -2607,7 +2321,7 @@
           <a:bodyPr wrap="square" rtlCol="0" anchor="ctr"/>
           <a:lstStyle/>
           <a:p>
-            <a:pPr indent="0" marL="0">
+            <a:pPr marL="0" indent="0">
               <a:buNone/>
             </a:pPr>
             <a:r>
@@ -2646,7 +2360,7 @@
           <a:bodyPr wrap="square" rtlCol="0" anchor="ctr"/>
           <a:lstStyle/>
           <a:p>
-            <a:pPr indent="0" marL="0">
+            <a:pPr marL="0" indent="0">
               <a:buNone/>
             </a:pPr>
             <a:r>
@@ -2685,7 +2399,7 @@
           <a:bodyPr wrap="square" rtlCol="0" anchor="ctr"/>
           <a:lstStyle/>
           <a:p>
-            <a:pPr indent="0" marL="0">
+            <a:pPr marL="0" indent="0">
               <a:buNone/>
             </a:pPr>
             <a:r>
@@ -2702,7 +2416,7 @@
             <a:endParaRPr lang="en-US" sz="1600" dirty="0"/>
           </a:p>
           <a:p>
-            <a:pPr indent="0" marL="0">
+            <a:pPr marL="0" indent="0">
               <a:buNone/>
             </a:pPr>
             <a:r>
@@ -2764,6 +2478,13 @@
           </a:solidFill>
           <a:ln/>
         </p:spPr>
+        <p:txBody>
+          <a:bodyPr/>
+          <a:lstStyle/>
+          <a:p>
+            <a:endParaRPr lang="zh-TW" altLang="en-US"/>
+          </a:p>
+        </p:txBody>
       </p:sp>
       <p:sp>
         <p:nvSpPr>
@@ -2786,7 +2507,7 @@
           <a:bodyPr wrap="square" lIns="0" tIns="0" rIns="0" bIns="0" rtlCol="0" anchor="ctr"/>
           <a:lstStyle/>
           <a:p>
-            <a:pPr indent="0" marL="0">
+            <a:pPr marL="0" indent="0">
               <a:buNone/>
             </a:pPr>
             <a:r>
@@ -2825,7 +2546,7 @@
           <a:bodyPr wrap="square" rtlCol="0" anchor="ctr"/>
           <a:lstStyle/>
           <a:p>
-            <a:pPr algn="r" indent="0" marL="0">
+            <a:pPr marL="0" indent="0" algn="r">
               <a:buNone/>
             </a:pPr>
             <a:r>
@@ -2867,13 +2588,20 @@
             <a:prstDash val="solid"/>
           </a:ln>
           <a:effectLst>
-            <a:outerShdw sx="100000" sy="100000" kx="0" ky="0" algn="bl" rotWithShape="0" blurRad="50800" dist="25400" dir="8100000">
+            <a:outerShdw blurRad="50800" dist="25400" dir="8100000" algn="bl" rotWithShape="0">
               <a:srgbClr val="000000">
                 <a:alpha val="12000"/>
               </a:srgbClr>
             </a:outerShdw>
           </a:effectLst>
         </p:spPr>
+        <p:txBody>
+          <a:bodyPr/>
+          <a:lstStyle/>
+          <a:p>
+            <a:endParaRPr lang="zh-TW" altLang="en-US"/>
+          </a:p>
+        </p:txBody>
       </p:sp>
       <p:sp>
         <p:nvSpPr>
@@ -2896,7 +2624,7 @@
           <a:bodyPr wrap="square" lIns="0" tIns="0" rIns="0" bIns="0" rtlCol="0" anchor="ctr"/>
           <a:lstStyle/>
           <a:p>
-            <a:pPr indent="0" marL="0">
+            <a:pPr marL="0" indent="0">
               <a:buNone/>
             </a:pPr>
             <a:r>
@@ -2933,6 +2661,13 @@
           </a:solidFill>
           <a:ln/>
         </p:spPr>
+        <p:txBody>
+          <a:bodyPr/>
+          <a:lstStyle/>
+          <a:p>
+            <a:endParaRPr lang="zh-TW" altLang="en-US"/>
+          </a:p>
+        </p:txBody>
       </p:sp>
       <p:sp>
         <p:nvSpPr>
@@ -2955,7 +2690,7 @@
           <a:bodyPr wrap="square" lIns="0" tIns="0" rIns="0" bIns="0" rtlCol="0" anchor="ctr"/>
           <a:lstStyle/>
           <a:p>
-            <a:pPr indent="0" marL="0">
+            <a:pPr marL="0" indent="0">
               <a:buNone/>
             </a:pPr>
             <a:r>
@@ -2992,6 +2727,13 @@
           </a:solidFill>
           <a:ln/>
         </p:spPr>
+        <p:txBody>
+          <a:bodyPr/>
+          <a:lstStyle/>
+          <a:p>
+            <a:endParaRPr lang="zh-TW" altLang="en-US"/>
+          </a:p>
+        </p:txBody>
       </p:sp>
       <p:sp>
         <p:nvSpPr>
@@ -3014,7 +2756,7 @@
           <a:bodyPr wrap="square" lIns="0" tIns="0" rIns="0" bIns="0" rtlCol="0" anchor="ctr"/>
           <a:lstStyle/>
           <a:p>
-            <a:pPr indent="0" marL="0">
+            <a:pPr marL="0" indent="0">
               <a:buNone/>
             </a:pPr>
             <a:r>
@@ -3031,7 +2773,7 @@
             <a:endParaRPr lang="en-US" sz="1100" dirty="0"/>
           </a:p>
           <a:p>
-            <a:pPr indent="0" marL="0">
+            <a:pPr marL="0" indent="0">
               <a:buNone/>
             </a:pPr>
             <a:r>
@@ -3048,7 +2790,7 @@
             <a:endParaRPr lang="en-US" sz="1100" dirty="0"/>
           </a:p>
           <a:p>
-            <a:pPr indent="0" marL="0">
+            <a:pPr marL="0" indent="0">
               <a:buNone/>
             </a:pPr>
             <a:r>
@@ -3090,13 +2832,20 @@
             <a:prstDash val="solid"/>
           </a:ln>
           <a:effectLst>
-            <a:outerShdw sx="100000" sy="100000" kx="0" ky="0" algn="bl" rotWithShape="0" blurRad="50800" dist="25400" dir="8100000">
+            <a:outerShdw blurRad="50800" dist="25400" dir="8100000" algn="bl" rotWithShape="0">
               <a:srgbClr val="000000">
                 <a:alpha val="12000"/>
               </a:srgbClr>
             </a:outerShdw>
           </a:effectLst>
         </p:spPr>
+        <p:txBody>
+          <a:bodyPr/>
+          <a:lstStyle/>
+          <a:p>
+            <a:endParaRPr lang="zh-TW" altLang="en-US"/>
+          </a:p>
+        </p:txBody>
       </p:sp>
       <p:sp>
         <p:nvSpPr>
@@ -3119,7 +2868,7 @@
           <a:bodyPr wrap="square" lIns="0" tIns="0" rIns="0" bIns="0" rtlCol="0" anchor="ctr"/>
           <a:lstStyle/>
           <a:p>
-            <a:pPr indent="0" marL="0">
+            <a:pPr marL="0" indent="0">
               <a:buNone/>
             </a:pPr>
             <a:r>
@@ -3156,6 +2905,13 @@
           </a:solidFill>
           <a:ln/>
         </p:spPr>
+        <p:txBody>
+          <a:bodyPr/>
+          <a:lstStyle/>
+          <a:p>
+            <a:endParaRPr lang="zh-TW" altLang="en-US"/>
+          </a:p>
+        </p:txBody>
       </p:sp>
       <p:sp>
         <p:nvSpPr>
@@ -3178,7 +2934,7 @@
           <a:bodyPr wrap="square" lIns="0" tIns="0" rIns="0" bIns="0" rtlCol="0" anchor="ctr"/>
           <a:lstStyle/>
           <a:p>
-            <a:pPr indent="0" marL="0">
+            <a:pPr marL="0" indent="0">
               <a:buNone/>
             </a:pPr>
             <a:r>
@@ -3215,6 +2971,13 @@
           </a:solidFill>
           <a:ln/>
         </p:spPr>
+        <p:txBody>
+          <a:bodyPr/>
+          <a:lstStyle/>
+          <a:p>
+            <a:endParaRPr lang="zh-TW" altLang="en-US"/>
+          </a:p>
+        </p:txBody>
       </p:sp>
       <p:sp>
         <p:nvSpPr>
@@ -3237,7 +3000,7 @@
           <a:bodyPr wrap="square" lIns="0" tIns="0" rIns="0" bIns="0" rtlCol="0" anchor="ctr"/>
           <a:lstStyle/>
           <a:p>
-            <a:pPr indent="0" marL="0">
+            <a:pPr marL="0" indent="0">
               <a:buNone/>
             </a:pPr>
             <a:r>
@@ -3254,7 +3017,7 @@
             <a:endParaRPr lang="en-US" sz="1100" dirty="0"/>
           </a:p>
           <a:p>
-            <a:pPr indent="0" marL="0">
+            <a:pPr marL="0" indent="0">
               <a:buNone/>
             </a:pPr>
             <a:r>
@@ -3271,7 +3034,7 @@
             <a:endParaRPr lang="en-US" sz="1100" dirty="0"/>
           </a:p>
           <a:p>
-            <a:pPr indent="0" marL="0">
+            <a:pPr marL="0" indent="0">
               <a:buNone/>
             </a:pPr>
             <a:r>
@@ -3313,13 +3076,20 @@
             <a:prstDash val="solid"/>
           </a:ln>
           <a:effectLst>
-            <a:outerShdw sx="100000" sy="100000" kx="0" ky="0" algn="bl" rotWithShape="0" blurRad="50800" dist="25400" dir="8100000">
+            <a:outerShdw blurRad="50800" dist="25400" dir="8100000" algn="bl" rotWithShape="0">
               <a:srgbClr val="000000">
                 <a:alpha val="12000"/>
               </a:srgbClr>
             </a:outerShdw>
           </a:effectLst>
         </p:spPr>
+        <p:txBody>
+          <a:bodyPr/>
+          <a:lstStyle/>
+          <a:p>
+            <a:endParaRPr lang="zh-TW" altLang="en-US"/>
+          </a:p>
+        </p:txBody>
       </p:sp>
       <p:sp>
         <p:nvSpPr>
@@ -3342,7 +3112,7 @@
           <a:bodyPr wrap="square" lIns="0" tIns="0" rIns="0" bIns="0" rtlCol="0" anchor="ctr"/>
           <a:lstStyle/>
           <a:p>
-            <a:pPr indent="0" marL="0">
+            <a:pPr marL="0" indent="0">
               <a:buNone/>
             </a:pPr>
             <a:r>
@@ -3379,6 +3149,13 @@
           </a:solidFill>
           <a:ln/>
         </p:spPr>
+        <p:txBody>
+          <a:bodyPr/>
+          <a:lstStyle/>
+          <a:p>
+            <a:endParaRPr lang="zh-TW" altLang="en-US"/>
+          </a:p>
+        </p:txBody>
       </p:sp>
       <p:sp>
         <p:nvSpPr>
@@ -3401,7 +3178,7 @@
           <a:bodyPr wrap="square" lIns="0" tIns="0" rIns="0" bIns="0" rtlCol="0" anchor="ctr"/>
           <a:lstStyle/>
           <a:p>
-            <a:pPr indent="0" marL="0">
+            <a:pPr marL="0" indent="0">
               <a:buNone/>
             </a:pPr>
             <a:r>
@@ -3438,6 +3215,13 @@
           </a:solidFill>
           <a:ln/>
         </p:spPr>
+        <p:txBody>
+          <a:bodyPr/>
+          <a:lstStyle/>
+          <a:p>
+            <a:endParaRPr lang="zh-TW" altLang="en-US"/>
+          </a:p>
+        </p:txBody>
       </p:sp>
       <p:sp>
         <p:nvSpPr>
@@ -3460,7 +3244,7 @@
           <a:bodyPr wrap="square" lIns="0" tIns="0" rIns="0" bIns="0" rtlCol="0" anchor="ctr"/>
           <a:lstStyle/>
           <a:p>
-            <a:pPr indent="0" marL="0">
+            <a:pPr marL="0" indent="0">
               <a:buNone/>
             </a:pPr>
             <a:r>
@@ -3477,7 +3261,7 @@
             <a:endParaRPr lang="en-US" sz="1100" dirty="0"/>
           </a:p>
           <a:p>
-            <a:pPr indent="0" marL="0">
+            <a:pPr marL="0" indent="0">
               <a:buNone/>
             </a:pPr>
             <a:r>
@@ -3539,6 +3323,13 @@
           </a:solidFill>
           <a:ln/>
         </p:spPr>
+        <p:txBody>
+          <a:bodyPr/>
+          <a:lstStyle/>
+          <a:p>
+            <a:endParaRPr lang="zh-TW" altLang="en-US"/>
+          </a:p>
+        </p:txBody>
       </p:sp>
       <p:sp>
         <p:nvSpPr>
@@ -3561,9 +3352,6 @@
           <a:bodyPr wrap="square" lIns="0" tIns="0" rIns="0" bIns="0" rtlCol="0" anchor="ctr"/>
           <a:lstStyle/>
           <a:p>
-            <a:pPr indent="0" marL="0">
-              <a:buNone/>
-            </a:pPr>
             <a:r>
               <a:rPr lang="en-US" sz="2800" b="1" dirty="0">
                 <a:solidFill>
@@ -3573,7 +3361,84 @@
                 <a:ea typeface="Microsoft JhengHei" pitchFamily="34" charset="-122"/>
                 <a:cs typeface="Microsoft JhengHei" pitchFamily="34" charset="-120"/>
               </a:rPr>
-              <a:t>完整 Prompt 展示</a:t>
+              <a:t>完整 Prompt </a:t>
+            </a:r>
+            <a:r>
+              <a:rPr lang="en-US" sz="2800" b="1" dirty="0" err="1">
+                <a:solidFill>
+                  <a:srgbClr val="FFFFFF"/>
+                </a:solidFill>
+                <a:latin typeface="Microsoft JhengHei" pitchFamily="34" charset="0"/>
+                <a:ea typeface="Microsoft JhengHei" pitchFamily="34" charset="-122"/>
+                <a:cs typeface="Microsoft JhengHei" pitchFamily="34" charset="-120"/>
+              </a:rPr>
+              <a:t>展示</a:t>
+            </a:r>
+            <a:r>
+              <a:rPr lang="zh-TW" altLang="en-US" sz="2800" b="1" dirty="0">
+                <a:solidFill>
+                  <a:srgbClr val="FFFFFF"/>
+                </a:solidFill>
+                <a:latin typeface="Microsoft JhengHei" pitchFamily="34" charset="0"/>
+                <a:ea typeface="Microsoft JhengHei" pitchFamily="34" charset="-122"/>
+                <a:cs typeface="Microsoft JhengHei" pitchFamily="34" charset="-120"/>
+              </a:rPr>
+              <a:t> </a:t>
+            </a:r>
+            <a:r>
+              <a:rPr lang="en-US" altLang="zh-TW" sz="2800" b="1" dirty="0">
+                <a:solidFill>
+                  <a:srgbClr val="FF0000"/>
+                </a:solidFill>
+                <a:latin typeface="Microsoft JhengHei" pitchFamily="34" charset="0"/>
+                <a:ea typeface="Microsoft JhengHei" pitchFamily="34" charset="-122"/>
+                <a:cs typeface="Microsoft JhengHei" pitchFamily="34" charset="-120"/>
+              </a:rPr>
+              <a:t>(</a:t>
+            </a:r>
+            <a:r>
+              <a:rPr lang="zh-TW" altLang="en-US" sz="2800" b="1" dirty="0">
+                <a:solidFill>
+                  <a:srgbClr val="FF0000"/>
+                </a:solidFill>
+                <a:latin typeface="Microsoft JhengHei" pitchFamily="34" charset="0"/>
+                <a:ea typeface="Microsoft JhengHei" pitchFamily="34" charset="-122"/>
+                <a:cs typeface="Microsoft JhengHei" pitchFamily="34" charset="-120"/>
+              </a:rPr>
+              <a:t>可以跟</a:t>
+            </a:r>
+            <a:r>
+              <a:rPr lang="en-US" altLang="zh-TW" sz="2800" b="1" dirty="0">
+                <a:solidFill>
+                  <a:srgbClr val="FF0000"/>
+                </a:solidFill>
+                <a:latin typeface="Microsoft JhengHei" pitchFamily="34" charset="0"/>
+                <a:ea typeface="Microsoft JhengHei" pitchFamily="34" charset="-122"/>
+                <a:cs typeface="Microsoft JhengHei" pitchFamily="34" charset="-120"/>
+              </a:rPr>
+              <a:t>AI</a:t>
+            </a:r>
+            <a:r>
+              <a:rPr lang="zh-TW" altLang="en-US" sz="2800" b="1" dirty="0">
+                <a:solidFill>
+                  <a:srgbClr val="FF0000"/>
+                </a:solidFill>
+                <a:latin typeface="Microsoft JhengHei" pitchFamily="34" charset="0"/>
+                <a:ea typeface="Microsoft JhengHei" pitchFamily="34" charset="-122"/>
+                <a:cs typeface="Microsoft JhengHei" pitchFamily="34" charset="-120"/>
+              </a:rPr>
+              <a:t>討論</a:t>
+            </a:r>
+            <a:r>
+              <a:rPr lang="en-US" altLang="zh-TW" sz="2800" b="1" dirty="0">
+                <a:solidFill>
+                  <a:srgbClr val="FF0000"/>
+                </a:solidFill>
+                <a:latin typeface="Microsoft JhengHei" pitchFamily="34" charset="0"/>
+                <a:ea typeface="Microsoft JhengHei" pitchFamily="34" charset="-122"/>
+                <a:cs typeface="Microsoft JhengHei" pitchFamily="34" charset="-120"/>
+              </a:rPr>
+              <a:t>)</a:t>
             </a:r>
             <a:endParaRPr lang="en-US" sz="2800" dirty="0"/>
           </a:p>
@@ -3600,7 +3465,7 @@
           <a:bodyPr wrap="square" rtlCol="0" anchor="ctr"/>
           <a:lstStyle/>
           <a:p>
-            <a:pPr algn="r" indent="0" marL="0">
+            <a:pPr marL="0" indent="0" algn="r">
               <a:buNone/>
             </a:pPr>
             <a:r>
@@ -3642,13 +3507,20 @@
             <a:prstDash val="solid"/>
           </a:ln>
           <a:effectLst>
-            <a:outerShdw sx="100000" sy="100000" kx="0" ky="0" algn="bl" rotWithShape="0" blurRad="50800" dist="25400" dir="8100000">
+            <a:outerShdw blurRad="50800" dist="25400" dir="8100000" algn="bl" rotWithShape="0">
               <a:srgbClr val="000000">
                 <a:alpha val="12000"/>
               </a:srgbClr>
             </a:outerShdw>
           </a:effectLst>
         </p:spPr>
+        <p:txBody>
+          <a:bodyPr/>
+          <a:lstStyle/>
+          <a:p>
+            <a:endParaRPr lang="zh-TW" altLang="en-US"/>
+          </a:p>
+        </p:txBody>
       </p:sp>
       <p:sp>
         <p:nvSpPr>
@@ -3669,6 +3541,13 @@
           </a:solidFill>
           <a:ln/>
         </p:spPr>
+        <p:txBody>
+          <a:bodyPr/>
+          <a:lstStyle/>
+          <a:p>
+            <a:endParaRPr lang="zh-TW" altLang="en-US"/>
+          </a:p>
+        </p:txBody>
       </p:sp>
       <p:sp>
         <p:nvSpPr>
@@ -3691,7 +3570,7 @@
           <a:bodyPr wrap="square" lIns="0" tIns="0" rIns="0" bIns="0" rtlCol="0" anchor="ctr"/>
           <a:lstStyle/>
           <a:p>
-            <a:pPr indent="0" marL="0">
+            <a:pPr marL="0" indent="0">
               <a:buNone/>
             </a:pPr>
             <a:r>
@@ -3730,7 +3609,7 @@
           <a:bodyPr wrap="square" lIns="0" tIns="0" rIns="0" bIns="0" rtlCol="0" anchor="ctr"/>
           <a:lstStyle/>
           <a:p>
-            <a:pPr indent="0" marL="0">
+            <a:pPr marL="0" indent="0">
               <a:buNone/>
             </a:pPr>
             <a:r>
@@ -3747,7 +3626,7 @@
             <a:endParaRPr lang="en-US" sz="1100" dirty="0"/>
           </a:p>
           <a:p>
-            <a:pPr indent="0" marL="0">
+            <a:pPr marL="0" indent="0">
               <a:buNone/>
             </a:pPr>
             <a:r>
@@ -3789,13 +3668,20 @@
             <a:prstDash val="solid"/>
           </a:ln>
           <a:effectLst>
-            <a:outerShdw sx="100000" sy="100000" kx="0" ky="0" algn="bl" rotWithShape="0" blurRad="50800" dist="25400" dir="8100000">
+            <a:outerShdw blurRad="50800" dist="25400" dir="8100000" algn="bl" rotWithShape="0">
               <a:srgbClr val="000000">
                 <a:alpha val="12000"/>
               </a:srgbClr>
             </a:outerShdw>
           </a:effectLst>
         </p:spPr>
+        <p:txBody>
+          <a:bodyPr/>
+          <a:lstStyle/>
+          <a:p>
+            <a:endParaRPr lang="zh-TW" altLang="en-US"/>
+          </a:p>
+        </p:txBody>
       </p:sp>
       <p:sp>
         <p:nvSpPr>
@@ -3816,6 +3702,13 @@
           </a:solidFill>
           <a:ln/>
         </p:spPr>
+        <p:txBody>
+          <a:bodyPr/>
+          <a:lstStyle/>
+          <a:p>
+            <a:endParaRPr lang="zh-TW" altLang="en-US"/>
+          </a:p>
+        </p:txBody>
       </p:sp>
       <p:sp>
         <p:nvSpPr>
@@ -3838,7 +3731,7 @@
           <a:bodyPr wrap="square" lIns="0" tIns="0" rIns="0" bIns="0" rtlCol="0" anchor="ctr"/>
           <a:lstStyle/>
           <a:p>
-            <a:pPr indent="0" marL="0">
+            <a:pPr marL="0" indent="0">
               <a:buNone/>
             </a:pPr>
             <a:r>
@@ -3877,7 +3770,7 @@
           <a:bodyPr wrap="square" lIns="0" tIns="0" rIns="0" bIns="0" rtlCol="0" anchor="ctr"/>
           <a:lstStyle/>
           <a:p>
-            <a:pPr indent="0" marL="0">
+            <a:pPr marL="0" indent="0">
               <a:buNone/>
             </a:pPr>
             <a:r>
@@ -3894,7 +3787,7 @@
             <a:endParaRPr lang="en-US" sz="1100" dirty="0"/>
           </a:p>
           <a:p>
-            <a:pPr indent="0" marL="0">
+            <a:pPr marL="0" indent="0">
               <a:buNone/>
             </a:pPr>
             <a:r>
@@ -3936,13 +3829,20 @@
             <a:prstDash val="solid"/>
           </a:ln>
           <a:effectLst>
-            <a:outerShdw sx="100000" sy="100000" kx="0" ky="0" algn="bl" rotWithShape="0" blurRad="50800" dist="25400" dir="8100000">
+            <a:outerShdw blurRad="50800" dist="25400" dir="8100000" algn="bl" rotWithShape="0">
               <a:srgbClr val="000000">
                 <a:alpha val="12000"/>
               </a:srgbClr>
             </a:outerShdw>
           </a:effectLst>
         </p:spPr>
+        <p:txBody>
+          <a:bodyPr/>
+          <a:lstStyle/>
+          <a:p>
+            <a:endParaRPr lang="zh-TW" altLang="en-US"/>
+          </a:p>
+        </p:txBody>
       </p:sp>
       <p:sp>
         <p:nvSpPr>
@@ -3963,6 +3863,13 @@
           </a:solidFill>
           <a:ln/>
         </p:spPr>
+        <p:txBody>
+          <a:bodyPr/>
+          <a:lstStyle/>
+          <a:p>
+            <a:endParaRPr lang="zh-TW" altLang="en-US"/>
+          </a:p>
+        </p:txBody>
       </p:sp>
       <p:sp>
         <p:nvSpPr>
@@ -3985,7 +3892,7 @@
           <a:bodyPr wrap="square" lIns="0" tIns="0" rIns="0" bIns="0" rtlCol="0" anchor="ctr"/>
           <a:lstStyle/>
           <a:p>
-            <a:pPr indent="0" marL="0">
+            <a:pPr marL="0" indent="0">
               <a:buNone/>
             </a:pPr>
             <a:r>
@@ -4024,7 +3931,7 @@
           <a:bodyPr wrap="square" lIns="0" tIns="0" rIns="0" bIns="0" rtlCol="0" anchor="ctr"/>
           <a:lstStyle/>
           <a:p>
-            <a:pPr indent="0" marL="0">
+            <a:pPr marL="0" indent="0">
               <a:buNone/>
             </a:pPr>
             <a:r>
@@ -4041,7 +3948,7 @@
             <a:endParaRPr lang="en-US" sz="1100" dirty="0"/>
           </a:p>
           <a:p>
-            <a:pPr indent="0" marL="0">
+            <a:pPr marL="0" indent="0">
               <a:buNone/>
             </a:pPr>
             <a:r>
@@ -4083,13 +3990,20 @@
             <a:prstDash val="solid"/>
           </a:ln>
           <a:effectLst>
-            <a:outerShdw sx="100000" sy="100000" kx="0" ky="0" algn="bl" rotWithShape="0" blurRad="50800" dist="25400" dir="8100000">
+            <a:outerShdw blurRad="50800" dist="25400" dir="8100000" algn="bl" rotWithShape="0">
               <a:srgbClr val="000000">
                 <a:alpha val="12000"/>
               </a:srgbClr>
             </a:outerShdw>
           </a:effectLst>
         </p:spPr>
+        <p:txBody>
+          <a:bodyPr/>
+          <a:lstStyle/>
+          <a:p>
+            <a:endParaRPr lang="zh-TW" altLang="en-US"/>
+          </a:p>
+        </p:txBody>
       </p:sp>
       <p:sp>
         <p:nvSpPr>
@@ -4110,6 +4024,13 @@
           </a:solidFill>
           <a:ln/>
         </p:spPr>
+        <p:txBody>
+          <a:bodyPr/>
+          <a:lstStyle/>
+          <a:p>
+            <a:endParaRPr lang="zh-TW" altLang="en-US"/>
+          </a:p>
+        </p:txBody>
       </p:sp>
       <p:sp>
         <p:nvSpPr>
@@ -4132,7 +4053,7 @@
           <a:bodyPr wrap="square" lIns="0" tIns="0" rIns="0" bIns="0" rtlCol="0" anchor="ctr"/>
           <a:lstStyle/>
           <a:p>
-            <a:pPr indent="0" marL="0">
+            <a:pPr marL="0" indent="0">
               <a:buNone/>
             </a:pPr>
             <a:r>
@@ -4171,7 +4092,7 @@
           <a:bodyPr wrap="square" lIns="0" tIns="0" rIns="0" bIns="0" rtlCol="0" anchor="ctr"/>
           <a:lstStyle/>
           <a:p>
-            <a:pPr indent="0" marL="0">
+            <a:pPr marL="0" indent="0">
               <a:buNone/>
             </a:pPr>
             <a:r>
@@ -4213,13 +4134,20 @@
             <a:prstDash val="solid"/>
           </a:ln>
           <a:effectLst>
-            <a:outerShdw sx="100000" sy="100000" kx="0" ky="0" algn="bl" rotWithShape="0" blurRad="50800" dist="25400" dir="8100000">
+            <a:outerShdw blurRad="50800" dist="25400" dir="8100000" algn="bl" rotWithShape="0">
               <a:srgbClr val="000000">
                 <a:alpha val="12000"/>
               </a:srgbClr>
             </a:outerShdw>
           </a:effectLst>
         </p:spPr>
+        <p:txBody>
+          <a:bodyPr/>
+          <a:lstStyle/>
+          <a:p>
+            <a:endParaRPr lang="zh-TW" altLang="en-US"/>
+          </a:p>
+        </p:txBody>
       </p:sp>
       <p:sp>
         <p:nvSpPr>
@@ -4240,6 +4168,13 @@
           </a:solidFill>
           <a:ln/>
         </p:spPr>
+        <p:txBody>
+          <a:bodyPr/>
+          <a:lstStyle/>
+          <a:p>
+            <a:endParaRPr lang="zh-TW" altLang="en-US"/>
+          </a:p>
+        </p:txBody>
       </p:sp>
       <p:sp>
         <p:nvSpPr>
@@ -4262,7 +4197,7 @@
           <a:bodyPr wrap="square" lIns="0" tIns="0" rIns="0" bIns="0" rtlCol="0" anchor="ctr"/>
           <a:lstStyle/>
           <a:p>
-            <a:pPr indent="0" marL="0">
+            <a:pPr marL="0" indent="0">
               <a:buNone/>
             </a:pPr>
             <a:r>
@@ -4301,7 +4236,7 @@
           <a:bodyPr wrap="square" lIns="0" tIns="0" rIns="0" bIns="0" rtlCol="0" anchor="ctr"/>
           <a:lstStyle/>
           <a:p>
-            <a:pPr indent="0" marL="0">
+            <a:pPr marL="0" indent="0">
               <a:buNone/>
             </a:pPr>
             <a:r>
@@ -4318,7 +4253,7 @@
             <a:endParaRPr lang="en-US" sz="1100" dirty="0"/>
           </a:p>
           <a:p>
-            <a:pPr indent="0" marL="0">
+            <a:pPr marL="0" indent="0">
               <a:buNone/>
             </a:pPr>
             <a:r>
@@ -4360,13 +4295,20 @@
             <a:prstDash val="solid"/>
           </a:ln>
           <a:effectLst>
-            <a:outerShdw sx="100000" sy="100000" kx="0" ky="0" algn="bl" rotWithShape="0" blurRad="50800" dist="25400" dir="8100000">
+            <a:outerShdw blurRad="50800" dist="25400" dir="8100000" algn="bl" rotWithShape="0">
               <a:srgbClr val="000000">
                 <a:alpha val="12000"/>
               </a:srgbClr>
             </a:outerShdw>
           </a:effectLst>
         </p:spPr>
+        <p:txBody>
+          <a:bodyPr/>
+          <a:lstStyle/>
+          <a:p>
+            <a:endParaRPr lang="zh-TW" altLang="en-US"/>
+          </a:p>
+        </p:txBody>
       </p:sp>
       <p:sp>
         <p:nvSpPr>
@@ -4387,6 +4329,13 @@
           </a:solidFill>
           <a:ln/>
         </p:spPr>
+        <p:txBody>
+          <a:bodyPr/>
+          <a:lstStyle/>
+          <a:p>
+            <a:endParaRPr lang="zh-TW" altLang="en-US"/>
+          </a:p>
+        </p:txBody>
       </p:sp>
       <p:sp>
         <p:nvSpPr>
@@ -4409,7 +4358,7 @@
           <a:bodyPr wrap="square" lIns="0" tIns="0" rIns="0" bIns="0" rtlCol="0" anchor="ctr"/>
           <a:lstStyle/>
           <a:p>
-            <a:pPr indent="0" marL="0">
+            <a:pPr marL="0" indent="0">
               <a:buNone/>
             </a:pPr>
             <a:r>
@@ -4448,7 +4397,7 @@
           <a:bodyPr wrap="square" lIns="0" tIns="0" rIns="0" bIns="0" rtlCol="0" anchor="ctr"/>
           <a:lstStyle/>
           <a:p>
-            <a:pPr indent="0" marL="0">
+            <a:pPr marL="0" indent="0">
               <a:buNone/>
             </a:pPr>
             <a:r>
@@ -4465,7 +4414,7 @@
             <a:endParaRPr lang="en-US" sz="1100" dirty="0"/>
           </a:p>
           <a:p>
-            <a:pPr indent="0" marL="0">
+            <a:pPr marL="0" indent="0">
               <a:buNone/>
             </a:pPr>
             <a:r>
@@ -4527,6 +4476,13 @@
           </a:solidFill>
           <a:ln/>
         </p:spPr>
+        <p:txBody>
+          <a:bodyPr/>
+          <a:lstStyle/>
+          <a:p>
+            <a:endParaRPr lang="zh-TW" altLang="en-US"/>
+          </a:p>
+        </p:txBody>
       </p:sp>
       <p:sp>
         <p:nvSpPr>
@@ -4549,7 +4505,7 @@
           <a:bodyPr wrap="square" lIns="0" tIns="0" rIns="0" bIns="0" rtlCol="0" anchor="ctr"/>
           <a:lstStyle/>
           <a:p>
-            <a:pPr indent="0" marL="0">
+            <a:pPr marL="0" indent="0">
               <a:buNone/>
             </a:pPr>
             <a:r>
@@ -4588,7 +4544,7 @@
           <a:bodyPr wrap="square" rtlCol="0" anchor="ctr"/>
           <a:lstStyle/>
           <a:p>
-            <a:pPr algn="r" indent="0" marL="0">
+            <a:pPr marL="0" indent="0" algn="r">
               <a:buNone/>
             </a:pPr>
             <a:r>
@@ -4627,7 +4583,7 @@
           <a:bodyPr wrap="square" lIns="0" tIns="0" rIns="0" bIns="0" rtlCol="0" anchor="ctr"/>
           <a:lstStyle/>
           <a:p>
-            <a:pPr indent="0" marL="0">
+            <a:pPr marL="0" indent="0">
               <a:buNone/>
             </a:pPr>
             <a:r>
@@ -4664,13 +4620,20 @@
           </a:solidFill>
           <a:ln/>
           <a:effectLst>
-            <a:outerShdw sx="100000" sy="100000" kx="0" ky="0" algn="bl" rotWithShape="0" blurRad="50800" dist="25400" dir="8100000">
+            <a:outerShdw blurRad="50800" dist="25400" dir="8100000" algn="bl" rotWithShape="0">
               <a:srgbClr val="000000">
                 <a:alpha val="12000"/>
               </a:srgbClr>
             </a:outerShdw>
           </a:effectLst>
         </p:spPr>
+        <p:txBody>
+          <a:bodyPr/>
+          <a:lstStyle/>
+          <a:p>
+            <a:endParaRPr lang="zh-TW" altLang="en-US"/>
+          </a:p>
+        </p:txBody>
       </p:sp>
       <p:sp>
         <p:nvSpPr>
@@ -4693,7 +4656,7 @@
           <a:bodyPr wrap="square" lIns="0" tIns="0" rIns="0" bIns="0" rtlCol="0" anchor="ctr"/>
           <a:lstStyle/>
           <a:p>
-            <a:pPr indent="0" marL="0">
+            <a:pPr marL="0" indent="0">
               <a:buNone/>
             </a:pPr>
             <a:r>
@@ -4710,13 +4673,13 @@
             <a:endParaRPr lang="en-US" sz="1100" dirty="0"/>
           </a:p>
           <a:p>
-            <a:pPr indent="0" marL="0">
+            <a:pPr marL="0" indent="0">
               <a:buNone/>
             </a:pPr>
             <a:endParaRPr lang="en-US" sz="1100" dirty="0"/>
           </a:p>
           <a:p>
-            <a:pPr indent="0" marL="0">
+            <a:pPr marL="0" indent="0">
               <a:buNone/>
             </a:pPr>
             <a:r>
@@ -4733,7 +4696,7 @@
             <a:endParaRPr lang="en-US" sz="1100" dirty="0"/>
           </a:p>
           <a:p>
-            <a:pPr indent="0" marL="0">
+            <a:pPr marL="0" indent="0">
               <a:buNone/>
             </a:pPr>
             <a:r>
@@ -4750,13 +4713,13 @@
             <a:endParaRPr lang="en-US" sz="1100" dirty="0"/>
           </a:p>
           <a:p>
-            <a:pPr indent="0" marL="0">
+            <a:pPr marL="0" indent="0">
               <a:buNone/>
             </a:pPr>
             <a:endParaRPr lang="en-US" sz="1100" dirty="0"/>
           </a:p>
           <a:p>
-            <a:pPr indent="0" marL="0">
+            <a:pPr marL="0" indent="0">
               <a:buNone/>
             </a:pPr>
             <a:r>
@@ -4773,13 +4736,13 @@
             <a:endParaRPr lang="en-US" sz="1100" dirty="0"/>
           </a:p>
           <a:p>
-            <a:pPr indent="0" marL="0">
+            <a:pPr marL="0" indent="0">
               <a:buNone/>
             </a:pPr>
             <a:endParaRPr lang="en-US" sz="1100" dirty="0"/>
           </a:p>
           <a:p>
-            <a:pPr indent="0" marL="0">
+            <a:pPr marL="0" indent="0">
               <a:buNone/>
             </a:pPr>
             <a:r>
@@ -4796,7 +4759,7 @@
             <a:endParaRPr lang="en-US" sz="1100" dirty="0"/>
           </a:p>
           <a:p>
-            <a:pPr indent="0" marL="0">
+            <a:pPr marL="0" indent="0">
               <a:buNone/>
             </a:pPr>
             <a:r>
@@ -4813,13 +4776,13 @@
             <a:endParaRPr lang="en-US" sz="1100" dirty="0"/>
           </a:p>
           <a:p>
-            <a:pPr indent="0" marL="0">
+            <a:pPr marL="0" indent="0">
               <a:buNone/>
             </a:pPr>
             <a:endParaRPr lang="en-US" sz="1100" dirty="0"/>
           </a:p>
           <a:p>
-            <a:pPr indent="0" marL="0">
+            <a:pPr marL="0" indent="0">
               <a:buNone/>
             </a:pPr>
             <a:r>
@@ -4836,13 +4799,13 @@
             <a:endParaRPr lang="en-US" sz="1100" dirty="0"/>
           </a:p>
           <a:p>
-            <a:pPr indent="0" marL="0">
+            <a:pPr marL="0" indent="0">
               <a:buNone/>
             </a:pPr>
             <a:endParaRPr lang="en-US" sz="1100" dirty="0"/>
           </a:p>
           <a:p>
-            <a:pPr indent="0" marL="0">
+            <a:pPr marL="0" indent="0">
               <a:buNone/>
             </a:pPr>
             <a:r>
@@ -4904,6 +4867,13 @@
           </a:solidFill>
           <a:ln/>
         </p:spPr>
+        <p:txBody>
+          <a:bodyPr/>
+          <a:lstStyle/>
+          <a:p>
+            <a:endParaRPr lang="zh-TW" altLang="en-US"/>
+          </a:p>
+        </p:txBody>
       </p:sp>
       <p:sp>
         <p:nvSpPr>
@@ -4926,7 +4896,7 @@
           <a:bodyPr wrap="square" lIns="0" tIns="0" rIns="0" bIns="0" rtlCol="0" anchor="ctr"/>
           <a:lstStyle/>
           <a:p>
-            <a:pPr indent="0" marL="0">
+            <a:pPr marL="0" indent="0">
               <a:buNone/>
             </a:pPr>
             <a:r>
@@ -4965,7 +4935,7 @@
           <a:bodyPr wrap="square" rtlCol="0" anchor="ctr"/>
           <a:lstStyle/>
           <a:p>
-            <a:pPr algn="r" indent="0" marL="0">
+            <a:pPr marL="0" indent="0" algn="r">
               <a:buNone/>
             </a:pPr>
             <a:r>
@@ -5004,7 +4974,7 @@
           <a:bodyPr wrap="square" lIns="0" tIns="0" rIns="0" bIns="0" rtlCol="0" anchor="ctr"/>
           <a:lstStyle/>
           <a:p>
-            <a:pPr indent="0" marL="0">
+            <a:pPr marL="0" indent="0">
               <a:buNone/>
             </a:pPr>
             <a:r>
@@ -5038,15 +5008,27 @@
         </p:nvGraphicFramePr>
         <p:xfrm>
           <a:off x="365760" y="1371600"/>
-          <a:ext cx="4114800" cy="914400"/>
+          <a:ext cx="4114800" cy="2606040"/>
         </p:xfrm>
         <a:graphic>
           <a:graphicData uri="http://schemas.openxmlformats.org/drawingml/2006/table">
             <a:tbl>
               <a:tblPr/>
               <a:tblGrid>
-                <a:gridCol w="2743200"/>
-                <a:gridCol w="1371600"/>
+                <a:gridCol w="2743200">
+                  <a:extLst>
+                    <a:ext uri="{9D8B030D-6E8A-4147-A177-3AD203B41FA5}">
+                      <a16:colId xmlns:a16="http://schemas.microsoft.com/office/drawing/2014/main" val="20000"/>
+                    </a:ext>
+                  </a:extLst>
+                </a:gridCol>
+                <a:gridCol w="1371600">
+                  <a:extLst>
+                    <a:ext uri="{9D8B030D-6E8A-4147-A177-3AD203B41FA5}">
+                      <a16:colId xmlns:a16="http://schemas.microsoft.com/office/drawing/2014/main" val="20001"/>
+                    </a:ext>
+                  </a:extLst>
+                </a:gridCol>
               </a:tblGrid>
               <a:tr h="365760">
                 <a:tc>
@@ -5054,7 +5036,7 @@
                     <a:bodyPr/>
                     <a:lstStyle/>
                     <a:p>
-                      <a:pPr algn="ctr" indent="0" marL="0">
+                      <a:pPr marL="0" indent="0" algn="ctr">
                         <a:buNone/>
                       </a:pPr>
                       <a:r>
@@ -5075,7 +5057,7 @@
                       </a:endParaRPr>
                     </a:p>
                   </a:txBody>
-                  <a:tcPr marL="91440" marR="91440" marT="45720" marB="45720" anchor="ctr">
+                  <a:tcPr anchor="ctr">
                     <a:lnL w="6350" cap="flat" cmpd="sng" algn="ctr">
                       <a:solidFill>
                         <a:srgbClr val="CCCCCC"/>
@@ -5122,7 +5104,7 @@
                     <a:bodyPr/>
                     <a:lstStyle/>
                     <a:p>
-                      <a:pPr algn="ctr" indent="0" marL="0">
+                      <a:pPr marL="0" indent="0" algn="ctr">
                         <a:buNone/>
                       </a:pPr>
                       <a:r>
@@ -5143,7 +5125,7 @@
                       </a:endParaRPr>
                     </a:p>
                   </a:txBody>
-                  <a:tcPr marL="91440" marR="91440" marT="45720" marB="45720" anchor="ctr">
+                  <a:tcPr anchor="ctr">
                     <a:lnL w="6350" cap="flat" cmpd="sng" algn="ctr">
                       <a:solidFill>
                         <a:srgbClr val="CCCCCC"/>
@@ -5185,6 +5167,11 @@
                     </a:solidFill>
                   </a:tcPr>
                 </a:tc>
+                <a:extLst>
+                  <a:ext uri="{0D108BD9-81ED-4DB2-BD59-A6C34878D82A}">
+                    <a16:rowId xmlns:a16="http://schemas.microsoft.com/office/drawing/2014/main" val="10000"/>
+                  </a:ext>
+                </a:extLst>
               </a:tr>
               <a:tr h="320040">
                 <a:tc>
@@ -5192,7 +5179,7 @@
                     <a:bodyPr/>
                     <a:lstStyle/>
                     <a:p>
-                      <a:pPr algn="ctr" indent="0" marL="0">
+                      <a:pPr marL="0" indent="0" algn="ctr">
                         <a:buNone/>
                       </a:pPr>
                       <a:r>
@@ -5213,7 +5200,7 @@
                       </a:endParaRPr>
                     </a:p>
                   </a:txBody>
-                  <a:tcPr marL="91440" marR="91440" marT="45720" marB="45720" anchor="ctr">
+                  <a:tcPr anchor="ctr">
                     <a:lnL w="6350" cap="flat" cmpd="sng" algn="ctr">
                       <a:solidFill>
                         <a:srgbClr val="CCCCCC"/>
@@ -5257,7 +5244,7 @@
                     <a:bodyPr/>
                     <a:lstStyle/>
                     <a:p>
-                      <a:pPr algn="ctr" indent="0" marL="0">
+                      <a:pPr marL="0" indent="0" algn="ctr">
                         <a:buNone/>
                       </a:pPr>
                       <a:r>
@@ -5278,7 +5265,7 @@
                       </a:endParaRPr>
                     </a:p>
                   </a:txBody>
-                  <a:tcPr marL="91440" marR="91440" marT="45720" marB="45720" anchor="ctr">
+                  <a:tcPr anchor="ctr">
                     <a:lnL w="6350" cap="flat" cmpd="sng" algn="ctr">
                       <a:solidFill>
                         <a:srgbClr val="CCCCCC"/>
@@ -5317,6 +5304,11 @@
                     </a:lnB>
                   </a:tcPr>
                 </a:tc>
+                <a:extLst>
+                  <a:ext uri="{0D108BD9-81ED-4DB2-BD59-A6C34878D82A}">
+                    <a16:rowId xmlns:a16="http://schemas.microsoft.com/office/drawing/2014/main" val="10001"/>
+                  </a:ext>
+                </a:extLst>
               </a:tr>
               <a:tr h="320040">
                 <a:tc>
@@ -5324,7 +5316,7 @@
                     <a:bodyPr/>
                     <a:lstStyle/>
                     <a:p>
-                      <a:pPr algn="ctr" indent="0" marL="0">
+                      <a:pPr marL="0" indent="0" algn="ctr">
                         <a:buNone/>
                       </a:pPr>
                       <a:r>
@@ -5345,7 +5337,7 @@
                       </a:endParaRPr>
                     </a:p>
                   </a:txBody>
-                  <a:tcPr marL="91440" marR="91440" marT="45720" marB="45720" anchor="ctr">
+                  <a:tcPr anchor="ctr">
                     <a:lnL w="6350" cap="flat" cmpd="sng" algn="ctr">
                       <a:solidFill>
                         <a:srgbClr val="CCCCCC"/>
@@ -5389,7 +5381,7 @@
                     <a:bodyPr/>
                     <a:lstStyle/>
                     <a:p>
-                      <a:pPr algn="ctr" indent="0" marL="0">
+                      <a:pPr marL="0" indent="0" algn="ctr">
                         <a:buNone/>
                       </a:pPr>
                       <a:r>
@@ -5410,7 +5402,7 @@
                       </a:endParaRPr>
                     </a:p>
                   </a:txBody>
-                  <a:tcPr marL="91440" marR="91440" marT="45720" marB="45720" anchor="ctr">
+                  <a:tcPr anchor="ctr">
                     <a:lnL w="6350" cap="flat" cmpd="sng" algn="ctr">
                       <a:solidFill>
                         <a:srgbClr val="CCCCCC"/>
@@ -5449,6 +5441,11 @@
                     </a:lnB>
                   </a:tcPr>
                 </a:tc>
+                <a:extLst>
+                  <a:ext uri="{0D108BD9-81ED-4DB2-BD59-A6C34878D82A}">
+                    <a16:rowId xmlns:a16="http://schemas.microsoft.com/office/drawing/2014/main" val="10002"/>
+                  </a:ext>
+                </a:extLst>
               </a:tr>
               <a:tr h="320040">
                 <a:tc>
@@ -5456,7 +5453,7 @@
                     <a:bodyPr/>
                     <a:lstStyle/>
                     <a:p>
-                      <a:pPr algn="ctr" indent="0" marL="0">
+                      <a:pPr marL="0" indent="0" algn="ctr">
                         <a:buNone/>
                       </a:pPr>
                       <a:r>
@@ -5477,7 +5474,7 @@
                       </a:endParaRPr>
                     </a:p>
                   </a:txBody>
-                  <a:tcPr marL="91440" marR="91440" marT="45720" marB="45720" anchor="ctr">
+                  <a:tcPr anchor="ctr">
                     <a:lnL w="6350" cap="flat" cmpd="sng" algn="ctr">
                       <a:solidFill>
                         <a:srgbClr val="CCCCCC"/>
@@ -5521,7 +5518,7 @@
                     <a:bodyPr/>
                     <a:lstStyle/>
                     <a:p>
-                      <a:pPr algn="ctr" indent="0" marL="0">
+                      <a:pPr marL="0" indent="0" algn="ctr">
                         <a:buNone/>
                       </a:pPr>
                       <a:r>
@@ -5542,7 +5539,7 @@
                       </a:endParaRPr>
                     </a:p>
                   </a:txBody>
-                  <a:tcPr marL="91440" marR="91440" marT="45720" marB="45720" anchor="ctr">
+                  <a:tcPr anchor="ctr">
                     <a:lnL w="6350" cap="flat" cmpd="sng" algn="ctr">
                       <a:solidFill>
                         <a:srgbClr val="CCCCCC"/>
@@ -5581,6 +5578,11 @@
                     </a:lnB>
                   </a:tcPr>
                 </a:tc>
+                <a:extLst>
+                  <a:ext uri="{0D108BD9-81ED-4DB2-BD59-A6C34878D82A}">
+                    <a16:rowId xmlns:a16="http://schemas.microsoft.com/office/drawing/2014/main" val="10003"/>
+                  </a:ext>
+                </a:extLst>
               </a:tr>
               <a:tr h="320040">
                 <a:tc>
@@ -5588,7 +5590,7 @@
                     <a:bodyPr/>
                     <a:lstStyle/>
                     <a:p>
-                      <a:pPr algn="ctr" indent="0" marL="0">
+                      <a:pPr marL="0" indent="0" algn="ctr">
                         <a:buNone/>
                       </a:pPr>
                       <a:r>
@@ -5609,7 +5611,7 @@
                       </a:endParaRPr>
                     </a:p>
                   </a:txBody>
-                  <a:tcPr marL="91440" marR="91440" marT="45720" marB="45720" anchor="ctr">
+                  <a:tcPr anchor="ctr">
                     <a:lnL w="6350" cap="flat" cmpd="sng" algn="ctr">
                       <a:solidFill>
                         <a:srgbClr val="CCCCCC"/>
@@ -5653,7 +5655,7 @@
                     <a:bodyPr/>
                     <a:lstStyle/>
                     <a:p>
-                      <a:pPr algn="ctr" indent="0" marL="0">
+                      <a:pPr marL="0" indent="0" algn="ctr">
                         <a:buNone/>
                       </a:pPr>
                       <a:r>
@@ -5674,7 +5676,7 @@
                       </a:endParaRPr>
                     </a:p>
                   </a:txBody>
-                  <a:tcPr marL="91440" marR="91440" marT="45720" marB="45720" anchor="ctr">
+                  <a:tcPr anchor="ctr">
                     <a:lnL w="6350" cap="flat" cmpd="sng" algn="ctr">
                       <a:solidFill>
                         <a:srgbClr val="CCCCCC"/>
@@ -5713,6 +5715,11 @@
                     </a:lnB>
                   </a:tcPr>
                 </a:tc>
+                <a:extLst>
+                  <a:ext uri="{0D108BD9-81ED-4DB2-BD59-A6C34878D82A}">
+                    <a16:rowId xmlns:a16="http://schemas.microsoft.com/office/drawing/2014/main" val="10004"/>
+                  </a:ext>
+                </a:extLst>
               </a:tr>
               <a:tr h="320040">
                 <a:tc>
@@ -5720,7 +5727,7 @@
                     <a:bodyPr/>
                     <a:lstStyle/>
                     <a:p>
-                      <a:pPr algn="ctr" indent="0" marL="0">
+                      <a:pPr marL="0" indent="0" algn="ctr">
                         <a:buNone/>
                       </a:pPr>
                       <a:r>
@@ -5741,7 +5748,7 @@
                       </a:endParaRPr>
                     </a:p>
                   </a:txBody>
-                  <a:tcPr marL="91440" marR="91440" marT="45720" marB="45720" anchor="ctr">
+                  <a:tcPr anchor="ctr">
                     <a:lnL w="6350" cap="flat" cmpd="sng" algn="ctr">
                       <a:solidFill>
                         <a:srgbClr val="CCCCCC"/>
@@ -5785,7 +5792,7 @@
                     <a:bodyPr/>
                     <a:lstStyle/>
                     <a:p>
-                      <a:pPr algn="ctr" indent="0" marL="0">
+                      <a:pPr marL="0" indent="0" algn="ctr">
                         <a:buNone/>
                       </a:pPr>
                       <a:r>
@@ -5806,7 +5813,7 @@
                       </a:endParaRPr>
                     </a:p>
                   </a:txBody>
-                  <a:tcPr marL="91440" marR="91440" marT="45720" marB="45720" anchor="ctr">
+                  <a:tcPr anchor="ctr">
                     <a:lnL w="6350" cap="flat" cmpd="sng" algn="ctr">
                       <a:solidFill>
                         <a:srgbClr val="CCCCCC"/>
@@ -5845,6 +5852,11 @@
                     </a:lnB>
                   </a:tcPr>
                 </a:tc>
+                <a:extLst>
+                  <a:ext uri="{0D108BD9-81ED-4DB2-BD59-A6C34878D82A}">
+                    <a16:rowId xmlns:a16="http://schemas.microsoft.com/office/drawing/2014/main" val="10005"/>
+                  </a:ext>
+                </a:extLst>
               </a:tr>
               <a:tr h="320040">
                 <a:tc>
@@ -5852,7 +5864,7 @@
                     <a:bodyPr/>
                     <a:lstStyle/>
                     <a:p>
-                      <a:pPr algn="ctr" indent="0" marL="0">
+                      <a:pPr marL="0" indent="0" algn="ctr">
                         <a:buNone/>
                       </a:pPr>
                       <a:r>
@@ -5873,7 +5885,7 @@
                       </a:endParaRPr>
                     </a:p>
                   </a:txBody>
-                  <a:tcPr marL="91440" marR="91440" marT="45720" marB="45720" anchor="ctr">
+                  <a:tcPr anchor="ctr">
                     <a:lnL w="6350" cap="flat" cmpd="sng" algn="ctr">
                       <a:solidFill>
                         <a:srgbClr val="CCCCCC"/>
@@ -5917,7 +5929,7 @@
                     <a:bodyPr/>
                     <a:lstStyle/>
                     <a:p>
-                      <a:pPr algn="ctr" indent="0" marL="0">
+                      <a:pPr marL="0" indent="0" algn="ctr">
                         <a:buNone/>
                       </a:pPr>
                       <a:r>
@@ -5938,7 +5950,7 @@
                       </a:endParaRPr>
                     </a:p>
                   </a:txBody>
-                  <a:tcPr marL="91440" marR="91440" marT="45720" marB="45720" anchor="ctr">
+                  <a:tcPr anchor="ctr">
                     <a:lnL w="6350" cap="flat" cmpd="sng" algn="ctr">
                       <a:solidFill>
                         <a:srgbClr val="CCCCCC"/>
@@ -5977,6 +5989,11 @@
                     </a:lnB>
                   </a:tcPr>
                 </a:tc>
+                <a:extLst>
+                  <a:ext uri="{0D108BD9-81ED-4DB2-BD59-A6C34878D82A}">
+                    <a16:rowId xmlns:a16="http://schemas.microsoft.com/office/drawing/2014/main" val="10006"/>
+                  </a:ext>
+                </a:extLst>
               </a:tr>
               <a:tr h="320040">
                 <a:tc>
@@ -5984,7 +6001,7 @@
                     <a:bodyPr/>
                     <a:lstStyle/>
                     <a:p>
-                      <a:pPr algn="ctr" indent="0" marL="0">
+                      <a:pPr marL="0" indent="0" algn="ctr">
                         <a:buNone/>
                       </a:pPr>
                       <a:r>
@@ -6005,7 +6022,7 @@
                       </a:endParaRPr>
                     </a:p>
                   </a:txBody>
-                  <a:tcPr marL="91440" marR="91440" marT="45720" marB="45720" anchor="ctr">
+                  <a:tcPr anchor="ctr">
                     <a:lnL w="6350" cap="flat" cmpd="sng" algn="ctr">
                       <a:solidFill>
                         <a:srgbClr val="CCCCCC"/>
@@ -6049,7 +6066,7 @@
                     <a:bodyPr/>
                     <a:lstStyle/>
                     <a:p>
-                      <a:pPr algn="ctr" indent="0" marL="0">
+                      <a:pPr marL="0" indent="0" algn="ctr">
                         <a:buNone/>
                       </a:pPr>
                       <a:r>
@@ -6070,7 +6087,7 @@
                       </a:endParaRPr>
                     </a:p>
                   </a:txBody>
-                  <a:tcPr marL="91440" marR="91440" marT="45720" marB="45720" anchor="ctr">
+                  <a:tcPr anchor="ctr">
                     <a:lnL w="6350" cap="flat" cmpd="sng" algn="ctr">
                       <a:solidFill>
                         <a:srgbClr val="CCCCCC"/>
@@ -6109,6 +6126,11 @@
                     </a:lnB>
                   </a:tcPr>
                 </a:tc>
+                <a:extLst>
+                  <a:ext uri="{0D108BD9-81ED-4DB2-BD59-A6C34878D82A}">
+                    <a16:rowId xmlns:a16="http://schemas.microsoft.com/office/drawing/2014/main" val="10007"/>
+                  </a:ext>
+                </a:extLst>
               </a:tr>
             </a:tbl>
           </a:graphicData>
@@ -6135,7 +6157,7 @@
           <a:bodyPr wrap="square" lIns="0" tIns="0" rIns="0" bIns="0" rtlCol="0" anchor="ctr"/>
           <a:lstStyle/>
           <a:p>
-            <a:pPr indent="0" marL="0">
+            <a:pPr marL="0" indent="0">
               <a:buNone/>
             </a:pPr>
             <a:r>
@@ -6177,13 +6199,20 @@
             <a:prstDash val="solid"/>
           </a:ln>
           <a:effectLst>
-            <a:outerShdw sx="100000" sy="100000" kx="0" ky="0" algn="bl" rotWithShape="0" blurRad="50800" dist="25400" dir="8100000">
+            <a:outerShdw blurRad="50800" dist="25400" dir="8100000" algn="bl" rotWithShape="0">
               <a:srgbClr val="000000">
                 <a:alpha val="12000"/>
               </a:srgbClr>
             </a:outerShdw>
           </a:effectLst>
         </p:spPr>
+        <p:txBody>
+          <a:bodyPr/>
+          <a:lstStyle/>
+          <a:p>
+            <a:endParaRPr lang="zh-TW" altLang="en-US"/>
+          </a:p>
+        </p:txBody>
       </p:sp>
       <p:sp>
         <p:nvSpPr>
@@ -6336,7 +6365,7 @@
           <a:bodyPr wrap="square" lIns="0" tIns="0" rIns="0" bIns="0" rtlCol="0" anchor="ctr"/>
           <a:lstStyle/>
           <a:p>
-            <a:pPr indent="0" marL="0">
+            <a:pPr marL="0" indent="0">
               <a:buNone/>
             </a:pPr>
             <a:r>
@@ -6398,6 +6427,13 @@
           </a:solidFill>
           <a:ln/>
         </p:spPr>
+        <p:txBody>
+          <a:bodyPr/>
+          <a:lstStyle/>
+          <a:p>
+            <a:endParaRPr lang="zh-TW" altLang="en-US"/>
+          </a:p>
+        </p:txBody>
       </p:sp>
       <p:sp>
         <p:nvSpPr>
@@ -6420,7 +6456,7 @@
           <a:bodyPr wrap="square" lIns="0" tIns="0" rIns="0" bIns="0" rtlCol="0" anchor="ctr"/>
           <a:lstStyle/>
           <a:p>
-            <a:pPr indent="0" marL="0">
+            <a:pPr marL="0" indent="0">
               <a:buNone/>
             </a:pPr>
             <a:r>
@@ -6459,7 +6495,7 @@
           <a:bodyPr wrap="square" rtlCol="0" anchor="ctr"/>
           <a:lstStyle/>
           <a:p>
-            <a:pPr algn="r" indent="0" marL="0">
+            <a:pPr marL="0" indent="0" algn="r">
               <a:buNone/>
             </a:pPr>
             <a:r>
@@ -6498,7 +6534,7 @@
           <a:bodyPr wrap="square" lIns="0" tIns="0" rIns="0" bIns="0" rtlCol="0" anchor="ctr"/>
           <a:lstStyle/>
           <a:p>
-            <a:pPr indent="0" marL="0">
+            <a:pPr marL="0" indent="0">
               <a:buNone/>
             </a:pPr>
             <a:r>
@@ -6535,13 +6571,20 @@
           </a:solidFill>
           <a:ln/>
           <a:effectLst>
-            <a:outerShdw sx="100000" sy="100000" kx="0" ky="0" algn="bl" rotWithShape="0" blurRad="50800" dist="25400" dir="8100000">
+            <a:outerShdw blurRad="50800" dist="25400" dir="8100000" algn="bl" rotWithShape="0">
               <a:srgbClr val="000000">
                 <a:alpha val="12000"/>
               </a:srgbClr>
             </a:outerShdw>
           </a:effectLst>
         </p:spPr>
+        <p:txBody>
+          <a:bodyPr/>
+          <a:lstStyle/>
+          <a:p>
+            <a:endParaRPr lang="zh-TW" altLang="en-US"/>
+          </a:p>
+        </p:txBody>
       </p:sp>
       <p:sp>
         <p:nvSpPr>
@@ -6564,7 +6607,7 @@
           <a:bodyPr wrap="square" lIns="0" tIns="0" rIns="0" bIns="0" rtlCol="0" anchor="ctr"/>
           <a:lstStyle/>
           <a:p>
-            <a:pPr indent="0" marL="0">
+            <a:pPr marL="0" indent="0">
               <a:buNone/>
             </a:pPr>
             <a:r>
@@ -6581,13 +6624,13 @@
             <a:endParaRPr lang="en-US" sz="1100" dirty="0"/>
           </a:p>
           <a:p>
-            <a:pPr indent="0" marL="0">
+            <a:pPr marL="0" indent="0">
               <a:buNone/>
             </a:pPr>
             <a:endParaRPr lang="en-US" sz="1100" dirty="0"/>
           </a:p>
           <a:p>
-            <a:pPr indent="0" marL="0">
+            <a:pPr marL="0" indent="0">
               <a:buNone/>
             </a:pPr>
             <a:r>
@@ -6604,7 +6647,7 @@
             <a:endParaRPr lang="en-US" sz="1100" dirty="0"/>
           </a:p>
           <a:p>
-            <a:pPr indent="0" marL="0">
+            <a:pPr marL="0" indent="0">
               <a:buNone/>
             </a:pPr>
             <a:r>
@@ -6621,7 +6664,7 @@
             <a:endParaRPr lang="en-US" sz="1100" dirty="0"/>
           </a:p>
           <a:p>
-            <a:pPr indent="0" marL="0">
+            <a:pPr marL="0" indent="0">
               <a:buNone/>
             </a:pPr>
             <a:r>
@@ -6638,7 +6681,7 @@
             <a:endParaRPr lang="en-US" sz="1100" dirty="0"/>
           </a:p>
           <a:p>
-            <a:pPr indent="0" marL="0">
+            <a:pPr marL="0" indent="0">
               <a:buNone/>
             </a:pPr>
             <a:r>
@@ -6655,7 +6698,7 @@
             <a:endParaRPr lang="en-US" sz="1100" dirty="0"/>
           </a:p>
           <a:p>
-            <a:pPr indent="0" marL="0">
+            <a:pPr marL="0" indent="0">
               <a:buNone/>
             </a:pPr>
             <a:r>
@@ -6672,7 +6715,7 @@
             <a:endParaRPr lang="en-US" sz="1100" dirty="0"/>
           </a:p>
           <a:p>
-            <a:pPr indent="0" marL="0">
+            <a:pPr marL="0" indent="0">
               <a:buNone/>
             </a:pPr>
             <a:r>
@@ -6689,7 +6732,7 @@
             <a:endParaRPr lang="en-US" sz="1100" dirty="0"/>
           </a:p>
           <a:p>
-            <a:pPr indent="0" marL="0">
+            <a:pPr marL="0" indent="0">
               <a:buNone/>
             </a:pPr>
             <a:r>
@@ -6706,7 +6749,7 @@
             <a:endParaRPr lang="en-US" sz="1100" dirty="0"/>
           </a:p>
           <a:p>
-            <a:pPr indent="0" marL="0">
+            <a:pPr marL="0" indent="0">
               <a:buNone/>
             </a:pPr>
             <a:r>
@@ -6723,7 +6766,7 @@
             <a:endParaRPr lang="en-US" sz="1100" dirty="0"/>
           </a:p>
           <a:p>
-            <a:pPr indent="0" marL="0">
+            <a:pPr marL="0" indent="0">
               <a:buNone/>
             </a:pPr>
             <a:r>
@@ -6740,7 +6783,7 @@
             <a:endParaRPr lang="en-US" sz="1100" dirty="0"/>
           </a:p>
           <a:p>
-            <a:pPr indent="0" marL="0">
+            <a:pPr marL="0" indent="0">
               <a:buNone/>
             </a:pPr>
             <a:r>
@@ -6757,13 +6800,13 @@
             <a:endParaRPr lang="en-US" sz="1100" dirty="0"/>
           </a:p>
           <a:p>
-            <a:pPr indent="0" marL="0">
+            <a:pPr marL="0" indent="0">
               <a:buNone/>
             </a:pPr>
             <a:endParaRPr lang="en-US" sz="1100" dirty="0"/>
           </a:p>
           <a:p>
-            <a:pPr indent="0" marL="0">
+            <a:pPr marL="0" indent="0">
               <a:buNone/>
             </a:pPr>
             <a:r>
@@ -6825,6 +6868,13 @@
           </a:solidFill>
           <a:ln/>
         </p:spPr>
+        <p:txBody>
+          <a:bodyPr/>
+          <a:lstStyle/>
+          <a:p>
+            <a:endParaRPr lang="zh-TW" altLang="en-US"/>
+          </a:p>
+        </p:txBody>
       </p:sp>
       <p:sp>
         <p:nvSpPr>
@@ -6847,7 +6897,7 @@
           <a:bodyPr wrap="square" lIns="0" tIns="0" rIns="0" bIns="0" rtlCol="0" anchor="ctr"/>
           <a:lstStyle/>
           <a:p>
-            <a:pPr indent="0" marL="0">
+            <a:pPr marL="0" indent="0">
               <a:buNone/>
             </a:pPr>
             <a:r>
@@ -6886,7 +6936,7 @@
           <a:bodyPr wrap="square" rtlCol="0" anchor="ctr"/>
           <a:lstStyle/>
           <a:p>
-            <a:pPr algn="r" indent="0" marL="0">
+            <a:pPr marL="0" indent="0" algn="r">
               <a:buNone/>
             </a:pPr>
             <a:r>
@@ -6925,7 +6975,7 @@
           <a:bodyPr wrap="square" lIns="0" tIns="0" rIns="0" bIns="0" rtlCol="0" anchor="ctr"/>
           <a:lstStyle/>
           <a:p>
-            <a:pPr indent="0" marL="0">
+            <a:pPr marL="0" indent="0">
               <a:buNone/>
             </a:pPr>
             <a:r>
@@ -6959,15 +7009,27 @@
         </p:nvGraphicFramePr>
         <p:xfrm>
           <a:off x="365760" y="1371600"/>
-          <a:ext cx="5029200" cy="914400"/>
+          <a:ext cx="5029200" cy="3063240"/>
         </p:xfrm>
         <a:graphic>
           <a:graphicData uri="http://schemas.openxmlformats.org/drawingml/2006/table">
             <a:tbl>
               <a:tblPr/>
               <a:tblGrid>
-                <a:gridCol w="3200400"/>
-                <a:gridCol w="1828800"/>
+                <a:gridCol w="3200400">
+                  <a:extLst>
+                    <a:ext uri="{9D8B030D-6E8A-4147-A177-3AD203B41FA5}">
+                      <a16:colId xmlns:a16="http://schemas.microsoft.com/office/drawing/2014/main" val="20000"/>
+                    </a:ext>
+                  </a:extLst>
+                </a:gridCol>
+                <a:gridCol w="1828800">
+                  <a:extLst>
+                    <a:ext uri="{9D8B030D-6E8A-4147-A177-3AD203B41FA5}">
+                      <a16:colId xmlns:a16="http://schemas.microsoft.com/office/drawing/2014/main" val="20001"/>
+                    </a:ext>
+                  </a:extLst>
+                </a:gridCol>
               </a:tblGrid>
               <a:tr h="320040">
                 <a:tc>
@@ -6975,7 +7037,7 @@
                     <a:bodyPr/>
                     <a:lstStyle/>
                     <a:p>
-                      <a:pPr algn="ctr" indent="0" marL="0">
+                      <a:pPr marL="0" indent="0" algn="ctr">
                         <a:buNone/>
                       </a:pPr>
                       <a:r>
@@ -6996,7 +7058,7 @@
                       </a:endParaRPr>
                     </a:p>
                   </a:txBody>
-                  <a:tcPr marL="91440" marR="91440" marT="45720" marB="45720" anchor="ctr">
+                  <a:tcPr anchor="ctr">
                     <a:lnL w="6350" cap="flat" cmpd="sng" algn="ctr">
                       <a:solidFill>
                         <a:srgbClr val="CCCCCC"/>
@@ -7043,7 +7105,7 @@
                     <a:bodyPr/>
                     <a:lstStyle/>
                     <a:p>
-                      <a:pPr algn="ctr" indent="0" marL="0">
+                      <a:pPr marL="0" indent="0" algn="ctr">
                         <a:buNone/>
                       </a:pPr>
                       <a:r>
@@ -7064,7 +7126,7 @@
                       </a:endParaRPr>
                     </a:p>
                   </a:txBody>
-                  <a:tcPr marL="91440" marR="91440" marT="45720" marB="45720" anchor="ctr">
+                  <a:tcPr anchor="ctr">
                     <a:lnL w="6350" cap="flat" cmpd="sng" algn="ctr">
                       <a:solidFill>
                         <a:srgbClr val="CCCCCC"/>
@@ -7106,6 +7168,11 @@
                     </a:solidFill>
                   </a:tcPr>
                 </a:tc>
+                <a:extLst>
+                  <a:ext uri="{0D108BD9-81ED-4DB2-BD59-A6C34878D82A}">
+                    <a16:rowId xmlns:a16="http://schemas.microsoft.com/office/drawing/2014/main" val="10000"/>
+                  </a:ext>
+                </a:extLst>
               </a:tr>
               <a:tr h="274320">
                 <a:tc>
@@ -7113,7 +7180,7 @@
                     <a:bodyPr/>
                     <a:lstStyle/>
                     <a:p>
-                      <a:pPr algn="ctr" indent="0" marL="0">
+                      <a:pPr marL="0" indent="0" algn="ctr">
                         <a:buNone/>
                       </a:pPr>
                       <a:r>
@@ -7134,7 +7201,7 @@
                       </a:endParaRPr>
                     </a:p>
                   </a:txBody>
-                  <a:tcPr marL="91440" marR="91440" marT="45720" marB="45720" anchor="ctr">
+                  <a:tcPr anchor="ctr">
                     <a:lnL w="6350" cap="flat" cmpd="sng" algn="ctr">
                       <a:solidFill>
                         <a:srgbClr val="CCCCCC"/>
@@ -7178,7 +7245,7 @@
                     <a:bodyPr/>
                     <a:lstStyle/>
                     <a:p>
-                      <a:pPr algn="ctr" indent="0" marL="0">
+                      <a:pPr marL="0" indent="0" algn="ctr">
                         <a:buNone/>
                       </a:pPr>
                       <a:r>
@@ -7199,7 +7266,7 @@
                       </a:endParaRPr>
                     </a:p>
                   </a:txBody>
-                  <a:tcPr marL="91440" marR="91440" marT="45720" marB="45720" anchor="ctr">
+                  <a:tcPr anchor="ctr">
                     <a:lnL w="6350" cap="flat" cmpd="sng" algn="ctr">
                       <a:solidFill>
                         <a:srgbClr val="CCCCCC"/>
@@ -7238,6 +7305,11 @@
                     </a:lnB>
                   </a:tcPr>
                 </a:tc>
+                <a:extLst>
+                  <a:ext uri="{0D108BD9-81ED-4DB2-BD59-A6C34878D82A}">
+                    <a16:rowId xmlns:a16="http://schemas.microsoft.com/office/drawing/2014/main" val="10001"/>
+                  </a:ext>
+                </a:extLst>
               </a:tr>
               <a:tr h="274320">
                 <a:tc>
@@ -7245,7 +7317,7 @@
                     <a:bodyPr/>
                     <a:lstStyle/>
                     <a:p>
-                      <a:pPr algn="ctr" indent="0" marL="0">
+                      <a:pPr marL="0" indent="0" algn="ctr">
                         <a:buNone/>
                       </a:pPr>
                       <a:r>
@@ -7266,7 +7338,7 @@
                       </a:endParaRPr>
                     </a:p>
                   </a:txBody>
-                  <a:tcPr marL="91440" marR="91440" marT="45720" marB="45720" anchor="ctr">
+                  <a:tcPr anchor="ctr">
                     <a:lnL w="6350" cap="flat" cmpd="sng" algn="ctr">
                       <a:solidFill>
                         <a:srgbClr val="CCCCCC"/>
@@ -7310,7 +7382,7 @@
                     <a:bodyPr/>
                     <a:lstStyle/>
                     <a:p>
-                      <a:pPr algn="ctr" indent="0" marL="0">
+                      <a:pPr marL="0" indent="0" algn="ctr">
                         <a:buNone/>
                       </a:pPr>
                       <a:r>
@@ -7331,7 +7403,7 @@
                       </a:endParaRPr>
                     </a:p>
                   </a:txBody>
-                  <a:tcPr marL="91440" marR="91440" marT="45720" marB="45720" anchor="ctr">
+                  <a:tcPr anchor="ctr">
                     <a:lnL w="6350" cap="flat" cmpd="sng" algn="ctr">
                       <a:solidFill>
                         <a:srgbClr val="CCCCCC"/>
@@ -7370,6 +7442,11 @@
                     </a:lnB>
                   </a:tcPr>
                 </a:tc>
+                <a:extLst>
+                  <a:ext uri="{0D108BD9-81ED-4DB2-BD59-A6C34878D82A}">
+                    <a16:rowId xmlns:a16="http://schemas.microsoft.com/office/drawing/2014/main" val="10002"/>
+                  </a:ext>
+                </a:extLst>
               </a:tr>
               <a:tr h="274320">
                 <a:tc>
@@ -7377,7 +7454,7 @@
                     <a:bodyPr/>
                     <a:lstStyle/>
                     <a:p>
-                      <a:pPr algn="ctr" indent="0" marL="0">
+                      <a:pPr marL="0" indent="0" algn="ctr">
                         <a:buNone/>
                       </a:pPr>
                       <a:r>
@@ -7398,7 +7475,7 @@
                       </a:endParaRPr>
                     </a:p>
                   </a:txBody>
-                  <a:tcPr marL="91440" marR="91440" marT="45720" marB="45720" anchor="ctr">
+                  <a:tcPr anchor="ctr">
                     <a:lnL w="6350" cap="flat" cmpd="sng" algn="ctr">
                       <a:solidFill>
                         <a:srgbClr val="CCCCCC"/>
@@ -7442,7 +7519,7 @@
                     <a:bodyPr/>
                     <a:lstStyle/>
                     <a:p>
-                      <a:pPr algn="ctr" indent="0" marL="0">
+                      <a:pPr marL="0" indent="0" algn="ctr">
                         <a:buNone/>
                       </a:pPr>
                       <a:r>
@@ -7463,7 +7540,7 @@
                       </a:endParaRPr>
                     </a:p>
                   </a:txBody>
-                  <a:tcPr marL="91440" marR="91440" marT="45720" marB="45720" anchor="ctr">
+                  <a:tcPr anchor="ctr">
                     <a:lnL w="6350" cap="flat" cmpd="sng" algn="ctr">
                       <a:solidFill>
                         <a:srgbClr val="CCCCCC"/>
@@ -7502,6 +7579,11 @@
                     </a:lnB>
                   </a:tcPr>
                 </a:tc>
+                <a:extLst>
+                  <a:ext uri="{0D108BD9-81ED-4DB2-BD59-A6C34878D82A}">
+                    <a16:rowId xmlns:a16="http://schemas.microsoft.com/office/drawing/2014/main" val="10003"/>
+                  </a:ext>
+                </a:extLst>
               </a:tr>
               <a:tr h="274320">
                 <a:tc>
@@ -7509,7 +7591,7 @@
                     <a:bodyPr/>
                     <a:lstStyle/>
                     <a:p>
-                      <a:pPr algn="ctr" indent="0" marL="0">
+                      <a:pPr marL="0" indent="0" algn="ctr">
                         <a:buNone/>
                       </a:pPr>
                       <a:r>
@@ -7530,7 +7612,7 @@
                       </a:endParaRPr>
                     </a:p>
                   </a:txBody>
-                  <a:tcPr marL="91440" marR="91440" marT="45720" marB="45720" anchor="ctr">
+                  <a:tcPr anchor="ctr">
                     <a:lnL w="6350" cap="flat" cmpd="sng" algn="ctr">
                       <a:solidFill>
                         <a:srgbClr val="CCCCCC"/>
@@ -7574,7 +7656,7 @@
                     <a:bodyPr/>
                     <a:lstStyle/>
                     <a:p>
-                      <a:pPr algn="ctr" indent="0" marL="0">
+                      <a:pPr marL="0" indent="0" algn="ctr">
                         <a:buNone/>
                       </a:pPr>
                       <a:r>
@@ -7595,7 +7677,7 @@
                       </a:endParaRPr>
                     </a:p>
                   </a:txBody>
-                  <a:tcPr marL="91440" marR="91440" marT="45720" marB="45720" anchor="ctr">
+                  <a:tcPr anchor="ctr">
                     <a:lnL w="6350" cap="flat" cmpd="sng" algn="ctr">
                       <a:solidFill>
                         <a:srgbClr val="CCCCCC"/>
@@ -7634,6 +7716,11 @@
                     </a:lnB>
                   </a:tcPr>
                 </a:tc>
+                <a:extLst>
+                  <a:ext uri="{0D108BD9-81ED-4DB2-BD59-A6C34878D82A}">
+                    <a16:rowId xmlns:a16="http://schemas.microsoft.com/office/drawing/2014/main" val="10004"/>
+                  </a:ext>
+                </a:extLst>
               </a:tr>
               <a:tr h="274320">
                 <a:tc>
@@ -7641,7 +7728,7 @@
                     <a:bodyPr/>
                     <a:lstStyle/>
                     <a:p>
-                      <a:pPr algn="ctr" indent="0" marL="0">
+                      <a:pPr marL="0" indent="0" algn="ctr">
                         <a:buNone/>
                       </a:pPr>
                       <a:r>
@@ -7662,7 +7749,7 @@
                       </a:endParaRPr>
                     </a:p>
                   </a:txBody>
-                  <a:tcPr marL="91440" marR="91440" marT="45720" marB="45720" anchor="ctr">
+                  <a:tcPr anchor="ctr">
                     <a:lnL w="6350" cap="flat" cmpd="sng" algn="ctr">
                       <a:solidFill>
                         <a:srgbClr val="CCCCCC"/>
@@ -7706,7 +7793,7 @@
                     <a:bodyPr/>
                     <a:lstStyle/>
                     <a:p>
-                      <a:pPr algn="ctr" indent="0" marL="0">
+                      <a:pPr marL="0" indent="0" algn="ctr">
                         <a:buNone/>
                       </a:pPr>
                       <a:r>
@@ -7727,7 +7814,7 @@
                       </a:endParaRPr>
                     </a:p>
                   </a:txBody>
-                  <a:tcPr marL="91440" marR="91440" marT="45720" marB="45720" anchor="ctr">
+                  <a:tcPr anchor="ctr">
                     <a:lnL w="6350" cap="flat" cmpd="sng" algn="ctr">
                       <a:solidFill>
                         <a:srgbClr val="CCCCCC"/>
@@ -7766,6 +7853,11 @@
                     </a:lnB>
                   </a:tcPr>
                 </a:tc>
+                <a:extLst>
+                  <a:ext uri="{0D108BD9-81ED-4DB2-BD59-A6C34878D82A}">
+                    <a16:rowId xmlns:a16="http://schemas.microsoft.com/office/drawing/2014/main" val="10005"/>
+                  </a:ext>
+                </a:extLst>
               </a:tr>
               <a:tr h="274320">
                 <a:tc>
@@ -7773,7 +7865,7 @@
                     <a:bodyPr/>
                     <a:lstStyle/>
                     <a:p>
-                      <a:pPr algn="ctr" indent="0" marL="0">
+                      <a:pPr marL="0" indent="0" algn="ctr">
                         <a:buNone/>
                       </a:pPr>
                       <a:r>
@@ -7794,7 +7886,7 @@
                       </a:endParaRPr>
                     </a:p>
                   </a:txBody>
-                  <a:tcPr marL="91440" marR="91440" marT="45720" marB="45720" anchor="ctr">
+                  <a:tcPr anchor="ctr">
                     <a:lnL w="6350" cap="flat" cmpd="sng" algn="ctr">
                       <a:solidFill>
                         <a:srgbClr val="CCCCCC"/>
@@ -7838,7 +7930,7 @@
                     <a:bodyPr/>
                     <a:lstStyle/>
                     <a:p>
-                      <a:pPr algn="ctr" indent="0" marL="0">
+                      <a:pPr marL="0" indent="0" algn="ctr">
                         <a:buNone/>
                       </a:pPr>
                       <a:r>
@@ -7859,7 +7951,7 @@
                       </a:endParaRPr>
                     </a:p>
                   </a:txBody>
-                  <a:tcPr marL="91440" marR="91440" marT="45720" marB="45720" anchor="ctr">
+                  <a:tcPr anchor="ctr">
                     <a:lnL w="6350" cap="flat" cmpd="sng" algn="ctr">
                       <a:solidFill>
                         <a:srgbClr val="CCCCCC"/>
@@ -7898,6 +7990,11 @@
                     </a:lnB>
                   </a:tcPr>
                 </a:tc>
+                <a:extLst>
+                  <a:ext uri="{0D108BD9-81ED-4DB2-BD59-A6C34878D82A}">
+                    <a16:rowId xmlns:a16="http://schemas.microsoft.com/office/drawing/2014/main" val="10006"/>
+                  </a:ext>
+                </a:extLst>
               </a:tr>
               <a:tr h="274320">
                 <a:tc>
@@ -7905,7 +8002,7 @@
                     <a:bodyPr/>
                     <a:lstStyle/>
                     <a:p>
-                      <a:pPr algn="ctr" indent="0" marL="0">
+                      <a:pPr marL="0" indent="0" algn="ctr">
                         <a:buNone/>
                       </a:pPr>
                       <a:r>
@@ -7926,7 +8023,7 @@
                       </a:endParaRPr>
                     </a:p>
                   </a:txBody>
-                  <a:tcPr marL="91440" marR="91440" marT="45720" marB="45720" anchor="ctr">
+                  <a:tcPr anchor="ctr">
                     <a:lnL w="6350" cap="flat" cmpd="sng" algn="ctr">
                       <a:solidFill>
                         <a:srgbClr val="CCCCCC"/>
@@ -7970,7 +8067,7 @@
                     <a:bodyPr/>
                     <a:lstStyle/>
                     <a:p>
-                      <a:pPr algn="ctr" indent="0" marL="0">
+                      <a:pPr marL="0" indent="0" algn="ctr">
                         <a:buNone/>
                       </a:pPr>
                       <a:r>
@@ -7991,7 +8088,7 @@
                       </a:endParaRPr>
                     </a:p>
                   </a:txBody>
-                  <a:tcPr marL="91440" marR="91440" marT="45720" marB="45720" anchor="ctr">
+                  <a:tcPr anchor="ctr">
                     <a:lnL w="6350" cap="flat" cmpd="sng" algn="ctr">
                       <a:solidFill>
                         <a:srgbClr val="CCCCCC"/>
@@ -8030,6 +8127,11 @@
                     </a:lnB>
                   </a:tcPr>
                 </a:tc>
+                <a:extLst>
+                  <a:ext uri="{0D108BD9-81ED-4DB2-BD59-A6C34878D82A}">
+                    <a16:rowId xmlns:a16="http://schemas.microsoft.com/office/drawing/2014/main" val="10007"/>
+                  </a:ext>
+                </a:extLst>
               </a:tr>
               <a:tr h="274320">
                 <a:tc>
@@ -8037,7 +8139,7 @@
                     <a:bodyPr/>
                     <a:lstStyle/>
                     <a:p>
-                      <a:pPr algn="ctr" indent="0" marL="0">
+                      <a:pPr marL="0" indent="0" algn="ctr">
                         <a:buNone/>
                       </a:pPr>
                       <a:r>
@@ -8058,7 +8160,7 @@
                       </a:endParaRPr>
                     </a:p>
                   </a:txBody>
-                  <a:tcPr marL="91440" marR="91440" marT="45720" marB="45720" anchor="ctr">
+                  <a:tcPr anchor="ctr">
                     <a:lnL w="6350" cap="flat" cmpd="sng" algn="ctr">
                       <a:solidFill>
                         <a:srgbClr val="CCCCCC"/>
@@ -8102,7 +8204,7 @@
                     <a:bodyPr/>
                     <a:lstStyle/>
                     <a:p>
-                      <a:pPr algn="ctr" indent="0" marL="0">
+                      <a:pPr marL="0" indent="0" algn="ctr">
                         <a:buNone/>
                       </a:pPr>
                       <a:r>
@@ -8123,7 +8225,7 @@
                       </a:endParaRPr>
                     </a:p>
                   </a:txBody>
-                  <a:tcPr marL="91440" marR="91440" marT="45720" marB="45720" anchor="ctr">
+                  <a:tcPr anchor="ctr">
                     <a:lnL w="6350" cap="flat" cmpd="sng" algn="ctr">
                       <a:solidFill>
                         <a:srgbClr val="CCCCCC"/>
@@ -8162,6 +8264,11 @@
                     </a:lnB>
                   </a:tcPr>
                 </a:tc>
+                <a:extLst>
+                  <a:ext uri="{0D108BD9-81ED-4DB2-BD59-A6C34878D82A}">
+                    <a16:rowId xmlns:a16="http://schemas.microsoft.com/office/drawing/2014/main" val="10008"/>
+                  </a:ext>
+                </a:extLst>
               </a:tr>
               <a:tr h="274320">
                 <a:tc>
@@ -8169,7 +8276,7 @@
                     <a:bodyPr/>
                     <a:lstStyle/>
                     <a:p>
-                      <a:pPr algn="ctr" indent="0" marL="0">
+                      <a:pPr marL="0" indent="0" algn="ctr">
                         <a:buNone/>
                       </a:pPr>
                       <a:r>
@@ -8190,7 +8297,7 @@
                       </a:endParaRPr>
                     </a:p>
                   </a:txBody>
-                  <a:tcPr marL="91440" marR="91440" marT="45720" marB="45720" anchor="ctr">
+                  <a:tcPr anchor="ctr">
                     <a:lnL w="6350" cap="flat" cmpd="sng" algn="ctr">
                       <a:solidFill>
                         <a:srgbClr val="CCCCCC"/>
@@ -8234,7 +8341,7 @@
                     <a:bodyPr/>
                     <a:lstStyle/>
                     <a:p>
-                      <a:pPr algn="ctr" indent="0" marL="0">
+                      <a:pPr marL="0" indent="0" algn="ctr">
                         <a:buNone/>
                       </a:pPr>
                       <a:r>
@@ -8255,7 +8362,7 @@
                       </a:endParaRPr>
                     </a:p>
                   </a:txBody>
-                  <a:tcPr marL="91440" marR="91440" marT="45720" marB="45720" anchor="ctr">
+                  <a:tcPr anchor="ctr">
                     <a:lnL w="6350" cap="flat" cmpd="sng" algn="ctr">
                       <a:solidFill>
                         <a:srgbClr val="CCCCCC"/>
@@ -8294,6 +8401,11 @@
                     </a:lnB>
                   </a:tcPr>
                 </a:tc>
+                <a:extLst>
+                  <a:ext uri="{0D108BD9-81ED-4DB2-BD59-A6C34878D82A}">
+                    <a16:rowId xmlns:a16="http://schemas.microsoft.com/office/drawing/2014/main" val="10009"/>
+                  </a:ext>
+                </a:extLst>
               </a:tr>
               <a:tr h="274320">
                 <a:tc>
@@ -8301,7 +8413,7 @@
                     <a:bodyPr/>
                     <a:lstStyle/>
                     <a:p>
-                      <a:pPr algn="ctr" indent="0" marL="0">
+                      <a:pPr marL="0" indent="0" algn="ctr">
                         <a:buNone/>
                       </a:pPr>
                       <a:r>
@@ -8322,7 +8434,7 @@
                       </a:endParaRPr>
                     </a:p>
                   </a:txBody>
-                  <a:tcPr marL="91440" marR="91440" marT="45720" marB="45720" anchor="ctr">
+                  <a:tcPr anchor="ctr">
                     <a:lnL w="6350" cap="flat" cmpd="sng" algn="ctr">
                       <a:solidFill>
                         <a:srgbClr val="CCCCCC"/>
@@ -8366,7 +8478,7 @@
                     <a:bodyPr/>
                     <a:lstStyle/>
                     <a:p>
-                      <a:pPr algn="ctr" indent="0" marL="0">
+                      <a:pPr marL="0" indent="0" algn="ctr">
                         <a:buNone/>
                       </a:pPr>
                       <a:r>
@@ -8387,7 +8499,7 @@
                       </a:endParaRPr>
                     </a:p>
                   </a:txBody>
-                  <a:tcPr marL="91440" marR="91440" marT="45720" marB="45720" anchor="ctr">
+                  <a:tcPr anchor="ctr">
                     <a:lnL w="6350" cap="flat" cmpd="sng" algn="ctr">
                       <a:solidFill>
                         <a:srgbClr val="CCCCCC"/>
@@ -8426,6 +8538,11 @@
                     </a:lnB>
                   </a:tcPr>
                 </a:tc>
+                <a:extLst>
+                  <a:ext uri="{0D108BD9-81ED-4DB2-BD59-A6C34878D82A}">
+                    <a16:rowId xmlns:a16="http://schemas.microsoft.com/office/drawing/2014/main" val="10010"/>
+                  </a:ext>
+                </a:extLst>
               </a:tr>
             </a:tbl>
           </a:graphicData>
@@ -8455,13 +8572,20 @@
             <a:prstDash val="solid"/>
           </a:ln>
           <a:effectLst>
-            <a:outerShdw sx="100000" sy="100000" kx="0" ky="0" algn="bl" rotWithShape="0" blurRad="50800" dist="25400" dir="8100000">
+            <a:outerShdw blurRad="50800" dist="25400" dir="8100000" algn="bl" rotWithShape="0">
               <a:srgbClr val="000000">
                 <a:alpha val="12000"/>
               </a:srgbClr>
             </a:outerShdw>
           </a:effectLst>
         </p:spPr>
+        <p:txBody>
+          <a:bodyPr/>
+          <a:lstStyle/>
+          <a:p>
+            <a:endParaRPr lang="zh-TW" altLang="en-US"/>
+          </a:p>
+        </p:txBody>
       </p:sp>
       <p:sp>
         <p:nvSpPr>
@@ -8484,7 +8608,7 @@
           <a:bodyPr wrap="square" lIns="0" tIns="0" rIns="0" bIns="0" rtlCol="0" anchor="ctr"/>
           <a:lstStyle/>
           <a:p>
-            <a:pPr indent="0" marL="0">
+            <a:pPr marL="0" indent="0">
               <a:buNone/>
             </a:pPr>
             <a:r>
@@ -8523,7 +8647,7 @@
           <a:bodyPr wrap="square" lIns="0" tIns="0" rIns="0" bIns="0" rtlCol="0" anchor="ctr"/>
           <a:lstStyle/>
           <a:p>
-            <a:pPr indent="0" marL="0">
+            <a:pPr marL="0" indent="0">
               <a:buNone/>
             </a:pPr>
             <a:r>
@@ -8540,7 +8664,7 @@
             <a:endParaRPr lang="en-US" sz="1300" dirty="0"/>
           </a:p>
           <a:p>
-            <a:pPr indent="0" marL="0">
+            <a:pPr marL="0" indent="0">
               <a:buNone/>
             </a:pPr>
             <a:r>
@@ -8557,7 +8681,7 @@
             <a:endParaRPr lang="en-US" sz="1300" dirty="0"/>
           </a:p>
           <a:p>
-            <a:pPr indent="0" marL="0">
+            <a:pPr marL="0" indent="0">
               <a:buNone/>
             </a:pPr>
             <a:r>
@@ -8574,7 +8698,7 @@
             <a:endParaRPr lang="en-US" sz="1300" dirty="0"/>
           </a:p>
           <a:p>
-            <a:pPr indent="0" marL="0">
+            <a:pPr marL="0" indent="0">
               <a:buNone/>
             </a:pPr>
             <a:r>
@@ -8616,13 +8740,20 @@
             <a:prstDash val="solid"/>
           </a:ln>
           <a:effectLst>
-            <a:outerShdw sx="100000" sy="100000" kx="0" ky="0" algn="bl" rotWithShape="0" blurRad="50800" dist="25400" dir="8100000">
+            <a:outerShdw blurRad="50800" dist="25400" dir="8100000" algn="bl" rotWithShape="0">
               <a:srgbClr val="000000">
                 <a:alpha val="12000"/>
               </a:srgbClr>
             </a:outerShdw>
           </a:effectLst>
         </p:spPr>
+        <p:txBody>
+          <a:bodyPr/>
+          <a:lstStyle/>
+          <a:p>
+            <a:endParaRPr lang="zh-TW" altLang="en-US"/>
+          </a:p>
+        </p:txBody>
       </p:sp>
       <p:sp>
         <p:nvSpPr>
@@ -8645,7 +8776,7 @@
           <a:bodyPr wrap="square" lIns="0" tIns="0" rIns="0" bIns="0" rtlCol="0" anchor="ctr"/>
           <a:lstStyle/>
           <a:p>
-            <a:pPr indent="0" marL="0">
+            <a:pPr marL="0" indent="0">
               <a:buNone/>
             </a:pPr>
             <a:r>
@@ -8684,7 +8815,7 @@
           <a:bodyPr wrap="square" lIns="0" tIns="0" rIns="0" bIns="0" rtlCol="0" anchor="ctr"/>
           <a:lstStyle/>
           <a:p>
-            <a:pPr indent="0" marL="0">
+            <a:pPr marL="0" indent="0">
               <a:buNone/>
             </a:pPr>
             <a:r>
@@ -8701,7 +8832,7 @@
             <a:endParaRPr lang="en-US" sz="1200" dirty="0"/>
           </a:p>
           <a:p>
-            <a:pPr indent="0" marL="0">
+            <a:pPr marL="0" indent="0">
               <a:buNone/>
             </a:pPr>
             <a:r>
@@ -8763,6 +8894,13 @@
           </a:solidFill>
           <a:ln/>
         </p:spPr>
+        <p:txBody>
+          <a:bodyPr/>
+          <a:lstStyle/>
+          <a:p>
+            <a:endParaRPr lang="zh-TW" altLang="en-US"/>
+          </a:p>
+        </p:txBody>
       </p:sp>
       <p:sp>
         <p:nvSpPr>
@@ -8785,7 +8923,7 @@
           <a:bodyPr wrap="square" lIns="0" tIns="0" rIns="0" bIns="0" rtlCol="0" anchor="ctr"/>
           <a:lstStyle/>
           <a:p>
-            <a:pPr indent="0" marL="0">
+            <a:pPr marL="0" indent="0">
               <a:buNone/>
             </a:pPr>
             <a:r>
@@ -8824,7 +8962,7 @@
           <a:bodyPr wrap="square" rtlCol="0" anchor="ctr"/>
           <a:lstStyle/>
           <a:p>
-            <a:pPr algn="r" indent="0" marL="0">
+            <a:pPr marL="0" indent="0" algn="r">
               <a:buNone/>
             </a:pPr>
             <a:r>
@@ -8858,16 +8996,34 @@
         </p:nvGraphicFramePr>
         <p:xfrm>
           <a:off x="274320" y="1097280"/>
-          <a:ext cx="8595360" cy="914400"/>
+          <a:ext cx="8595360" cy="3063240"/>
         </p:xfrm>
         <a:graphic>
           <a:graphicData uri="http://schemas.openxmlformats.org/drawingml/2006/table">
             <a:tbl>
               <a:tblPr/>
               <a:tblGrid>
-                <a:gridCol w="2194560"/>
-                <a:gridCol w="3200400"/>
-                <a:gridCol w="3200400"/>
+                <a:gridCol w="2194560">
+                  <a:extLst>
+                    <a:ext uri="{9D8B030D-6E8A-4147-A177-3AD203B41FA5}">
+                      <a16:colId xmlns:a16="http://schemas.microsoft.com/office/drawing/2014/main" val="20000"/>
+                    </a:ext>
+                  </a:extLst>
+                </a:gridCol>
+                <a:gridCol w="3200400">
+                  <a:extLst>
+                    <a:ext uri="{9D8B030D-6E8A-4147-A177-3AD203B41FA5}">
+                      <a16:colId xmlns:a16="http://schemas.microsoft.com/office/drawing/2014/main" val="20001"/>
+                    </a:ext>
+                  </a:extLst>
+                </a:gridCol>
+                <a:gridCol w="3200400">
+                  <a:extLst>
+                    <a:ext uri="{9D8B030D-6E8A-4147-A177-3AD203B41FA5}">
+                      <a16:colId xmlns:a16="http://schemas.microsoft.com/office/drawing/2014/main" val="20002"/>
+                    </a:ext>
+                  </a:extLst>
+                </a:gridCol>
               </a:tblGrid>
               <a:tr h="411480">
                 <a:tc>
@@ -8875,7 +9031,7 @@
                     <a:bodyPr/>
                     <a:lstStyle/>
                     <a:p>
-                      <a:pPr algn="ctr" indent="0" marL="0">
+                      <a:pPr marL="0" indent="0" algn="ctr">
                         <a:buNone/>
                       </a:pPr>
                       <a:r>
@@ -8896,7 +9052,7 @@
                       </a:endParaRPr>
                     </a:p>
                   </a:txBody>
-                  <a:tcPr marL="91440" marR="91440" marT="45720" marB="45720" anchor="ctr">
+                  <a:tcPr anchor="ctr">
                     <a:lnL w="6350" cap="flat" cmpd="sng" algn="ctr">
                       <a:solidFill>
                         <a:srgbClr val="CCCCCC"/>
@@ -8943,7 +9099,7 @@
                     <a:bodyPr/>
                     <a:lstStyle/>
                     <a:p>
-                      <a:pPr algn="ctr" indent="0" marL="0">
+                      <a:pPr marL="0" indent="0" algn="ctr">
                         <a:buNone/>
                       </a:pPr>
                       <a:r>
@@ -8964,7 +9120,7 @@
                       </a:endParaRPr>
                     </a:p>
                   </a:txBody>
-                  <a:tcPr marL="91440" marR="91440" marT="45720" marB="45720" anchor="ctr">
+                  <a:tcPr anchor="ctr">
                     <a:lnL w="6350" cap="flat" cmpd="sng" algn="ctr">
                       <a:solidFill>
                         <a:srgbClr val="CCCCCC"/>
@@ -9011,7 +9167,7 @@
                     <a:bodyPr/>
                     <a:lstStyle/>
                     <a:p>
-                      <a:pPr algn="ctr" indent="0" marL="0">
+                      <a:pPr marL="0" indent="0" algn="ctr">
                         <a:buNone/>
                       </a:pPr>
                       <a:r>
@@ -9032,7 +9188,7 @@
                       </a:endParaRPr>
                     </a:p>
                   </a:txBody>
-                  <a:tcPr marL="91440" marR="91440" marT="45720" marB="45720" anchor="ctr">
+                  <a:tcPr anchor="ctr">
                     <a:lnL w="6350" cap="flat" cmpd="sng" algn="ctr">
                       <a:solidFill>
                         <a:srgbClr val="CCCCCC"/>
@@ -9074,6 +9230,11 @@
                     </a:solidFill>
                   </a:tcPr>
                 </a:tc>
+                <a:extLst>
+                  <a:ext uri="{0D108BD9-81ED-4DB2-BD59-A6C34878D82A}">
+                    <a16:rowId xmlns:a16="http://schemas.microsoft.com/office/drawing/2014/main" val="10000"/>
+                  </a:ext>
+                </a:extLst>
               </a:tr>
               <a:tr h="365760">
                 <a:tc>
@@ -9081,7 +9242,7 @@
                     <a:bodyPr/>
                     <a:lstStyle/>
                     <a:p>
-                      <a:pPr algn="ctr" indent="0" marL="0">
+                      <a:pPr marL="0" indent="0" algn="ctr">
                         <a:buNone/>
                       </a:pPr>
                       <a:r>
@@ -9102,7 +9263,7 @@
                       </a:endParaRPr>
                     </a:p>
                   </a:txBody>
-                  <a:tcPr marL="91440" marR="91440" marT="45720" marB="45720" anchor="ctr">
+                  <a:tcPr anchor="ctr">
                     <a:lnL w="6350" cap="flat" cmpd="sng" algn="ctr">
                       <a:solidFill>
                         <a:srgbClr val="CCCCCC"/>
@@ -9146,7 +9307,7 @@
                     <a:bodyPr/>
                     <a:lstStyle/>
                     <a:p>
-                      <a:pPr algn="ctr" indent="0" marL="0">
+                      <a:pPr marL="0" indent="0" algn="ctr">
                         <a:buNone/>
                       </a:pPr>
                       <a:r>
@@ -9167,7 +9328,7 @@
                       </a:endParaRPr>
                     </a:p>
                   </a:txBody>
-                  <a:tcPr marL="91440" marR="91440" marT="45720" marB="45720" anchor="ctr">
+                  <a:tcPr anchor="ctr">
                     <a:lnL w="6350" cap="flat" cmpd="sng" algn="ctr">
                       <a:solidFill>
                         <a:srgbClr val="CCCCCC"/>
@@ -9211,7 +9372,7 @@
                     <a:bodyPr/>
                     <a:lstStyle/>
                     <a:p>
-                      <a:pPr algn="ctr" indent="0" marL="0">
+                      <a:pPr marL="0" indent="0" algn="ctr">
                         <a:buNone/>
                       </a:pPr>
                       <a:r>
@@ -9232,7 +9393,7 @@
                       </a:endParaRPr>
                     </a:p>
                   </a:txBody>
-                  <a:tcPr marL="91440" marR="91440" marT="45720" marB="45720" anchor="ctr">
+                  <a:tcPr anchor="ctr">
                     <a:lnL w="6350" cap="flat" cmpd="sng" algn="ctr">
                       <a:solidFill>
                         <a:srgbClr val="CCCCCC"/>
@@ -9271,6 +9432,11 @@
                     </a:lnB>
                   </a:tcPr>
                 </a:tc>
+                <a:extLst>
+                  <a:ext uri="{0D108BD9-81ED-4DB2-BD59-A6C34878D82A}">
+                    <a16:rowId xmlns:a16="http://schemas.microsoft.com/office/drawing/2014/main" val="10001"/>
+                  </a:ext>
+                </a:extLst>
               </a:tr>
               <a:tr h="365760">
                 <a:tc>
@@ -9278,7 +9444,7 @@
                     <a:bodyPr/>
                     <a:lstStyle/>
                     <a:p>
-                      <a:pPr algn="ctr" indent="0" marL="0">
+                      <a:pPr marL="0" indent="0" algn="ctr">
                         <a:buNone/>
                       </a:pPr>
                       <a:r>
@@ -9299,7 +9465,7 @@
                       </a:endParaRPr>
                     </a:p>
                   </a:txBody>
-                  <a:tcPr marL="91440" marR="91440" marT="45720" marB="45720" anchor="ctr">
+                  <a:tcPr anchor="ctr">
                     <a:lnL w="6350" cap="flat" cmpd="sng" algn="ctr">
                       <a:solidFill>
                         <a:srgbClr val="CCCCCC"/>
@@ -9343,7 +9509,7 @@
                     <a:bodyPr/>
                     <a:lstStyle/>
                     <a:p>
-                      <a:pPr algn="ctr" indent="0" marL="0">
+                      <a:pPr marL="0" indent="0" algn="ctr">
                         <a:buNone/>
                       </a:pPr>
                       <a:r>
@@ -9364,7 +9530,7 @@
                       </a:endParaRPr>
                     </a:p>
                   </a:txBody>
-                  <a:tcPr marL="91440" marR="91440" marT="45720" marB="45720" anchor="ctr">
+                  <a:tcPr anchor="ctr">
                     <a:lnL w="6350" cap="flat" cmpd="sng" algn="ctr">
                       <a:solidFill>
                         <a:srgbClr val="CCCCCC"/>
@@ -9408,7 +9574,7 @@
                     <a:bodyPr/>
                     <a:lstStyle/>
                     <a:p>
-                      <a:pPr algn="ctr" indent="0" marL="0">
+                      <a:pPr marL="0" indent="0" algn="ctr">
                         <a:buNone/>
                       </a:pPr>
                       <a:r>
@@ -9429,7 +9595,7 @@
                       </a:endParaRPr>
                     </a:p>
                   </a:txBody>
-                  <a:tcPr marL="91440" marR="91440" marT="45720" marB="45720" anchor="ctr">
+                  <a:tcPr anchor="ctr">
                     <a:lnL w="6350" cap="flat" cmpd="sng" algn="ctr">
                       <a:solidFill>
                         <a:srgbClr val="CCCCCC"/>
@@ -9468,6 +9634,11 @@
                     </a:lnB>
                   </a:tcPr>
                 </a:tc>
+                <a:extLst>
+                  <a:ext uri="{0D108BD9-81ED-4DB2-BD59-A6C34878D82A}">
+                    <a16:rowId xmlns:a16="http://schemas.microsoft.com/office/drawing/2014/main" val="10002"/>
+                  </a:ext>
+                </a:extLst>
               </a:tr>
               <a:tr h="365760">
                 <a:tc>
@@ -9475,7 +9646,7 @@
                     <a:bodyPr/>
                     <a:lstStyle/>
                     <a:p>
-                      <a:pPr algn="ctr" indent="0" marL="0">
+                      <a:pPr marL="0" indent="0" algn="ctr">
                         <a:buNone/>
                       </a:pPr>
                       <a:r>
@@ -9496,7 +9667,7 @@
                       </a:endParaRPr>
                     </a:p>
                   </a:txBody>
-                  <a:tcPr marL="91440" marR="91440" marT="45720" marB="45720" anchor="ctr">
+                  <a:tcPr anchor="ctr">
                     <a:lnL w="6350" cap="flat" cmpd="sng" algn="ctr">
                       <a:solidFill>
                         <a:srgbClr val="CCCCCC"/>
@@ -9540,7 +9711,7 @@
                     <a:bodyPr/>
                     <a:lstStyle/>
                     <a:p>
-                      <a:pPr algn="ctr" indent="0" marL="0">
+                      <a:pPr marL="0" indent="0" algn="ctr">
                         <a:buNone/>
                       </a:pPr>
                       <a:r>
@@ -9561,7 +9732,7 @@
                       </a:endParaRPr>
                     </a:p>
                   </a:txBody>
-                  <a:tcPr marL="91440" marR="91440" marT="45720" marB="45720" anchor="ctr">
+                  <a:tcPr anchor="ctr">
                     <a:lnL w="6350" cap="flat" cmpd="sng" algn="ctr">
                       <a:solidFill>
                         <a:srgbClr val="CCCCCC"/>
@@ -9605,7 +9776,7 @@
                     <a:bodyPr/>
                     <a:lstStyle/>
                     <a:p>
-                      <a:pPr algn="ctr" indent="0" marL="0">
+                      <a:pPr marL="0" indent="0" algn="ctr">
                         <a:buNone/>
                       </a:pPr>
                       <a:r>
@@ -9626,7 +9797,7 @@
                       </a:endParaRPr>
                     </a:p>
                   </a:txBody>
-                  <a:tcPr marL="91440" marR="91440" marT="45720" marB="45720" anchor="ctr">
+                  <a:tcPr anchor="ctr">
                     <a:lnL w="6350" cap="flat" cmpd="sng" algn="ctr">
                       <a:solidFill>
                         <a:srgbClr val="CCCCCC"/>
@@ -9665,6 +9836,11 @@
                     </a:lnB>
                   </a:tcPr>
                 </a:tc>
+                <a:extLst>
+                  <a:ext uri="{0D108BD9-81ED-4DB2-BD59-A6C34878D82A}">
+                    <a16:rowId xmlns:a16="http://schemas.microsoft.com/office/drawing/2014/main" val="10003"/>
+                  </a:ext>
+                </a:extLst>
               </a:tr>
               <a:tr h="365760">
                 <a:tc>
@@ -9672,7 +9848,7 @@
                     <a:bodyPr/>
                     <a:lstStyle/>
                     <a:p>
-                      <a:pPr algn="ctr" indent="0" marL="0">
+                      <a:pPr marL="0" indent="0" algn="ctr">
                         <a:buNone/>
                       </a:pPr>
                       <a:r>
@@ -9693,7 +9869,7 @@
                       </a:endParaRPr>
                     </a:p>
                   </a:txBody>
-                  <a:tcPr marL="91440" marR="91440" marT="45720" marB="45720" anchor="ctr">
+                  <a:tcPr anchor="ctr">
                     <a:lnL w="6350" cap="flat" cmpd="sng" algn="ctr">
                       <a:solidFill>
                         <a:srgbClr val="CCCCCC"/>
@@ -9737,7 +9913,7 @@
                     <a:bodyPr/>
                     <a:lstStyle/>
                     <a:p>
-                      <a:pPr algn="ctr" indent="0" marL="0">
+                      <a:pPr marL="0" indent="0" algn="ctr">
                         <a:buNone/>
                       </a:pPr>
                       <a:r>
@@ -9758,7 +9934,7 @@
                       </a:endParaRPr>
                     </a:p>
                   </a:txBody>
-                  <a:tcPr marL="91440" marR="91440" marT="45720" marB="45720" anchor="ctr">
+                  <a:tcPr anchor="ctr">
                     <a:lnL w="6350" cap="flat" cmpd="sng" algn="ctr">
                       <a:solidFill>
                         <a:srgbClr val="CCCCCC"/>
@@ -9802,7 +9978,7 @@
                     <a:bodyPr/>
                     <a:lstStyle/>
                     <a:p>
-                      <a:pPr algn="ctr" indent="0" marL="0">
+                      <a:pPr marL="0" indent="0" algn="ctr">
                         <a:buNone/>
                       </a:pPr>
                       <a:r>
@@ -9823,7 +9999,7 @@
                       </a:endParaRPr>
                     </a:p>
                   </a:txBody>
-                  <a:tcPr marL="91440" marR="91440" marT="45720" marB="45720" anchor="ctr">
+                  <a:tcPr anchor="ctr">
                     <a:lnL w="6350" cap="flat" cmpd="sng" algn="ctr">
                       <a:solidFill>
                         <a:srgbClr val="CCCCCC"/>
@@ -9862,6 +10038,11 @@
                     </a:lnB>
                   </a:tcPr>
                 </a:tc>
+                <a:extLst>
+                  <a:ext uri="{0D108BD9-81ED-4DB2-BD59-A6C34878D82A}">
+                    <a16:rowId xmlns:a16="http://schemas.microsoft.com/office/drawing/2014/main" val="10004"/>
+                  </a:ext>
+                </a:extLst>
               </a:tr>
               <a:tr h="365760">
                 <a:tc>
@@ -9869,7 +10050,7 @@
                     <a:bodyPr/>
                     <a:lstStyle/>
                     <a:p>
-                      <a:pPr algn="ctr" indent="0" marL="0">
+                      <a:pPr marL="0" indent="0" algn="ctr">
                         <a:buNone/>
                       </a:pPr>
                       <a:r>
@@ -9890,7 +10071,7 @@
                       </a:endParaRPr>
                     </a:p>
                   </a:txBody>
-                  <a:tcPr marL="91440" marR="91440" marT="45720" marB="45720" anchor="ctr">
+                  <a:tcPr anchor="ctr">
                     <a:lnL w="6350" cap="flat" cmpd="sng" algn="ctr">
                       <a:solidFill>
                         <a:srgbClr val="CCCCCC"/>
@@ -9934,7 +10115,7 @@
                     <a:bodyPr/>
                     <a:lstStyle/>
                     <a:p>
-                      <a:pPr algn="ctr" indent="0" marL="0">
+                      <a:pPr marL="0" indent="0" algn="ctr">
                         <a:buNone/>
                       </a:pPr>
                       <a:r>
@@ -9955,7 +10136,7 @@
                       </a:endParaRPr>
                     </a:p>
                   </a:txBody>
-                  <a:tcPr marL="91440" marR="91440" marT="45720" marB="45720" anchor="ctr">
+                  <a:tcPr anchor="ctr">
                     <a:lnL w="6350" cap="flat" cmpd="sng" algn="ctr">
                       <a:solidFill>
                         <a:srgbClr val="CCCCCC"/>
@@ -9999,7 +10180,7 @@
                     <a:bodyPr/>
                     <a:lstStyle/>
                     <a:p>
-                      <a:pPr algn="ctr" indent="0" marL="0">
+                      <a:pPr marL="0" indent="0" algn="ctr">
                         <a:buNone/>
                       </a:pPr>
                       <a:r>
@@ -10020,7 +10201,7 @@
                       </a:endParaRPr>
                     </a:p>
                   </a:txBody>
-                  <a:tcPr marL="91440" marR="91440" marT="45720" marB="45720" anchor="ctr">
+                  <a:tcPr anchor="ctr">
                     <a:lnL w="6350" cap="flat" cmpd="sng" algn="ctr">
                       <a:solidFill>
                         <a:srgbClr val="CCCCCC"/>
@@ -10059,6 +10240,11 @@
                     </a:lnB>
                   </a:tcPr>
                 </a:tc>
+                <a:extLst>
+                  <a:ext uri="{0D108BD9-81ED-4DB2-BD59-A6C34878D82A}">
+                    <a16:rowId xmlns:a16="http://schemas.microsoft.com/office/drawing/2014/main" val="10005"/>
+                  </a:ext>
+                </a:extLst>
               </a:tr>
               <a:tr h="365760">
                 <a:tc>
@@ -10066,7 +10252,7 @@
                     <a:bodyPr/>
                     <a:lstStyle/>
                     <a:p>
-                      <a:pPr algn="ctr" indent="0" marL="0">
+                      <a:pPr marL="0" indent="0" algn="ctr">
                         <a:buNone/>
                       </a:pPr>
                       <a:r>
@@ -10087,7 +10273,7 @@
                       </a:endParaRPr>
                     </a:p>
                   </a:txBody>
-                  <a:tcPr marL="91440" marR="91440" marT="45720" marB="45720" anchor="ctr">
+                  <a:tcPr anchor="ctr">
                     <a:lnL w="6350" cap="flat" cmpd="sng" algn="ctr">
                       <a:solidFill>
                         <a:srgbClr val="CCCCCC"/>
@@ -10131,7 +10317,7 @@
                     <a:bodyPr/>
                     <a:lstStyle/>
                     <a:p>
-                      <a:pPr algn="ctr" indent="0" marL="0">
+                      <a:pPr marL="0" indent="0" algn="ctr">
                         <a:buNone/>
                       </a:pPr>
                       <a:r>
@@ -10152,7 +10338,7 @@
                       </a:endParaRPr>
                     </a:p>
                   </a:txBody>
-                  <a:tcPr marL="91440" marR="91440" marT="45720" marB="45720" anchor="ctr">
+                  <a:tcPr anchor="ctr">
                     <a:lnL w="6350" cap="flat" cmpd="sng" algn="ctr">
                       <a:solidFill>
                         <a:srgbClr val="CCCCCC"/>
@@ -10196,7 +10382,7 @@
                     <a:bodyPr/>
                     <a:lstStyle/>
                     <a:p>
-                      <a:pPr algn="ctr" indent="0" marL="0">
+                      <a:pPr marL="0" indent="0" algn="ctr">
                         <a:buNone/>
                       </a:pPr>
                       <a:r>
@@ -10217,7 +10403,7 @@
                       </a:endParaRPr>
                     </a:p>
                   </a:txBody>
-                  <a:tcPr marL="91440" marR="91440" marT="45720" marB="45720" anchor="ctr">
+                  <a:tcPr anchor="ctr">
                     <a:lnL w="6350" cap="flat" cmpd="sng" algn="ctr">
                       <a:solidFill>
                         <a:srgbClr val="CCCCCC"/>
@@ -10256,6 +10442,11 @@
                     </a:lnB>
                   </a:tcPr>
                 </a:tc>
+                <a:extLst>
+                  <a:ext uri="{0D108BD9-81ED-4DB2-BD59-A6C34878D82A}">
+                    <a16:rowId xmlns:a16="http://schemas.microsoft.com/office/drawing/2014/main" val="10006"/>
+                  </a:ext>
+                </a:extLst>
               </a:tr>
               <a:tr h="457200">
                 <a:tc>
@@ -10263,7 +10454,7 @@
                     <a:bodyPr/>
                     <a:lstStyle/>
                     <a:p>
-                      <a:pPr algn="ctr" indent="0" marL="0">
+                      <a:pPr marL="0" indent="0" algn="ctr">
                         <a:buNone/>
                       </a:pPr>
                       <a:r>
@@ -10284,7 +10475,7 @@
                       </a:endParaRPr>
                     </a:p>
                   </a:txBody>
-                  <a:tcPr marL="91440" marR="91440" marT="45720" marB="45720" anchor="ctr">
+                  <a:tcPr anchor="ctr">
                     <a:lnL w="6350" cap="flat" cmpd="sng" algn="ctr">
                       <a:solidFill>
                         <a:srgbClr val="CCCCCC"/>
@@ -10328,7 +10519,7 @@
                     <a:bodyPr/>
                     <a:lstStyle/>
                     <a:p>
-                      <a:pPr algn="ctr" indent="0" marL="0">
+                      <a:pPr marL="0" indent="0" algn="ctr">
                         <a:buNone/>
                       </a:pPr>
                       <a:r>
@@ -10349,7 +10540,7 @@
                       </a:endParaRPr>
                     </a:p>
                   </a:txBody>
-                  <a:tcPr marL="91440" marR="91440" marT="45720" marB="45720" anchor="ctr">
+                  <a:tcPr anchor="ctr">
                     <a:lnL w="6350" cap="flat" cmpd="sng" algn="ctr">
                       <a:solidFill>
                         <a:srgbClr val="CCCCCC"/>
@@ -10393,7 +10584,7 @@
                     <a:bodyPr/>
                     <a:lstStyle/>
                     <a:p>
-                      <a:pPr algn="ctr" indent="0" marL="0">
+                      <a:pPr marL="0" indent="0" algn="ctr">
                         <a:buNone/>
                       </a:pPr>
                       <a:r>
@@ -10414,7 +10605,7 @@
                       </a:endParaRPr>
                     </a:p>
                   </a:txBody>
-                  <a:tcPr marL="91440" marR="91440" marT="45720" marB="45720" anchor="ctr">
+                  <a:tcPr anchor="ctr">
                     <a:lnL w="6350" cap="flat" cmpd="sng" algn="ctr">
                       <a:solidFill>
                         <a:srgbClr val="CCCCCC"/>
@@ -10453,6 +10644,11 @@
                     </a:lnB>
                   </a:tcPr>
                 </a:tc>
+                <a:extLst>
+                  <a:ext uri="{0D108BD9-81ED-4DB2-BD59-A6C34878D82A}">
+                    <a16:rowId xmlns:a16="http://schemas.microsoft.com/office/drawing/2014/main" val="10007"/>
+                  </a:ext>
+                </a:extLst>
               </a:tr>
             </a:tbl>
           </a:graphicData>
@@ -10482,13 +10678,20 @@
             <a:prstDash val="solid"/>
           </a:ln>
           <a:effectLst>
-            <a:outerShdw sx="100000" sy="100000" kx="0" ky="0" algn="bl" rotWithShape="0" blurRad="50800" dist="25400" dir="8100000">
+            <a:outerShdw blurRad="50800" dist="25400" dir="8100000" algn="bl" rotWithShape="0">
               <a:srgbClr val="000000">
                 <a:alpha val="12000"/>
               </a:srgbClr>
             </a:outerShdw>
           </a:effectLst>
         </p:spPr>
+        <p:txBody>
+          <a:bodyPr/>
+          <a:lstStyle/>
+          <a:p>
+            <a:endParaRPr lang="zh-TW" altLang="en-US"/>
+          </a:p>
+        </p:txBody>
       </p:sp>
       <p:sp>
         <p:nvSpPr>
@@ -10511,7 +10714,7 @@
           <a:bodyPr wrap="square" lIns="0" tIns="0" rIns="0" bIns="0" rtlCol="0" anchor="ctr"/>
           <a:lstStyle/>
           <a:p>
-            <a:pPr algn="ctr" indent="0" marL="0">
+            <a:pPr marL="0" indent="0" algn="ctr">
               <a:buNone/>
             </a:pPr>
             <a:r>
@@ -10573,6 +10776,13 @@
           </a:solidFill>
           <a:ln/>
         </p:spPr>
+        <p:txBody>
+          <a:bodyPr/>
+          <a:lstStyle/>
+          <a:p>
+            <a:endParaRPr lang="zh-TW" altLang="en-US"/>
+          </a:p>
+        </p:txBody>
       </p:sp>
       <p:sp>
         <p:nvSpPr>
@@ -10595,7 +10805,7 @@
           <a:bodyPr wrap="square" lIns="0" tIns="0" rIns="0" bIns="0" rtlCol="0" anchor="ctr"/>
           <a:lstStyle/>
           <a:p>
-            <a:pPr indent="0" marL="0">
+            <a:pPr marL="0" indent="0">
               <a:buNone/>
             </a:pPr>
             <a:r>
@@ -10634,7 +10844,7 @@
           <a:bodyPr wrap="square" rtlCol="0" anchor="ctr"/>
           <a:lstStyle/>
           <a:p>
-            <a:pPr algn="r" indent="0" marL="0">
+            <a:pPr marL="0" indent="0" algn="r">
               <a:buNone/>
             </a:pPr>
             <a:r>
@@ -10673,7 +10883,7 @@
           <a:bodyPr wrap="square" lIns="0" tIns="0" rIns="0" bIns="0" rtlCol="0" anchor="ctr"/>
           <a:lstStyle/>
           <a:p>
-            <a:pPr indent="0" marL="0">
+            <a:pPr marL="0" indent="0">
               <a:buNone/>
             </a:pPr>
             <a:r>
@@ -10715,13 +10925,20 @@
             <a:prstDash val="solid"/>
           </a:ln>
           <a:effectLst>
-            <a:outerShdw sx="100000" sy="100000" kx="0" ky="0" algn="bl" rotWithShape="0" blurRad="50800" dist="25400" dir="8100000">
+            <a:outerShdw blurRad="50800" dist="25400" dir="8100000" algn="bl" rotWithShape="0">
               <a:srgbClr val="000000">
                 <a:alpha val="12000"/>
               </a:srgbClr>
             </a:outerShdw>
           </a:effectLst>
         </p:spPr>
+        <p:txBody>
+          <a:bodyPr/>
+          <a:lstStyle/>
+          <a:p>
+            <a:endParaRPr lang="zh-TW" altLang="en-US"/>
+          </a:p>
+        </p:txBody>
       </p:sp>
       <p:sp>
         <p:nvSpPr>
@@ -10742,6 +10959,13 @@
           </a:solidFill>
           <a:ln/>
         </p:spPr>
+        <p:txBody>
+          <a:bodyPr/>
+          <a:lstStyle/>
+          <a:p>
+            <a:endParaRPr lang="zh-TW" altLang="en-US"/>
+          </a:p>
+        </p:txBody>
       </p:sp>
       <p:sp>
         <p:nvSpPr>
@@ -10764,7 +10988,7 @@
           <a:bodyPr wrap="square" lIns="0" tIns="0" rIns="0" bIns="0" rtlCol="0" anchor="ctr"/>
           <a:lstStyle/>
           <a:p>
-            <a:pPr indent="0" marL="0">
+            <a:pPr marL="0" indent="0">
               <a:buNone/>
             </a:pPr>
             <a:r>
@@ -10803,7 +11027,7 @@
           <a:bodyPr wrap="square" lIns="0" tIns="0" rIns="0" bIns="0" rtlCol="0" anchor="ctr"/>
           <a:lstStyle/>
           <a:p>
-            <a:pPr indent="0" marL="0">
+            <a:pPr marL="0" indent="0">
               <a:buNone/>
             </a:pPr>
             <a:r>
@@ -10840,6 +11064,13 @@
           </a:solidFill>
           <a:ln/>
         </p:spPr>
+        <p:txBody>
+          <a:bodyPr/>
+          <a:lstStyle/>
+          <a:p>
+            <a:endParaRPr lang="zh-TW" altLang="en-US"/>
+          </a:p>
+        </p:txBody>
       </p:sp>
       <p:sp>
         <p:nvSpPr>
@@ -10862,7 +11093,7 @@
           <a:bodyPr wrap="square" lIns="0" tIns="0" rIns="0" bIns="0" rtlCol="0" anchor="ctr"/>
           <a:lstStyle/>
           <a:p>
-            <a:pPr indent="0" marL="0">
+            <a:pPr marL="0" indent="0">
               <a:buNone/>
             </a:pPr>
             <a:r>
@@ -10904,13 +11135,20 @@
             <a:prstDash val="solid"/>
           </a:ln>
           <a:effectLst>
-            <a:outerShdw sx="100000" sy="100000" kx="0" ky="0" algn="bl" rotWithShape="0" blurRad="50800" dist="25400" dir="8100000">
+            <a:outerShdw blurRad="50800" dist="25400" dir="8100000" algn="bl" rotWithShape="0">
               <a:srgbClr val="000000">
                 <a:alpha val="12000"/>
               </a:srgbClr>
             </a:outerShdw>
           </a:effectLst>
         </p:spPr>
+        <p:txBody>
+          <a:bodyPr/>
+          <a:lstStyle/>
+          <a:p>
+            <a:endParaRPr lang="zh-TW" altLang="en-US"/>
+          </a:p>
+        </p:txBody>
       </p:sp>
       <p:sp>
         <p:nvSpPr>
@@ -10931,6 +11169,13 @@
           </a:solidFill>
           <a:ln/>
         </p:spPr>
+        <p:txBody>
+          <a:bodyPr/>
+          <a:lstStyle/>
+          <a:p>
+            <a:endParaRPr lang="zh-TW" altLang="en-US"/>
+          </a:p>
+        </p:txBody>
       </p:sp>
       <p:sp>
         <p:nvSpPr>
@@ -10953,7 +11198,7 @@
           <a:bodyPr wrap="square" lIns="0" tIns="0" rIns="0" bIns="0" rtlCol="0" anchor="ctr"/>
           <a:lstStyle/>
           <a:p>
-            <a:pPr indent="0" marL="0">
+            <a:pPr marL="0" indent="0">
               <a:buNone/>
             </a:pPr>
             <a:r>
@@ -10992,7 +11237,7 @@
           <a:bodyPr wrap="square" lIns="0" tIns="0" rIns="0" bIns="0" rtlCol="0" anchor="ctr"/>
           <a:lstStyle/>
           <a:p>
-            <a:pPr indent="0" marL="0">
+            <a:pPr marL="0" indent="0">
               <a:buNone/>
             </a:pPr>
             <a:r>
@@ -11029,6 +11274,13 @@
           </a:solidFill>
           <a:ln/>
         </p:spPr>
+        <p:txBody>
+          <a:bodyPr/>
+          <a:lstStyle/>
+          <a:p>
+            <a:endParaRPr lang="zh-TW" altLang="en-US"/>
+          </a:p>
+        </p:txBody>
       </p:sp>
       <p:sp>
         <p:nvSpPr>
@@ -11051,7 +11303,7 @@
           <a:bodyPr wrap="square" lIns="0" tIns="0" rIns="0" bIns="0" rtlCol="0" anchor="ctr"/>
           <a:lstStyle/>
           <a:p>
-            <a:pPr indent="0" marL="0">
+            <a:pPr marL="0" indent="0">
               <a:buNone/>
             </a:pPr>
             <a:r>
@@ -11093,13 +11345,20 @@
             <a:prstDash val="solid"/>
           </a:ln>
           <a:effectLst>
-            <a:outerShdw sx="100000" sy="100000" kx="0" ky="0" algn="bl" rotWithShape="0" blurRad="50800" dist="25400" dir="8100000">
+            <a:outerShdw blurRad="50800" dist="25400" dir="8100000" algn="bl" rotWithShape="0">
               <a:srgbClr val="000000">
                 <a:alpha val="12000"/>
               </a:srgbClr>
             </a:outerShdw>
           </a:effectLst>
         </p:spPr>
+        <p:txBody>
+          <a:bodyPr/>
+          <a:lstStyle/>
+          <a:p>
+            <a:endParaRPr lang="zh-TW" altLang="en-US"/>
+          </a:p>
+        </p:txBody>
       </p:sp>
       <p:sp>
         <p:nvSpPr>
@@ -11120,6 +11379,13 @@
           </a:solidFill>
           <a:ln/>
         </p:spPr>
+        <p:txBody>
+          <a:bodyPr/>
+          <a:lstStyle/>
+          <a:p>
+            <a:endParaRPr lang="zh-TW" altLang="en-US"/>
+          </a:p>
+        </p:txBody>
       </p:sp>
       <p:sp>
         <p:nvSpPr>
@@ -11142,7 +11408,7 @@
           <a:bodyPr wrap="square" lIns="0" tIns="0" rIns="0" bIns="0" rtlCol="0" anchor="ctr"/>
           <a:lstStyle/>
           <a:p>
-            <a:pPr indent="0" marL="0">
+            <a:pPr marL="0" indent="0">
               <a:buNone/>
             </a:pPr>
             <a:r>
@@ -11181,7 +11447,7 @@
           <a:bodyPr wrap="square" lIns="0" tIns="0" rIns="0" bIns="0" rtlCol="0" anchor="ctr"/>
           <a:lstStyle/>
           <a:p>
-            <a:pPr indent="0" marL="0">
+            <a:pPr marL="0" indent="0">
               <a:buNone/>
             </a:pPr>
             <a:r>
@@ -11218,6 +11484,13 @@
           </a:solidFill>
           <a:ln/>
         </p:spPr>
+        <p:txBody>
+          <a:bodyPr/>
+          <a:lstStyle/>
+          <a:p>
+            <a:endParaRPr lang="zh-TW" altLang="en-US"/>
+          </a:p>
+        </p:txBody>
       </p:sp>
       <p:sp>
         <p:nvSpPr>
@@ -11240,7 +11513,7 @@
           <a:bodyPr wrap="square" lIns="0" tIns="0" rIns="0" bIns="0" rtlCol="0" anchor="ctr"/>
           <a:lstStyle/>
           <a:p>
-            <a:pPr indent="0" marL="0">
+            <a:pPr marL="0" indent="0">
               <a:buNone/>
             </a:pPr>
             <a:r>
@@ -11282,13 +11555,20 @@
             <a:prstDash val="solid"/>
           </a:ln>
           <a:effectLst>
-            <a:outerShdw sx="100000" sy="100000" kx="0" ky="0" algn="bl" rotWithShape="0" blurRad="50800" dist="25400" dir="8100000">
+            <a:outerShdw blurRad="50800" dist="25400" dir="8100000" algn="bl" rotWithShape="0">
               <a:srgbClr val="000000">
                 <a:alpha val="12000"/>
               </a:srgbClr>
             </a:outerShdw>
           </a:effectLst>
         </p:spPr>
+        <p:txBody>
+          <a:bodyPr/>
+          <a:lstStyle/>
+          <a:p>
+            <a:endParaRPr lang="zh-TW" altLang="en-US"/>
+          </a:p>
+        </p:txBody>
       </p:sp>
       <p:sp>
         <p:nvSpPr>
@@ -11309,6 +11589,13 @@
           </a:solidFill>
           <a:ln/>
         </p:spPr>
+        <p:txBody>
+          <a:bodyPr/>
+          <a:lstStyle/>
+          <a:p>
+            <a:endParaRPr lang="zh-TW" altLang="en-US"/>
+          </a:p>
+        </p:txBody>
       </p:sp>
       <p:sp>
         <p:nvSpPr>
@@ -11331,7 +11618,7 @@
           <a:bodyPr wrap="square" lIns="0" tIns="0" rIns="0" bIns="0" rtlCol="0" anchor="ctr"/>
           <a:lstStyle/>
           <a:p>
-            <a:pPr indent="0" marL="0">
+            <a:pPr marL="0" indent="0">
               <a:buNone/>
             </a:pPr>
             <a:r>
@@ -11370,7 +11657,7 @@
           <a:bodyPr wrap="square" lIns="0" tIns="0" rIns="0" bIns="0" rtlCol="0" anchor="ctr"/>
           <a:lstStyle/>
           <a:p>
-            <a:pPr indent="0" marL="0">
+            <a:pPr marL="0" indent="0">
               <a:buNone/>
             </a:pPr>
             <a:r>
@@ -11407,6 +11694,13 @@
           </a:solidFill>
           <a:ln/>
         </p:spPr>
+        <p:txBody>
+          <a:bodyPr/>
+          <a:lstStyle/>
+          <a:p>
+            <a:endParaRPr lang="zh-TW" altLang="en-US"/>
+          </a:p>
+        </p:txBody>
       </p:sp>
       <p:sp>
         <p:nvSpPr>
@@ -11429,7 +11723,7 @@
           <a:bodyPr wrap="square" lIns="0" tIns="0" rIns="0" bIns="0" rtlCol="0" anchor="ctr"/>
           <a:lstStyle/>
           <a:p>
-            <a:pPr indent="0" marL="0">
+            <a:pPr marL="0" indent="0">
               <a:buNone/>
             </a:pPr>
             <a:r>
@@ -11491,6 +11785,13 @@
           </a:solidFill>
           <a:ln/>
         </p:spPr>
+        <p:txBody>
+          <a:bodyPr/>
+          <a:lstStyle/>
+          <a:p>
+            <a:endParaRPr lang="zh-TW" altLang="en-US"/>
+          </a:p>
+        </p:txBody>
       </p:sp>
       <p:sp>
         <p:nvSpPr>
@@ -11513,7 +11814,7 @@
           <a:bodyPr wrap="square" lIns="0" tIns="0" rIns="0" bIns="0" rtlCol="0" anchor="ctr"/>
           <a:lstStyle/>
           <a:p>
-            <a:pPr indent="0" marL="0">
+            <a:pPr marL="0" indent="0">
               <a:buNone/>
             </a:pPr>
             <a:r>
@@ -11552,7 +11853,7 @@
           <a:bodyPr wrap="square" rtlCol="0" anchor="ctr"/>
           <a:lstStyle/>
           <a:p>
-            <a:pPr algn="r" indent="0" marL="0">
+            <a:pPr marL="0" indent="0" algn="r">
               <a:buNone/>
             </a:pPr>
             <a:r>
@@ -11591,7 +11892,7 @@
           <a:bodyPr wrap="square" lIns="0" tIns="0" rIns="0" bIns="0" rtlCol="0" anchor="ctr"/>
           <a:lstStyle/>
           <a:p>
-            <a:pPr indent="0" marL="0">
+            <a:pPr marL="0" indent="0">
               <a:buNone/>
             </a:pPr>
             <a:r>
@@ -11633,13 +11934,20 @@
             <a:prstDash val="solid"/>
           </a:ln>
           <a:effectLst>
-            <a:outerShdw sx="100000" sy="100000" kx="0" ky="0" algn="bl" rotWithShape="0" blurRad="50800" dist="25400" dir="8100000">
+            <a:outerShdw blurRad="50800" dist="25400" dir="8100000" algn="bl" rotWithShape="0">
               <a:srgbClr val="000000">
                 <a:alpha val="12000"/>
               </a:srgbClr>
             </a:outerShdw>
           </a:effectLst>
         </p:spPr>
+        <p:txBody>
+          <a:bodyPr/>
+          <a:lstStyle/>
+          <a:p>
+            <a:endParaRPr lang="zh-TW" altLang="en-US"/>
+          </a:p>
+        </p:txBody>
       </p:sp>
       <p:sp>
         <p:nvSpPr>
@@ -11660,6 +11968,13 @@
           </a:solidFill>
           <a:ln/>
         </p:spPr>
+        <p:txBody>
+          <a:bodyPr/>
+          <a:lstStyle/>
+          <a:p>
+            <a:endParaRPr lang="zh-TW" altLang="en-US"/>
+          </a:p>
+        </p:txBody>
       </p:sp>
       <p:sp>
         <p:nvSpPr>
@@ -11682,7 +11997,7 @@
           <a:bodyPr wrap="square" lIns="0" tIns="0" rIns="0" bIns="0" rtlCol="0" anchor="ctr"/>
           <a:lstStyle/>
           <a:p>
-            <a:pPr indent="0" marL="0">
+            <a:pPr marL="0" indent="0">
               <a:buNone/>
             </a:pPr>
             <a:r>
@@ -11721,7 +12036,7 @@
           <a:bodyPr wrap="square" lIns="0" tIns="0" rIns="0" bIns="0" rtlCol="0" anchor="ctr"/>
           <a:lstStyle/>
           <a:p>
-            <a:pPr indent="0" marL="0">
+            <a:pPr marL="0" indent="0">
               <a:buNone/>
             </a:pPr>
             <a:r>
@@ -11738,13 +12053,13 @@
             <a:endParaRPr lang="en-US" sz="1400" dirty="0"/>
           </a:p>
           <a:p>
-            <a:pPr indent="0" marL="0">
+            <a:pPr marL="0" indent="0">
               <a:buNone/>
             </a:pPr>
             <a:endParaRPr lang="en-US" sz="1400" dirty="0"/>
           </a:p>
           <a:p>
-            <a:pPr indent="0" marL="0">
+            <a:pPr marL="0" indent="0">
               <a:buNone/>
             </a:pPr>
             <a:r>
@@ -11758,9 +12073,6 @@
               </a:rPr>
               <a:t>感謝您在本公司 財務部 服務多年。您的退休生效日為 </a:t>
             </a:r>
-            <a:pPr indent="0" marL="0">
-              <a:buNone/>
-            </a:pPr>
             <a:r>
               <a:rPr lang="en-US" sz="1400" b="1" dirty="0">
                 <a:solidFill>
@@ -11772,9 +12084,6 @@
               </a:rPr>
               <a:t>2011年09月15日</a:t>
             </a:r>
-            <a:pPr indent="0" marL="0">
-              <a:buNone/>
-            </a:pPr>
             <a:r>
               <a:rPr lang="en-US" sz="1400" dirty="0">
                 <a:solidFill>
@@ -11789,13 +12098,13 @@
             <a:endParaRPr lang="en-US" sz="1400" dirty="0"/>
           </a:p>
           <a:p>
-            <a:pPr indent="0" marL="0">
+            <a:pPr marL="0" indent="0">
               <a:buNone/>
             </a:pPr>
             <a:endParaRPr lang="en-US" sz="1400" dirty="0"/>
           </a:p>
           <a:p>
-            <a:pPr indent="0" marL="0">
+            <a:pPr marL="0" indent="0">
               <a:buNone/>
             </a:pPr>
             <a:r>
@@ -11809,9 +12118,6 @@
               </a:rPr>
               <a:t>相關退休給付金額為新台幣 </a:t>
             </a:r>
-            <a:pPr indent="0" marL="0">
-              <a:buNone/>
-            </a:pPr>
             <a:r>
               <a:rPr lang="en-US" sz="1400" b="1" dirty="0">
                 <a:solidFill>
@@ -11823,9 +12129,6 @@
               </a:rPr>
               <a:t>1,460,771</a:t>
             </a:r>
-            <a:pPr indent="0" marL="0">
-              <a:buNone/>
-            </a:pPr>
             <a:r>
               <a:rPr lang="en-US" sz="1400" dirty="0">
                 <a:solidFill>
@@ -11837,9 +12140,6 @@
               </a:rPr>
               <a:t> 元整，將於 </a:t>
             </a:r>
-            <a:pPr indent="0" marL="0">
-              <a:buNone/>
-            </a:pPr>
             <a:r>
               <a:rPr lang="en-US" sz="1400" b="1" dirty="0">
                 <a:solidFill>
@@ -11851,9 +12151,6 @@
               </a:rPr>
               <a:t>2025年06月21日</a:t>
             </a:r>
-            <a:pPr indent="0" marL="0">
-              <a:buNone/>
-            </a:pPr>
             <a:r>
               <a:rPr lang="en-US" sz="1400" dirty="0">
                 <a:solidFill>
@@ -11868,13 +12165,13 @@
             <a:endParaRPr lang="en-US" sz="1400" dirty="0"/>
           </a:p>
           <a:p>
-            <a:pPr indent="0" marL="0">
+            <a:pPr marL="0" indent="0">
               <a:buNone/>
             </a:pPr>
             <a:endParaRPr lang="en-US" sz="1400" dirty="0"/>
           </a:p>
           <a:p>
-            <a:pPr indent="0" marL="0">
+            <a:pPr marL="0" indent="0">
               <a:buNone/>
             </a:pPr>
             <a:r>
@@ -11888,9 +12185,6 @@
               </a:rPr>
               <a:t>健保將於 </a:t>
             </a:r>
-            <a:pPr indent="0" marL="0">
-              <a:buNone/>
-            </a:pPr>
             <a:r>
               <a:rPr lang="en-US" sz="1400" b="1" dirty="0">
                 <a:solidFill>
@@ -11902,9 +12196,6 @@
               </a:rPr>
               <a:t>2026年01月08日</a:t>
             </a:r>
-            <a:pPr indent="0" marL="0">
-              <a:buNone/>
-            </a:pPr>
             <a:r>
               <a:rPr lang="en-US" sz="1400" dirty="0">
                 <a:solidFill>
@@ -11919,7 +12210,7 @@
             <a:endParaRPr lang="en-US" sz="1400" dirty="0"/>
           </a:p>
           <a:p>
-            <a:pPr indent="0" marL="0">
+            <a:pPr marL="0" indent="0">
               <a:buNone/>
             </a:pPr>
             <a:r>
@@ -11958,7 +12249,7 @@
           <a:bodyPr wrap="square" lIns="0" tIns="0" rIns="0" bIns="0" rtlCol="0" anchor="ctr"/>
           <a:lstStyle/>
           <a:p>
-            <a:pPr algn="ctr" indent="0" marL="0">
+            <a:pPr marL="0" indent="0" algn="ctr">
               <a:buNone/>
             </a:pPr>
             <a:r>
@@ -12020,6 +12311,13 @@
           </a:solidFill>
           <a:ln/>
         </p:spPr>
+        <p:txBody>
+          <a:bodyPr/>
+          <a:lstStyle/>
+          <a:p>
+            <a:endParaRPr lang="zh-TW" altLang="en-US"/>
+          </a:p>
+        </p:txBody>
       </p:sp>
       <p:sp>
         <p:nvSpPr>
@@ -12042,7 +12340,7 @@
           <a:bodyPr wrap="square" lIns="0" tIns="0" rIns="0" bIns="0" rtlCol="0" anchor="ctr"/>
           <a:lstStyle/>
           <a:p>
-            <a:pPr indent="0" marL="0">
+            <a:pPr marL="0" indent="0">
               <a:buNone/>
             </a:pPr>
             <a:r>
@@ -12081,7 +12379,7 @@
           <a:bodyPr wrap="square" rtlCol="0" anchor="ctr"/>
           <a:lstStyle/>
           <a:p>
-            <a:pPr algn="r" indent="0" marL="0">
+            <a:pPr marL="0" indent="0" algn="r">
               <a:buNone/>
             </a:pPr>
             <a:r>
@@ -12123,13 +12421,20 @@
             <a:prstDash val="solid"/>
           </a:ln>
           <a:effectLst>
-            <a:outerShdw sx="100000" sy="100000" kx="0" ky="0" algn="bl" rotWithShape="0" blurRad="50800" dist="25400" dir="8100000">
+            <a:outerShdw blurRad="50800" dist="25400" dir="8100000" algn="bl" rotWithShape="0">
               <a:srgbClr val="000000">
                 <a:alpha val="12000"/>
               </a:srgbClr>
             </a:outerShdw>
           </a:effectLst>
         </p:spPr>
+        <p:txBody>
+          <a:bodyPr/>
+          <a:lstStyle/>
+          <a:p>
+            <a:endParaRPr lang="zh-TW" altLang="en-US"/>
+          </a:p>
+        </p:txBody>
       </p:sp>
       <p:sp>
         <p:nvSpPr>
@@ -12150,6 +12455,13 @@
           </a:solidFill>
           <a:ln/>
         </p:spPr>
+        <p:txBody>
+          <a:bodyPr/>
+          <a:lstStyle/>
+          <a:p>
+            <a:endParaRPr lang="zh-TW" altLang="en-US"/>
+          </a:p>
+        </p:txBody>
       </p:sp>
       <p:sp>
         <p:nvSpPr>
@@ -12172,7 +12484,7 @@
           <a:bodyPr wrap="square" lIns="0" tIns="0" rIns="0" bIns="0" rtlCol="0" anchor="ctr"/>
           <a:lstStyle/>
           <a:p>
-            <a:pPr algn="ctr" indent="0" marL="0">
+            <a:pPr marL="0" indent="0" algn="ctr">
               <a:buNone/>
             </a:pPr>
             <a:r>
@@ -12211,7 +12523,7 @@
           <a:bodyPr wrap="square" lIns="0" tIns="0" rIns="0" bIns="0" rtlCol="0" anchor="ctr"/>
           <a:lstStyle/>
           <a:p>
-            <a:pPr indent="0" marL="0">
+            <a:pPr marL="0" indent="0">
               <a:buNone/>
             </a:pPr>
             <a:r>
@@ -12250,7 +12562,7 @@
           <a:bodyPr wrap="square" lIns="0" tIns="0" rIns="0" bIns="0" rtlCol="0" anchor="ctr"/>
           <a:lstStyle/>
           <a:p>
-            <a:pPr indent="0" marL="0">
+            <a:pPr marL="0" indent="0">
               <a:buNone/>
             </a:pPr>
             <a:r>
@@ -12289,7 +12601,7 @@
           <a:bodyPr wrap="square" lIns="0" tIns="0" rIns="0" bIns="0" rtlCol="0" anchor="ctr"/>
           <a:lstStyle/>
           <a:p>
-            <a:pPr indent="0" marL="0">
+            <a:pPr marL="0" indent="0">
               <a:buNone/>
             </a:pPr>
             <a:r>
@@ -12331,13 +12643,20 @@
             <a:prstDash val="solid"/>
           </a:ln>
           <a:effectLst>
-            <a:outerShdw sx="100000" sy="100000" kx="0" ky="0" algn="bl" rotWithShape="0" blurRad="50800" dist="25400" dir="8100000">
+            <a:outerShdw blurRad="50800" dist="25400" dir="8100000" algn="bl" rotWithShape="0">
               <a:srgbClr val="000000">
                 <a:alpha val="12000"/>
               </a:srgbClr>
             </a:outerShdw>
           </a:effectLst>
         </p:spPr>
+        <p:txBody>
+          <a:bodyPr/>
+          <a:lstStyle/>
+          <a:p>
+            <a:endParaRPr lang="zh-TW" altLang="en-US"/>
+          </a:p>
+        </p:txBody>
       </p:sp>
       <p:sp>
         <p:nvSpPr>
@@ -12358,6 +12677,13 @@
           </a:solidFill>
           <a:ln/>
         </p:spPr>
+        <p:txBody>
+          <a:bodyPr/>
+          <a:lstStyle/>
+          <a:p>
+            <a:endParaRPr lang="zh-TW" altLang="en-US"/>
+          </a:p>
+        </p:txBody>
       </p:sp>
       <p:sp>
         <p:nvSpPr>
@@ -12380,7 +12706,7 @@
           <a:bodyPr wrap="square" lIns="0" tIns="0" rIns="0" bIns="0" rtlCol="0" anchor="ctr"/>
           <a:lstStyle/>
           <a:p>
-            <a:pPr algn="ctr" indent="0" marL="0">
+            <a:pPr marL="0" indent="0" algn="ctr">
               <a:buNone/>
             </a:pPr>
             <a:r>
@@ -12419,7 +12745,7 @@
           <a:bodyPr wrap="square" lIns="0" tIns="0" rIns="0" bIns="0" rtlCol="0" anchor="ctr"/>
           <a:lstStyle/>
           <a:p>
-            <a:pPr indent="0" marL="0">
+            <a:pPr marL="0" indent="0">
               <a:buNone/>
             </a:pPr>
             <a:r>
@@ -12458,7 +12784,7 @@
           <a:bodyPr wrap="square" lIns="0" tIns="0" rIns="0" bIns="0" rtlCol="0" anchor="ctr"/>
           <a:lstStyle/>
           <a:p>
-            <a:pPr indent="0" marL="0">
+            <a:pPr marL="0" indent="0">
               <a:buNone/>
             </a:pPr>
             <a:r>
@@ -12497,7 +12823,7 @@
           <a:bodyPr wrap="square" lIns="0" tIns="0" rIns="0" bIns="0" rtlCol="0" anchor="ctr"/>
           <a:lstStyle/>
           <a:p>
-            <a:pPr indent="0" marL="0">
+            <a:pPr marL="0" indent="0">
               <a:buNone/>
             </a:pPr>
             <a:r>
@@ -12539,13 +12865,20 @@
             <a:prstDash val="solid"/>
           </a:ln>
           <a:effectLst>
-            <a:outerShdw sx="100000" sy="100000" kx="0" ky="0" algn="bl" rotWithShape="0" blurRad="50800" dist="25400" dir="8100000">
+            <a:outerShdw blurRad="50800" dist="25400" dir="8100000" algn="bl" rotWithShape="0">
               <a:srgbClr val="000000">
                 <a:alpha val="12000"/>
               </a:srgbClr>
             </a:outerShdw>
           </a:effectLst>
         </p:spPr>
+        <p:txBody>
+          <a:bodyPr/>
+          <a:lstStyle/>
+          <a:p>
+            <a:endParaRPr lang="zh-TW" altLang="en-US"/>
+          </a:p>
+        </p:txBody>
       </p:sp>
       <p:sp>
         <p:nvSpPr>
@@ -12566,6 +12899,13 @@
           </a:solidFill>
           <a:ln/>
         </p:spPr>
+        <p:txBody>
+          <a:bodyPr/>
+          <a:lstStyle/>
+          <a:p>
+            <a:endParaRPr lang="zh-TW" altLang="en-US"/>
+          </a:p>
+        </p:txBody>
       </p:sp>
       <p:sp>
         <p:nvSpPr>
@@ -12588,7 +12928,7 @@
           <a:bodyPr wrap="square" lIns="0" tIns="0" rIns="0" bIns="0" rtlCol="0" anchor="ctr"/>
           <a:lstStyle/>
           <a:p>
-            <a:pPr algn="ctr" indent="0" marL="0">
+            <a:pPr marL="0" indent="0" algn="ctr">
               <a:buNone/>
             </a:pPr>
             <a:r>
@@ -12627,7 +12967,7 @@
           <a:bodyPr wrap="square" lIns="0" tIns="0" rIns="0" bIns="0" rtlCol="0" anchor="ctr"/>
           <a:lstStyle/>
           <a:p>
-            <a:pPr indent="0" marL="0">
+            <a:pPr marL="0" indent="0">
               <a:buNone/>
             </a:pPr>
             <a:r>
@@ -12666,7 +13006,7 @@
           <a:bodyPr wrap="square" lIns="0" tIns="0" rIns="0" bIns="0" rtlCol="0" anchor="ctr"/>
           <a:lstStyle/>
           <a:p>
-            <a:pPr indent="0" marL="0">
+            <a:pPr marL="0" indent="0">
               <a:buNone/>
             </a:pPr>
             <a:r>
@@ -12705,7 +13045,7 @@
           <a:bodyPr wrap="square" lIns="0" tIns="0" rIns="0" bIns="0" rtlCol="0" anchor="ctr"/>
           <a:lstStyle/>
           <a:p>
-            <a:pPr indent="0" marL="0">
+            <a:pPr marL="0" indent="0">
               <a:buNone/>
             </a:pPr>
             <a:r>
@@ -12747,13 +13087,20 @@
             <a:prstDash val="solid"/>
           </a:ln>
           <a:effectLst>
-            <a:outerShdw sx="100000" sy="100000" kx="0" ky="0" algn="bl" rotWithShape="0" blurRad="50800" dist="25400" dir="8100000">
+            <a:outerShdw blurRad="50800" dist="25400" dir="8100000" algn="bl" rotWithShape="0">
               <a:srgbClr val="000000">
                 <a:alpha val="12000"/>
               </a:srgbClr>
             </a:outerShdw>
           </a:effectLst>
         </p:spPr>
+        <p:txBody>
+          <a:bodyPr/>
+          <a:lstStyle/>
+          <a:p>
+            <a:endParaRPr lang="zh-TW" altLang="en-US"/>
+          </a:p>
+        </p:txBody>
       </p:sp>
       <p:sp>
         <p:nvSpPr>
@@ -12774,6 +13121,13 @@
           </a:solidFill>
           <a:ln/>
         </p:spPr>
+        <p:txBody>
+          <a:bodyPr/>
+          <a:lstStyle/>
+          <a:p>
+            <a:endParaRPr lang="zh-TW" altLang="en-US"/>
+          </a:p>
+        </p:txBody>
       </p:sp>
       <p:sp>
         <p:nvSpPr>
@@ -12796,7 +13150,7 @@
           <a:bodyPr wrap="square" lIns="0" tIns="0" rIns="0" bIns="0" rtlCol="0" anchor="ctr"/>
           <a:lstStyle/>
           <a:p>
-            <a:pPr algn="ctr" indent="0" marL="0">
+            <a:pPr marL="0" indent="0" algn="ctr">
               <a:buNone/>
             </a:pPr>
             <a:r>
@@ -12835,7 +13189,7 @@
           <a:bodyPr wrap="square" lIns="0" tIns="0" rIns="0" bIns="0" rtlCol="0" anchor="ctr"/>
           <a:lstStyle/>
           <a:p>
-            <a:pPr indent="0" marL="0">
+            <a:pPr marL="0" indent="0">
               <a:buNone/>
             </a:pPr>
             <a:r>
@@ -12874,7 +13228,7 @@
           <a:bodyPr wrap="square" lIns="0" tIns="0" rIns="0" bIns="0" rtlCol="0" anchor="ctr"/>
           <a:lstStyle/>
           <a:p>
-            <a:pPr indent="0" marL="0">
+            <a:pPr marL="0" indent="0">
               <a:buNone/>
             </a:pPr>
             <a:r>
@@ -12913,7 +13267,7 @@
           <a:bodyPr wrap="square" lIns="0" tIns="0" rIns="0" bIns="0" rtlCol="0" anchor="ctr"/>
           <a:lstStyle/>
           <a:p>
-            <a:pPr indent="0" marL="0">
+            <a:pPr marL="0" indent="0">
               <a:buNone/>
             </a:pPr>
             <a:r>
@@ -12955,13 +13309,20 @@
             <a:prstDash val="solid"/>
           </a:ln>
           <a:effectLst>
-            <a:outerShdw sx="100000" sy="100000" kx="0" ky="0" algn="bl" rotWithShape="0" blurRad="50800" dist="25400" dir="8100000">
+            <a:outerShdw blurRad="50800" dist="25400" dir="8100000" algn="bl" rotWithShape="0">
               <a:srgbClr val="000000">
                 <a:alpha val="12000"/>
               </a:srgbClr>
             </a:outerShdw>
           </a:effectLst>
         </p:spPr>
+        <p:txBody>
+          <a:bodyPr/>
+          <a:lstStyle/>
+          <a:p>
+            <a:endParaRPr lang="zh-TW" altLang="en-US"/>
+          </a:p>
+        </p:txBody>
       </p:sp>
       <p:sp>
         <p:nvSpPr>
@@ -12982,6 +13343,13 @@
           </a:solidFill>
           <a:ln/>
         </p:spPr>
+        <p:txBody>
+          <a:bodyPr/>
+          <a:lstStyle/>
+          <a:p>
+            <a:endParaRPr lang="zh-TW" altLang="en-US"/>
+          </a:p>
+        </p:txBody>
       </p:sp>
       <p:sp>
         <p:nvSpPr>
@@ -13004,7 +13372,7 @@
           <a:bodyPr wrap="square" lIns="0" tIns="0" rIns="0" bIns="0" rtlCol="0" anchor="ctr"/>
           <a:lstStyle/>
           <a:p>
-            <a:pPr algn="ctr" indent="0" marL="0">
+            <a:pPr marL="0" indent="0" algn="ctr">
               <a:buNone/>
             </a:pPr>
             <a:r>
@@ -13043,7 +13411,7 @@
           <a:bodyPr wrap="square" lIns="0" tIns="0" rIns="0" bIns="0" rtlCol="0" anchor="ctr"/>
           <a:lstStyle/>
           <a:p>
-            <a:pPr indent="0" marL="0">
+            <a:pPr marL="0" indent="0">
               <a:buNone/>
             </a:pPr>
             <a:r>
@@ -13082,7 +13450,7 @@
           <a:bodyPr wrap="square" lIns="0" tIns="0" rIns="0" bIns="0" rtlCol="0" anchor="ctr"/>
           <a:lstStyle/>
           <a:p>
-            <a:pPr indent="0" marL="0">
+            <a:pPr marL="0" indent="0">
               <a:buNone/>
             </a:pPr>
             <a:r>
@@ -13121,7 +13489,7 @@
           <a:bodyPr wrap="square" lIns="0" tIns="0" rIns="0" bIns="0" rtlCol="0" anchor="ctr"/>
           <a:lstStyle/>
           <a:p>
-            <a:pPr indent="0" marL="0">
+            <a:pPr marL="0" indent="0">
               <a:buNone/>
             </a:pPr>
             <a:r>
@@ -13183,6 +13551,13 @@
           </a:solidFill>
           <a:ln/>
         </p:spPr>
+        <p:txBody>
+          <a:bodyPr/>
+          <a:lstStyle/>
+          <a:p>
+            <a:endParaRPr lang="zh-TW" altLang="en-US"/>
+          </a:p>
+        </p:txBody>
       </p:sp>
       <p:sp>
         <p:nvSpPr>
@@ -13205,7 +13580,7 @@
           <a:bodyPr wrap="square" lIns="0" tIns="0" rIns="0" bIns="0" rtlCol="0" anchor="ctr"/>
           <a:lstStyle/>
           <a:p>
-            <a:pPr indent="0" marL="0">
+            <a:pPr marL="0" indent="0">
               <a:buNone/>
             </a:pPr>
             <a:r>
@@ -13244,7 +13619,7 @@
           <a:bodyPr wrap="square" rtlCol="0" anchor="ctr"/>
           <a:lstStyle/>
           <a:p>
-            <a:pPr algn="r" indent="0" marL="0">
+            <a:pPr marL="0" indent="0" algn="r">
               <a:buNone/>
             </a:pPr>
             <a:r>
@@ -13286,13 +13661,20 @@
             <a:prstDash val="solid"/>
           </a:ln>
           <a:effectLst>
-            <a:outerShdw sx="100000" sy="100000" kx="0" ky="0" algn="bl" rotWithShape="0" blurRad="50800" dist="25400" dir="8100000">
+            <a:outerShdw blurRad="50800" dist="25400" dir="8100000" algn="bl" rotWithShape="0">
               <a:srgbClr val="000000">
                 <a:alpha val="12000"/>
               </a:srgbClr>
             </a:outerShdw>
           </a:effectLst>
         </p:spPr>
+        <p:txBody>
+          <a:bodyPr/>
+          <a:lstStyle/>
+          <a:p>
+            <a:endParaRPr lang="zh-TW" altLang="en-US"/>
+          </a:p>
+        </p:txBody>
       </p:sp>
       <p:sp>
         <p:nvSpPr>
@@ -13313,6 +13695,13 @@
           </a:solidFill>
           <a:ln/>
         </p:spPr>
+        <p:txBody>
+          <a:bodyPr/>
+          <a:lstStyle/>
+          <a:p>
+            <a:endParaRPr lang="zh-TW" altLang="en-US"/>
+          </a:p>
+        </p:txBody>
       </p:sp>
       <p:sp>
         <p:nvSpPr>
@@ -13335,7 +13724,7 @@
           <a:bodyPr wrap="square" lIns="0" tIns="0" rIns="0" bIns="0" rtlCol="0" anchor="ctr"/>
           <a:lstStyle/>
           <a:p>
-            <a:pPr algn="ctr" indent="0" marL="0">
+            <a:pPr marL="0" indent="0" algn="ctr">
               <a:buNone/>
             </a:pPr>
             <a:r>
@@ -13374,7 +13763,7 @@
           <a:bodyPr wrap="square" lIns="0" tIns="0" rIns="0" bIns="0" rtlCol="0" anchor="ctr"/>
           <a:lstStyle/>
           <a:p>
-            <a:pPr indent="0" marL="0">
+            <a:pPr marL="0" indent="0">
               <a:buNone/>
             </a:pPr>
             <a:r>
@@ -13413,7 +13802,7 @@
           <a:bodyPr wrap="square" lIns="0" tIns="0" rIns="0" bIns="0" rtlCol="0" anchor="ctr"/>
           <a:lstStyle/>
           <a:p>
-            <a:pPr indent="0" marL="0">
+            <a:pPr marL="0" indent="0">
               <a:buNone/>
             </a:pPr>
             <a:r>
@@ -13455,13 +13844,20 @@
             <a:prstDash val="solid"/>
           </a:ln>
           <a:effectLst>
-            <a:outerShdw sx="100000" sy="100000" kx="0" ky="0" algn="bl" rotWithShape="0" blurRad="50800" dist="25400" dir="8100000">
+            <a:outerShdw blurRad="50800" dist="25400" dir="8100000" algn="bl" rotWithShape="0">
               <a:srgbClr val="000000">
                 <a:alpha val="12000"/>
               </a:srgbClr>
             </a:outerShdw>
           </a:effectLst>
         </p:spPr>
+        <p:txBody>
+          <a:bodyPr/>
+          <a:lstStyle/>
+          <a:p>
+            <a:endParaRPr lang="zh-TW" altLang="en-US"/>
+          </a:p>
+        </p:txBody>
       </p:sp>
       <p:sp>
         <p:nvSpPr>
@@ -13482,6 +13878,13 @@
           </a:solidFill>
           <a:ln/>
         </p:spPr>
+        <p:txBody>
+          <a:bodyPr/>
+          <a:lstStyle/>
+          <a:p>
+            <a:endParaRPr lang="zh-TW" altLang="en-US"/>
+          </a:p>
+        </p:txBody>
       </p:sp>
       <p:sp>
         <p:nvSpPr>
@@ -13504,7 +13907,7 @@
           <a:bodyPr wrap="square" lIns="0" tIns="0" rIns="0" bIns="0" rtlCol="0" anchor="ctr"/>
           <a:lstStyle/>
           <a:p>
-            <a:pPr algn="ctr" indent="0" marL="0">
+            <a:pPr marL="0" indent="0" algn="ctr">
               <a:buNone/>
             </a:pPr>
             <a:r>
@@ -13543,7 +13946,7 @@
           <a:bodyPr wrap="square" lIns="0" tIns="0" rIns="0" bIns="0" rtlCol="0" anchor="ctr"/>
           <a:lstStyle/>
           <a:p>
-            <a:pPr indent="0" marL="0">
+            <a:pPr marL="0" indent="0">
               <a:buNone/>
             </a:pPr>
             <a:r>
@@ -13582,7 +13985,7 @@
           <a:bodyPr wrap="square" lIns="0" tIns="0" rIns="0" bIns="0" rtlCol="0" anchor="ctr"/>
           <a:lstStyle/>
           <a:p>
-            <a:pPr indent="0" marL="0">
+            <a:pPr marL="0" indent="0">
               <a:buNone/>
             </a:pPr>
             <a:r>
@@ -13624,13 +14027,20 @@
             <a:prstDash val="solid"/>
           </a:ln>
           <a:effectLst>
-            <a:outerShdw sx="100000" sy="100000" kx="0" ky="0" algn="bl" rotWithShape="0" blurRad="50800" dist="25400" dir="8100000">
+            <a:outerShdw blurRad="50800" dist="25400" dir="8100000" algn="bl" rotWithShape="0">
               <a:srgbClr val="000000">
                 <a:alpha val="12000"/>
               </a:srgbClr>
             </a:outerShdw>
           </a:effectLst>
         </p:spPr>
+        <p:txBody>
+          <a:bodyPr/>
+          <a:lstStyle/>
+          <a:p>
+            <a:endParaRPr lang="zh-TW" altLang="en-US"/>
+          </a:p>
+        </p:txBody>
       </p:sp>
       <p:sp>
         <p:nvSpPr>
@@ -13651,6 +14061,13 @@
           </a:solidFill>
           <a:ln/>
         </p:spPr>
+        <p:txBody>
+          <a:bodyPr/>
+          <a:lstStyle/>
+          <a:p>
+            <a:endParaRPr lang="zh-TW" altLang="en-US"/>
+          </a:p>
+        </p:txBody>
       </p:sp>
       <p:sp>
         <p:nvSpPr>
@@ -13673,7 +14090,7 @@
           <a:bodyPr wrap="square" lIns="0" tIns="0" rIns="0" bIns="0" rtlCol="0" anchor="ctr"/>
           <a:lstStyle/>
           <a:p>
-            <a:pPr algn="ctr" indent="0" marL="0">
+            <a:pPr marL="0" indent="0" algn="ctr">
               <a:buNone/>
             </a:pPr>
             <a:r>
@@ -13712,7 +14129,7 @@
           <a:bodyPr wrap="square" lIns="0" tIns="0" rIns="0" bIns="0" rtlCol="0" anchor="ctr"/>
           <a:lstStyle/>
           <a:p>
-            <a:pPr indent="0" marL="0">
+            <a:pPr marL="0" indent="0">
               <a:buNone/>
             </a:pPr>
             <a:r>
@@ -13751,7 +14168,7 @@
           <a:bodyPr wrap="square" lIns="0" tIns="0" rIns="0" bIns="0" rtlCol="0" anchor="ctr"/>
           <a:lstStyle/>
           <a:p>
-            <a:pPr indent="0" marL="0">
+            <a:pPr marL="0" indent="0">
               <a:buNone/>
             </a:pPr>
             <a:r>
@@ -13785,6 +14202,7 @@
         <a:solidFill>
           <a:srgbClr val="1F4E79"/>
         </a:solidFill>
+        <a:effectLst/>
       </p:bgPr>
     </p:bg>
     <p:spTree>
@@ -13820,6 +14238,13 @@
           </a:solidFill>
           <a:ln/>
         </p:spPr>
+        <p:txBody>
+          <a:bodyPr/>
+          <a:lstStyle/>
+          <a:p>
+            <a:endParaRPr lang="zh-TW" altLang="en-US"/>
+          </a:p>
+        </p:txBody>
       </p:sp>
       <p:sp>
         <p:nvSpPr>
@@ -13842,7 +14267,7 @@
           <a:bodyPr wrap="square" rtlCol="0" anchor="ctr"/>
           <a:lstStyle/>
           <a:p>
-            <a:pPr indent="0" marL="0">
+            <a:pPr marL="0" indent="0">
               <a:buNone/>
             </a:pPr>
             <a:r>
@@ -13881,7 +14306,7 @@
           <a:bodyPr wrap="square" rtlCol="0" anchor="ctr"/>
           <a:lstStyle/>
           <a:p>
-            <a:pPr indent="0" marL="0">
+            <a:pPr marL="0" indent="0">
               <a:buNone/>
             </a:pPr>
             <a:r>
@@ -13923,13 +14348,20 @@
             <a:prstDash val="solid"/>
           </a:ln>
           <a:effectLst>
-            <a:outerShdw sx="100000" sy="100000" kx="0" ky="0" algn="bl" rotWithShape="0" blurRad="50800" dist="25400" dir="8100000">
+            <a:outerShdw blurRad="50800" dist="25400" dir="8100000" algn="bl" rotWithShape="0">
               <a:srgbClr val="000000">
                 <a:alpha val="12000"/>
               </a:srgbClr>
             </a:outerShdw>
           </a:effectLst>
         </p:spPr>
+        <p:txBody>
+          <a:bodyPr/>
+          <a:lstStyle/>
+          <a:p>
+            <a:endParaRPr lang="zh-TW" altLang="en-US"/>
+          </a:p>
+        </p:txBody>
       </p:sp>
       <p:sp>
         <p:nvSpPr>
@@ -13952,7 +14384,7 @@
           <a:bodyPr wrap="square" lIns="0" tIns="0" rIns="0" bIns="0" rtlCol="0" anchor="ctr"/>
           <a:lstStyle/>
           <a:p>
-            <a:pPr indent="0" marL="0">
+            <a:pPr marL="0" indent="0">
               <a:buNone/>
             </a:pPr>
             <a:r>
@@ -13991,7 +14423,7 @@
           <a:bodyPr wrap="square" lIns="0" tIns="0" rIns="0" bIns="0" rtlCol="0" anchor="ctr"/>
           <a:lstStyle/>
           <a:p>
-            <a:pPr indent="0" marL="0">
+            <a:pPr marL="0" indent="0">
               <a:buNone/>
             </a:pPr>
             <a:r>
@@ -14033,13 +14465,20 @@
             <a:prstDash val="solid"/>
           </a:ln>
           <a:effectLst>
-            <a:outerShdw sx="100000" sy="100000" kx="0" ky="0" algn="bl" rotWithShape="0" blurRad="50800" dist="25400" dir="8100000">
+            <a:outerShdw blurRad="50800" dist="25400" dir="8100000" algn="bl" rotWithShape="0">
               <a:srgbClr val="000000">
                 <a:alpha val="12000"/>
               </a:srgbClr>
             </a:outerShdw>
           </a:effectLst>
         </p:spPr>
+        <p:txBody>
+          <a:bodyPr/>
+          <a:lstStyle/>
+          <a:p>
+            <a:endParaRPr lang="zh-TW" altLang="en-US"/>
+          </a:p>
+        </p:txBody>
       </p:sp>
       <p:sp>
         <p:nvSpPr>
@@ -14062,7 +14501,7 @@
           <a:bodyPr wrap="square" lIns="0" tIns="0" rIns="0" bIns="0" rtlCol="0" anchor="ctr"/>
           <a:lstStyle/>
           <a:p>
-            <a:pPr indent="0" marL="0">
+            <a:pPr marL="0" indent="0">
               <a:buNone/>
             </a:pPr>
             <a:r>
@@ -14101,7 +14540,7 @@
           <a:bodyPr wrap="square" lIns="0" tIns="0" rIns="0" bIns="0" rtlCol="0" anchor="ctr"/>
           <a:lstStyle/>
           <a:p>
-            <a:pPr indent="0" marL="0">
+            <a:pPr marL="0" indent="0">
               <a:buNone/>
             </a:pPr>
             <a:r>
@@ -14143,13 +14582,20 @@
             <a:prstDash val="solid"/>
           </a:ln>
           <a:effectLst>
-            <a:outerShdw sx="100000" sy="100000" kx="0" ky="0" algn="bl" rotWithShape="0" blurRad="50800" dist="25400" dir="8100000">
+            <a:outerShdw blurRad="50800" dist="25400" dir="8100000" algn="bl" rotWithShape="0">
               <a:srgbClr val="000000">
                 <a:alpha val="12000"/>
               </a:srgbClr>
             </a:outerShdw>
           </a:effectLst>
         </p:spPr>
+        <p:txBody>
+          <a:bodyPr/>
+          <a:lstStyle/>
+          <a:p>
+            <a:endParaRPr lang="zh-TW" altLang="en-US"/>
+          </a:p>
+        </p:txBody>
       </p:sp>
       <p:sp>
         <p:nvSpPr>
@@ -14172,7 +14618,7 @@
           <a:bodyPr wrap="square" lIns="0" tIns="0" rIns="0" bIns="0" rtlCol="0" anchor="ctr"/>
           <a:lstStyle/>
           <a:p>
-            <a:pPr indent="0" marL="0">
+            <a:pPr marL="0" indent="0">
               <a:buNone/>
             </a:pPr>
             <a:r>
@@ -14211,7 +14657,7 @@
           <a:bodyPr wrap="square" lIns="0" tIns="0" rIns="0" bIns="0" rtlCol="0" anchor="ctr"/>
           <a:lstStyle/>
           <a:p>
-            <a:pPr indent="0" marL="0">
+            <a:pPr marL="0" indent="0">
               <a:buNone/>
             </a:pPr>
             <a:r>
@@ -14253,13 +14699,20 @@
             <a:prstDash val="solid"/>
           </a:ln>
           <a:effectLst>
-            <a:outerShdw sx="100000" sy="100000" kx="0" ky="0" algn="bl" rotWithShape="0" blurRad="50800" dist="25400" dir="8100000">
+            <a:outerShdw blurRad="50800" dist="25400" dir="8100000" algn="bl" rotWithShape="0">
               <a:srgbClr val="000000">
                 <a:alpha val="12000"/>
               </a:srgbClr>
             </a:outerShdw>
           </a:effectLst>
         </p:spPr>
+        <p:txBody>
+          <a:bodyPr/>
+          <a:lstStyle/>
+          <a:p>
+            <a:endParaRPr lang="zh-TW" altLang="en-US"/>
+          </a:p>
+        </p:txBody>
       </p:sp>
       <p:sp>
         <p:nvSpPr>
@@ -14282,7 +14735,7 @@
           <a:bodyPr wrap="square" lIns="0" tIns="0" rIns="0" bIns="0" rtlCol="0" anchor="ctr"/>
           <a:lstStyle/>
           <a:p>
-            <a:pPr indent="0" marL="0">
+            <a:pPr marL="0" indent="0">
               <a:buNone/>
             </a:pPr>
             <a:r>
@@ -14321,7 +14774,7 @@
           <a:bodyPr wrap="square" lIns="0" tIns="0" rIns="0" bIns="0" rtlCol="0" anchor="ctr"/>
           <a:lstStyle/>
           <a:p>
-            <a:pPr indent="0" marL="0">
+            <a:pPr marL="0" indent="0">
               <a:buNone/>
             </a:pPr>
             <a:r>
@@ -14360,7 +14813,7 @@
           <a:bodyPr wrap="square" rtlCol="0" anchor="ctr"/>
           <a:lstStyle/>
           <a:p>
-            <a:pPr algn="r" indent="0" marL="0">
+            <a:pPr marL="0" indent="0" algn="r">
               <a:buNone/>
             </a:pPr>
             <a:r>
@@ -14422,6 +14875,13 @@
           </a:solidFill>
           <a:ln/>
         </p:spPr>
+        <p:txBody>
+          <a:bodyPr/>
+          <a:lstStyle/>
+          <a:p>
+            <a:endParaRPr lang="zh-TW" altLang="en-US"/>
+          </a:p>
+        </p:txBody>
       </p:sp>
       <p:sp>
         <p:nvSpPr>
@@ -14444,7 +14904,7 @@
           <a:bodyPr wrap="square" lIns="0" tIns="0" rIns="0" bIns="0" rtlCol="0" anchor="ctr"/>
           <a:lstStyle/>
           <a:p>
-            <a:pPr indent="0" marL="0">
+            <a:pPr marL="0" indent="0">
               <a:buNone/>
             </a:pPr>
             <a:r>
@@ -14483,7 +14943,7 @@
           <a:bodyPr wrap="square" rtlCol="0" anchor="ctr"/>
           <a:lstStyle/>
           <a:p>
-            <a:pPr algn="r" indent="0" marL="0">
+            <a:pPr marL="0" indent="0" algn="r">
               <a:buNone/>
             </a:pPr>
             <a:r>
@@ -14525,13 +14985,20 @@
             <a:prstDash val="solid"/>
           </a:ln>
           <a:effectLst>
-            <a:outerShdw sx="100000" sy="100000" kx="0" ky="0" algn="bl" rotWithShape="0" blurRad="50800" dist="25400" dir="8100000">
+            <a:outerShdw blurRad="50800" dist="25400" dir="8100000" algn="bl" rotWithShape="0">
               <a:srgbClr val="000000">
                 <a:alpha val="12000"/>
               </a:srgbClr>
             </a:outerShdw>
           </a:effectLst>
         </p:spPr>
+        <p:txBody>
+          <a:bodyPr/>
+          <a:lstStyle/>
+          <a:p>
+            <a:endParaRPr lang="zh-TW" altLang="en-US"/>
+          </a:p>
+        </p:txBody>
       </p:sp>
       <p:sp>
         <p:nvSpPr>
@@ -14552,6 +15019,13 @@
           </a:solidFill>
           <a:ln/>
         </p:spPr>
+        <p:txBody>
+          <a:bodyPr/>
+          <a:lstStyle/>
+          <a:p>
+            <a:endParaRPr lang="zh-TW" altLang="en-US"/>
+          </a:p>
+        </p:txBody>
       </p:sp>
       <p:sp>
         <p:nvSpPr>
@@ -14574,7 +15048,7 @@
           <a:bodyPr wrap="square" lIns="0" tIns="0" rIns="0" bIns="0" rtlCol="0" anchor="ctr"/>
           <a:lstStyle/>
           <a:p>
-            <a:pPr indent="0" marL="0">
+            <a:pPr marL="0" indent="0">
               <a:buNone/>
             </a:pPr>
             <a:r>
@@ -14613,7 +15087,7 @@
           <a:bodyPr wrap="square" lIns="0" tIns="0" rIns="0" bIns="0" rtlCol="0" anchor="ctr"/>
           <a:lstStyle/>
           <a:p>
-            <a:pPr indent="0" marL="0">
+            <a:pPr marL="0" indent="0">
               <a:buNone/>
             </a:pPr>
             <a:r>
@@ -14630,7 +15104,7 @@
             <a:endParaRPr lang="en-US" sz="1300" dirty="0"/>
           </a:p>
           <a:p>
-            <a:pPr indent="0" marL="0">
+            <a:pPr marL="0" indent="0">
               <a:buNone/>
             </a:pPr>
             <a:r>
@@ -14672,13 +15146,20 @@
             <a:prstDash val="solid"/>
           </a:ln>
           <a:effectLst>
-            <a:outerShdw sx="100000" sy="100000" kx="0" ky="0" algn="bl" rotWithShape="0" blurRad="50800" dist="25400" dir="8100000">
+            <a:outerShdw blurRad="50800" dist="25400" dir="8100000" algn="bl" rotWithShape="0">
               <a:srgbClr val="000000">
                 <a:alpha val="12000"/>
               </a:srgbClr>
             </a:outerShdw>
           </a:effectLst>
         </p:spPr>
+        <p:txBody>
+          <a:bodyPr/>
+          <a:lstStyle/>
+          <a:p>
+            <a:endParaRPr lang="zh-TW" altLang="en-US"/>
+          </a:p>
+        </p:txBody>
       </p:sp>
       <p:sp>
         <p:nvSpPr>
@@ -14699,6 +15180,13 @@
           </a:solidFill>
           <a:ln/>
         </p:spPr>
+        <p:txBody>
+          <a:bodyPr/>
+          <a:lstStyle/>
+          <a:p>
+            <a:endParaRPr lang="zh-TW" altLang="en-US"/>
+          </a:p>
+        </p:txBody>
       </p:sp>
       <p:sp>
         <p:nvSpPr>
@@ -14721,7 +15209,7 @@
           <a:bodyPr wrap="square" lIns="0" tIns="0" rIns="0" bIns="0" rtlCol="0" anchor="ctr"/>
           <a:lstStyle/>
           <a:p>
-            <a:pPr indent="0" marL="0">
+            <a:pPr marL="0" indent="0">
               <a:buNone/>
             </a:pPr>
             <a:r>
@@ -14760,7 +15248,7 @@
           <a:bodyPr wrap="square" lIns="0" tIns="0" rIns="0" bIns="0" rtlCol="0" anchor="ctr"/>
           <a:lstStyle/>
           <a:p>
-            <a:pPr indent="0" marL="0">
+            <a:pPr marL="0" indent="0">
               <a:buNone/>
             </a:pPr>
             <a:r>
@@ -14777,7 +15265,7 @@
             <a:endParaRPr lang="en-US" sz="1300" dirty="0"/>
           </a:p>
           <a:p>
-            <a:pPr indent="0" marL="0">
+            <a:pPr marL="0" indent="0">
               <a:buNone/>
             </a:pPr>
             <a:r>
@@ -14819,13 +15307,20 @@
             <a:prstDash val="solid"/>
           </a:ln>
           <a:effectLst>
-            <a:outerShdw sx="100000" sy="100000" kx="0" ky="0" algn="bl" rotWithShape="0" blurRad="50800" dist="25400" dir="8100000">
+            <a:outerShdw blurRad="50800" dist="25400" dir="8100000" algn="bl" rotWithShape="0">
               <a:srgbClr val="000000">
                 <a:alpha val="12000"/>
               </a:srgbClr>
             </a:outerShdw>
           </a:effectLst>
         </p:spPr>
+        <p:txBody>
+          <a:bodyPr/>
+          <a:lstStyle/>
+          <a:p>
+            <a:endParaRPr lang="zh-TW" altLang="en-US"/>
+          </a:p>
+        </p:txBody>
       </p:sp>
       <p:sp>
         <p:nvSpPr>
@@ -14846,6 +15341,13 @@
           </a:solidFill>
           <a:ln/>
         </p:spPr>
+        <p:txBody>
+          <a:bodyPr/>
+          <a:lstStyle/>
+          <a:p>
+            <a:endParaRPr lang="zh-TW" altLang="en-US"/>
+          </a:p>
+        </p:txBody>
       </p:sp>
       <p:sp>
         <p:nvSpPr>
@@ -14868,7 +15370,7 @@
           <a:bodyPr wrap="square" lIns="0" tIns="0" rIns="0" bIns="0" rtlCol="0" anchor="ctr"/>
           <a:lstStyle/>
           <a:p>
-            <a:pPr indent="0" marL="0">
+            <a:pPr marL="0" indent="0">
               <a:buNone/>
             </a:pPr>
             <a:r>
@@ -14907,7 +15409,7 @@
           <a:bodyPr wrap="square" lIns="0" tIns="0" rIns="0" bIns="0" rtlCol="0" anchor="ctr"/>
           <a:lstStyle/>
           <a:p>
-            <a:pPr indent="0" marL="0">
+            <a:pPr marL="0" indent="0">
               <a:buNone/>
             </a:pPr>
             <a:r>
@@ -14924,7 +15426,7 @@
             <a:endParaRPr lang="en-US" sz="1300" dirty="0"/>
           </a:p>
           <a:p>
-            <a:pPr indent="0" marL="0">
+            <a:pPr marL="0" indent="0">
               <a:buNone/>
             </a:pPr>
             <a:r>
@@ -14966,13 +15468,20 @@
             <a:prstDash val="solid"/>
           </a:ln>
           <a:effectLst>
-            <a:outerShdw sx="100000" sy="100000" kx="0" ky="0" algn="bl" rotWithShape="0" blurRad="50800" dist="25400" dir="8100000">
+            <a:outerShdw blurRad="50800" dist="25400" dir="8100000" algn="bl" rotWithShape="0">
               <a:srgbClr val="000000">
                 <a:alpha val="12000"/>
               </a:srgbClr>
             </a:outerShdw>
           </a:effectLst>
         </p:spPr>
+        <p:txBody>
+          <a:bodyPr/>
+          <a:lstStyle/>
+          <a:p>
+            <a:endParaRPr lang="zh-TW" altLang="en-US"/>
+          </a:p>
+        </p:txBody>
       </p:sp>
       <p:sp>
         <p:nvSpPr>
@@ -14993,6 +15502,13 @@
           </a:solidFill>
           <a:ln/>
         </p:spPr>
+        <p:txBody>
+          <a:bodyPr/>
+          <a:lstStyle/>
+          <a:p>
+            <a:endParaRPr lang="zh-TW" altLang="en-US"/>
+          </a:p>
+        </p:txBody>
       </p:sp>
       <p:sp>
         <p:nvSpPr>
@@ -15015,7 +15531,7 @@
           <a:bodyPr wrap="square" lIns="0" tIns="0" rIns="0" bIns="0" rtlCol="0" anchor="ctr"/>
           <a:lstStyle/>
           <a:p>
-            <a:pPr indent="0" marL="0">
+            <a:pPr marL="0" indent="0">
               <a:buNone/>
             </a:pPr>
             <a:r>
@@ -15054,7 +15570,7 @@
           <a:bodyPr wrap="square" lIns="0" tIns="0" rIns="0" bIns="0" rtlCol="0" anchor="ctr"/>
           <a:lstStyle/>
           <a:p>
-            <a:pPr indent="0" marL="0">
+            <a:pPr marL="0" indent="0">
               <a:buNone/>
             </a:pPr>
             <a:r>
@@ -15071,7 +15587,7 @@
             <a:endParaRPr lang="en-US" sz="1300" dirty="0"/>
           </a:p>
           <a:p>
-            <a:pPr indent="0" marL="0">
+            <a:pPr marL="0" indent="0">
               <a:buNone/>
             </a:pPr>
             <a:r>
@@ -15133,6 +15649,13 @@
           </a:solidFill>
           <a:ln/>
         </p:spPr>
+        <p:txBody>
+          <a:bodyPr/>
+          <a:lstStyle/>
+          <a:p>
+            <a:endParaRPr lang="zh-TW" altLang="en-US"/>
+          </a:p>
+        </p:txBody>
       </p:sp>
       <p:sp>
         <p:nvSpPr>
@@ -15155,7 +15678,7 @@
           <a:bodyPr wrap="square" lIns="0" tIns="0" rIns="0" bIns="0" rtlCol="0" anchor="ctr"/>
           <a:lstStyle/>
           <a:p>
-            <a:pPr indent="0" marL="0">
+            <a:pPr marL="0" indent="0">
               <a:buNone/>
             </a:pPr>
             <a:r>
@@ -15194,7 +15717,7 @@
           <a:bodyPr wrap="square" rtlCol="0" anchor="ctr"/>
           <a:lstStyle/>
           <a:p>
-            <a:pPr algn="r" indent="0" marL="0">
+            <a:pPr marL="0" indent="0" algn="r">
               <a:buNone/>
             </a:pPr>
             <a:r>
@@ -15233,7 +15756,7 @@
           <a:bodyPr wrap="square" lIns="0" tIns="0" rIns="0" bIns="0" rtlCol="0" anchor="ctr"/>
           <a:lstStyle/>
           <a:p>
-            <a:pPr indent="0" marL="0">
+            <a:pPr marL="0" indent="0">
               <a:buNone/>
             </a:pPr>
             <a:r>
@@ -15275,13 +15798,20 @@
             <a:prstDash val="solid"/>
           </a:ln>
           <a:effectLst>
-            <a:outerShdw sx="100000" sy="100000" kx="0" ky="0" algn="bl" rotWithShape="0" blurRad="50800" dist="25400" dir="8100000">
+            <a:outerShdw blurRad="50800" dist="25400" dir="8100000" algn="bl" rotWithShape="0">
               <a:srgbClr val="000000">
                 <a:alpha val="12000"/>
               </a:srgbClr>
             </a:outerShdw>
           </a:effectLst>
         </p:spPr>
+        <p:txBody>
+          <a:bodyPr/>
+          <a:lstStyle/>
+          <a:p>
+            <a:endParaRPr lang="zh-TW" altLang="en-US"/>
+          </a:p>
+        </p:txBody>
       </p:sp>
       <p:sp>
         <p:nvSpPr>
@@ -15302,6 +15832,13 @@
           </a:solidFill>
           <a:ln/>
         </p:spPr>
+        <p:txBody>
+          <a:bodyPr/>
+          <a:lstStyle/>
+          <a:p>
+            <a:endParaRPr lang="zh-TW" altLang="en-US"/>
+          </a:p>
+        </p:txBody>
       </p:sp>
       <p:sp>
         <p:nvSpPr>
@@ -15324,7 +15861,7 @@
           <a:bodyPr wrap="square" lIns="0" tIns="0" rIns="0" bIns="0" rtlCol="0" anchor="ctr"/>
           <a:lstStyle/>
           <a:p>
-            <a:pPr indent="0" marL="0">
+            <a:pPr marL="0" indent="0">
               <a:buNone/>
             </a:pPr>
             <a:r>
@@ -15363,7 +15900,7 @@
           <a:bodyPr wrap="square" lIns="0" tIns="0" rIns="0" bIns="0" rtlCol="0" anchor="ctr"/>
           <a:lstStyle/>
           <a:p>
-            <a:pPr indent="0" marL="0">
+            <a:pPr marL="0" indent="0">
               <a:buNone/>
             </a:pPr>
             <a:r>
@@ -15380,7 +15917,7 @@
             <a:endParaRPr lang="en-US" sz="1300" dirty="0"/>
           </a:p>
           <a:p>
-            <a:pPr indent="0" marL="0">
+            <a:pPr marL="0" indent="0">
               <a:buNone/>
             </a:pPr>
             <a:r>
@@ -15397,7 +15934,7 @@
             <a:endParaRPr lang="en-US" sz="1300" dirty="0"/>
           </a:p>
           <a:p>
-            <a:pPr indent="0" marL="0">
+            <a:pPr marL="0" indent="0">
               <a:buNone/>
             </a:pPr>
             <a:r>
@@ -15414,13 +15951,13 @@
             <a:endParaRPr lang="en-US" sz="1300" dirty="0"/>
           </a:p>
           <a:p>
-            <a:pPr indent="0" marL="0">
+            <a:pPr marL="0" indent="0">
               <a:buNone/>
             </a:pPr>
             <a:endParaRPr lang="en-US" sz="1300" dirty="0"/>
           </a:p>
           <a:p>
-            <a:pPr indent="0" marL="0">
+            <a:pPr marL="0" indent="0">
               <a:buNone/>
             </a:pPr>
             <a:r>
@@ -15462,13 +15999,20 @@
             <a:prstDash val="solid"/>
           </a:ln>
           <a:effectLst>
-            <a:outerShdw sx="100000" sy="100000" kx="0" ky="0" algn="bl" rotWithShape="0" blurRad="50800" dist="25400" dir="8100000">
+            <a:outerShdw blurRad="50800" dist="25400" dir="8100000" algn="bl" rotWithShape="0">
               <a:srgbClr val="000000">
                 <a:alpha val="12000"/>
               </a:srgbClr>
             </a:outerShdw>
           </a:effectLst>
         </p:spPr>
+        <p:txBody>
+          <a:bodyPr/>
+          <a:lstStyle/>
+          <a:p>
+            <a:endParaRPr lang="zh-TW" altLang="en-US"/>
+          </a:p>
+        </p:txBody>
       </p:sp>
       <p:sp>
         <p:nvSpPr>
@@ -15489,6 +16033,13 @@
           </a:solidFill>
           <a:ln/>
         </p:spPr>
+        <p:txBody>
+          <a:bodyPr/>
+          <a:lstStyle/>
+          <a:p>
+            <a:endParaRPr lang="zh-TW" altLang="en-US"/>
+          </a:p>
+        </p:txBody>
       </p:sp>
       <p:sp>
         <p:nvSpPr>
@@ -15511,7 +16062,7 @@
           <a:bodyPr wrap="square" lIns="0" tIns="0" rIns="0" bIns="0" rtlCol="0" anchor="ctr"/>
           <a:lstStyle/>
           <a:p>
-            <a:pPr indent="0" marL="0">
+            <a:pPr marL="0" indent="0">
               <a:buNone/>
             </a:pPr>
             <a:r>
@@ -15550,7 +16101,7 @@
           <a:bodyPr wrap="square" lIns="0" tIns="0" rIns="0" bIns="0" rtlCol="0" anchor="ctr"/>
           <a:lstStyle/>
           <a:p>
-            <a:pPr indent="0" marL="0">
+            <a:pPr marL="0" indent="0">
               <a:buNone/>
             </a:pPr>
             <a:r>
@@ -15567,7 +16118,7 @@
             <a:endParaRPr lang="en-US" sz="1300" dirty="0"/>
           </a:p>
           <a:p>
-            <a:pPr indent="0" marL="0">
+            <a:pPr marL="0" indent="0">
               <a:buNone/>
             </a:pPr>
             <a:r>
@@ -15584,7 +16135,7 @@
             <a:endParaRPr lang="en-US" sz="1300" dirty="0"/>
           </a:p>
           <a:p>
-            <a:pPr indent="0" marL="0">
+            <a:pPr marL="0" indent="0">
               <a:buNone/>
             </a:pPr>
             <a:r>
@@ -15601,13 +16152,13 @@
             <a:endParaRPr lang="en-US" sz="1300" dirty="0"/>
           </a:p>
           <a:p>
-            <a:pPr indent="0" marL="0">
+            <a:pPr marL="0" indent="0">
               <a:buNone/>
             </a:pPr>
             <a:endParaRPr lang="en-US" sz="1300" dirty="0"/>
           </a:p>
           <a:p>
-            <a:pPr indent="0" marL="0">
+            <a:pPr marL="0" indent="0">
               <a:buNone/>
             </a:pPr>
             <a:r>
@@ -15669,6 +16220,13 @@
           </a:solidFill>
           <a:ln/>
         </p:spPr>
+        <p:txBody>
+          <a:bodyPr/>
+          <a:lstStyle/>
+          <a:p>
+            <a:endParaRPr lang="zh-TW" altLang="en-US"/>
+          </a:p>
+        </p:txBody>
       </p:sp>
       <p:sp>
         <p:nvSpPr>
@@ -15691,7 +16249,7 @@
           <a:bodyPr wrap="square" lIns="0" tIns="0" rIns="0" bIns="0" rtlCol="0" anchor="ctr"/>
           <a:lstStyle/>
           <a:p>
-            <a:pPr indent="0" marL="0">
+            <a:pPr marL="0" indent="0">
               <a:buNone/>
             </a:pPr>
             <a:r>
@@ -15730,7 +16288,7 @@
           <a:bodyPr wrap="square" rtlCol="0" anchor="ctr"/>
           <a:lstStyle/>
           <a:p>
-            <a:pPr algn="r" indent="0" marL="0">
+            <a:pPr marL="0" indent="0" algn="r">
               <a:buNone/>
             </a:pPr>
             <a:r>
@@ -15769,7 +16327,7 @@
           <a:bodyPr wrap="square" lIns="0" tIns="0" rIns="0" bIns="0" rtlCol="0" anchor="ctr"/>
           <a:lstStyle/>
           <a:p>
-            <a:pPr indent="0" marL="0">
+            <a:pPr marL="0" indent="0">
               <a:buNone/>
             </a:pPr>
             <a:r>
@@ -15811,13 +16369,20 @@
             <a:prstDash val="solid"/>
           </a:ln>
           <a:effectLst>
-            <a:outerShdw sx="100000" sy="100000" kx="0" ky="0" algn="bl" rotWithShape="0" blurRad="50800" dist="25400" dir="8100000">
+            <a:outerShdw blurRad="50800" dist="25400" dir="8100000" algn="bl" rotWithShape="0">
               <a:srgbClr val="000000">
                 <a:alpha val="12000"/>
               </a:srgbClr>
             </a:outerShdw>
           </a:effectLst>
         </p:spPr>
+        <p:txBody>
+          <a:bodyPr/>
+          <a:lstStyle/>
+          <a:p>
+            <a:endParaRPr lang="zh-TW" altLang="en-US"/>
+          </a:p>
+        </p:txBody>
       </p:sp>
       <p:sp>
         <p:nvSpPr>
@@ -15840,7 +16405,7 @@
           <a:bodyPr wrap="square" lIns="0" tIns="0" rIns="0" bIns="0" rtlCol="0" anchor="ctr"/>
           <a:lstStyle/>
           <a:p>
-            <a:pPr indent="0" marL="0">
+            <a:pPr marL="0" indent="0">
               <a:buNone/>
             </a:pPr>
             <a:r>
@@ -15877,6 +16442,13 @@
           </a:solidFill>
           <a:ln/>
         </p:spPr>
+        <p:txBody>
+          <a:bodyPr/>
+          <a:lstStyle/>
+          <a:p>
+            <a:endParaRPr lang="zh-TW" altLang="en-US"/>
+          </a:p>
+        </p:txBody>
       </p:sp>
       <p:sp>
         <p:nvSpPr>
@@ -15899,7 +16471,7 @@
           <a:bodyPr wrap="square" lIns="0" tIns="0" rIns="0" bIns="0" rtlCol="0" anchor="ctr"/>
           <a:lstStyle/>
           <a:p>
-            <a:pPr indent="0" marL="0">
+            <a:pPr marL="0" indent="0">
               <a:buNone/>
             </a:pPr>
             <a:r>
@@ -15941,13 +16513,20 @@
             <a:prstDash val="solid"/>
           </a:ln>
           <a:effectLst>
-            <a:outerShdw sx="100000" sy="100000" kx="0" ky="0" algn="bl" rotWithShape="0" blurRad="50800" dist="25400" dir="8100000">
+            <a:outerShdw blurRad="50800" dist="25400" dir="8100000" algn="bl" rotWithShape="0">
               <a:srgbClr val="000000">
                 <a:alpha val="12000"/>
               </a:srgbClr>
             </a:outerShdw>
           </a:effectLst>
         </p:spPr>
+        <p:txBody>
+          <a:bodyPr/>
+          <a:lstStyle/>
+          <a:p>
+            <a:endParaRPr lang="zh-TW" altLang="en-US"/>
+          </a:p>
+        </p:txBody>
       </p:sp>
       <p:sp>
         <p:nvSpPr>
@@ -15970,7 +16549,7 @@
           <a:bodyPr wrap="square" lIns="0" tIns="0" rIns="0" bIns="0" rtlCol="0" anchor="ctr"/>
           <a:lstStyle/>
           <a:p>
-            <a:pPr indent="0" marL="0">
+            <a:pPr marL="0" indent="0">
               <a:buNone/>
             </a:pPr>
             <a:r>
@@ -16007,6 +16586,13 @@
           </a:solidFill>
           <a:ln/>
         </p:spPr>
+        <p:txBody>
+          <a:bodyPr/>
+          <a:lstStyle/>
+          <a:p>
+            <a:endParaRPr lang="zh-TW" altLang="en-US"/>
+          </a:p>
+        </p:txBody>
       </p:sp>
       <p:sp>
         <p:nvSpPr>
@@ -16029,7 +16615,7 @@
           <a:bodyPr wrap="square" lIns="0" tIns="0" rIns="0" bIns="0" rtlCol="0" anchor="ctr"/>
           <a:lstStyle/>
           <a:p>
-            <a:pPr indent="0" marL="0">
+            <a:pPr marL="0" indent="0">
               <a:buNone/>
             </a:pPr>
             <a:r>
@@ -16071,13 +16657,20 @@
             <a:prstDash val="solid"/>
           </a:ln>
           <a:effectLst>
-            <a:outerShdw sx="100000" sy="100000" kx="0" ky="0" algn="bl" rotWithShape="0" blurRad="50800" dist="25400" dir="8100000">
+            <a:outerShdw blurRad="50800" dist="25400" dir="8100000" algn="bl" rotWithShape="0">
               <a:srgbClr val="000000">
                 <a:alpha val="12000"/>
               </a:srgbClr>
             </a:outerShdw>
           </a:effectLst>
         </p:spPr>
+        <p:txBody>
+          <a:bodyPr/>
+          <a:lstStyle/>
+          <a:p>
+            <a:endParaRPr lang="zh-TW" altLang="en-US"/>
+          </a:p>
+        </p:txBody>
       </p:sp>
       <p:sp>
         <p:nvSpPr>
@@ -16100,7 +16693,7 @@
           <a:bodyPr wrap="square" lIns="0" tIns="0" rIns="0" bIns="0" rtlCol="0" anchor="ctr"/>
           <a:lstStyle/>
           <a:p>
-            <a:pPr indent="0" marL="0">
+            <a:pPr marL="0" indent="0">
               <a:buNone/>
             </a:pPr>
             <a:r>
@@ -16137,6 +16730,13 @@
           </a:solidFill>
           <a:ln/>
         </p:spPr>
+        <p:txBody>
+          <a:bodyPr/>
+          <a:lstStyle/>
+          <a:p>
+            <a:endParaRPr lang="zh-TW" altLang="en-US"/>
+          </a:p>
+        </p:txBody>
       </p:sp>
       <p:sp>
         <p:nvSpPr>
@@ -16159,7 +16759,7 @@
           <a:bodyPr wrap="square" lIns="0" tIns="0" rIns="0" bIns="0" rtlCol="0" anchor="ctr"/>
           <a:lstStyle/>
           <a:p>
-            <a:pPr indent="0" marL="0">
+            <a:pPr marL="0" indent="0">
               <a:buNone/>
             </a:pPr>
             <a:r>
@@ -16221,6 +16821,13 @@
           </a:solidFill>
           <a:ln/>
         </p:spPr>
+        <p:txBody>
+          <a:bodyPr/>
+          <a:lstStyle/>
+          <a:p>
+            <a:endParaRPr lang="zh-TW" altLang="en-US"/>
+          </a:p>
+        </p:txBody>
       </p:sp>
       <p:sp>
         <p:nvSpPr>
@@ -16243,7 +16850,7 @@
           <a:bodyPr wrap="square" lIns="0" tIns="0" rIns="0" bIns="0" rtlCol="0" anchor="ctr"/>
           <a:lstStyle/>
           <a:p>
-            <a:pPr indent="0" marL="0">
+            <a:pPr marL="0" indent="0">
               <a:buNone/>
             </a:pPr>
             <a:r>
@@ -16282,7 +16889,7 @@
           <a:bodyPr wrap="square" rtlCol="0" anchor="ctr"/>
           <a:lstStyle/>
           <a:p>
-            <a:pPr algn="r" indent="0" marL="0">
+            <a:pPr marL="0" indent="0" algn="r">
               <a:buNone/>
             </a:pPr>
             <a:r>
@@ -16324,13 +16931,20 @@
             <a:prstDash val="solid"/>
           </a:ln>
           <a:effectLst>
-            <a:outerShdw sx="100000" sy="100000" kx="0" ky="0" algn="bl" rotWithShape="0" blurRad="50800" dist="25400" dir="8100000">
+            <a:outerShdw blurRad="50800" dist="25400" dir="8100000" algn="bl" rotWithShape="0">
               <a:srgbClr val="000000">
                 <a:alpha val="12000"/>
               </a:srgbClr>
             </a:outerShdw>
           </a:effectLst>
         </p:spPr>
+        <p:txBody>
+          <a:bodyPr/>
+          <a:lstStyle/>
+          <a:p>
+            <a:endParaRPr lang="zh-TW" altLang="en-US"/>
+          </a:p>
+        </p:txBody>
       </p:sp>
       <p:sp>
         <p:nvSpPr>
@@ -16351,6 +16965,13 @@
           </a:solidFill>
           <a:ln/>
         </p:spPr>
+        <p:txBody>
+          <a:bodyPr/>
+          <a:lstStyle/>
+          <a:p>
+            <a:endParaRPr lang="zh-TW" altLang="en-US"/>
+          </a:p>
+        </p:txBody>
       </p:sp>
       <p:sp>
         <p:nvSpPr>
@@ -16373,7 +16994,7 @@
           <a:bodyPr wrap="square" lIns="0" tIns="0" rIns="0" bIns="0" rtlCol="0" anchor="ctr"/>
           <a:lstStyle/>
           <a:p>
-            <a:pPr indent="0" marL="0">
+            <a:pPr marL="0" indent="0">
               <a:buNone/>
             </a:pPr>
             <a:r>
@@ -16412,7 +17033,7 @@
           <a:bodyPr wrap="square" lIns="0" tIns="0" rIns="0" bIns="0" rtlCol="0" anchor="ctr"/>
           <a:lstStyle/>
           <a:p>
-            <a:pPr indent="0" marL="0">
+            <a:pPr marL="0" indent="0">
               <a:buNone/>
             </a:pPr>
             <a:r>
@@ -16451,7 +17072,7 @@
           <a:bodyPr wrap="square" lIns="0" tIns="0" rIns="0" bIns="0" rtlCol="0" anchor="ctr"/>
           <a:lstStyle/>
           <a:p>
-            <a:pPr indent="0" marL="0">
+            <a:pPr marL="0" indent="0">
               <a:buNone/>
             </a:pPr>
             <a:r>
@@ -16490,7 +17111,7 @@
           <a:bodyPr wrap="square" lIns="0" tIns="0" rIns="0" bIns="0" rtlCol="0" anchor="ctr"/>
           <a:lstStyle/>
           <a:p>
-            <a:pPr indent="0" marL="0">
+            <a:pPr marL="0" indent="0">
               <a:buNone/>
             </a:pPr>
             <a:r>
@@ -16507,7 +17128,7 @@
             <a:endParaRPr lang="en-US" sz="1200" dirty="0"/>
           </a:p>
           <a:p>
-            <a:pPr indent="0" marL="0">
+            <a:pPr marL="0" indent="0">
               <a:buNone/>
             </a:pPr>
             <a:r>
@@ -16549,13 +17170,20 @@
             <a:prstDash val="solid"/>
           </a:ln>
           <a:effectLst>
-            <a:outerShdw sx="100000" sy="100000" kx="0" ky="0" algn="bl" rotWithShape="0" blurRad="50800" dist="25400" dir="8100000">
+            <a:outerShdw blurRad="50800" dist="25400" dir="8100000" algn="bl" rotWithShape="0">
               <a:srgbClr val="000000">
                 <a:alpha val="12000"/>
               </a:srgbClr>
             </a:outerShdw>
           </a:effectLst>
         </p:spPr>
+        <p:txBody>
+          <a:bodyPr/>
+          <a:lstStyle/>
+          <a:p>
+            <a:endParaRPr lang="zh-TW" altLang="en-US"/>
+          </a:p>
+        </p:txBody>
       </p:sp>
       <p:sp>
         <p:nvSpPr>
@@ -16576,6 +17204,13 @@
           </a:solidFill>
           <a:ln/>
         </p:spPr>
+        <p:txBody>
+          <a:bodyPr/>
+          <a:lstStyle/>
+          <a:p>
+            <a:endParaRPr lang="zh-TW" altLang="en-US"/>
+          </a:p>
+        </p:txBody>
       </p:sp>
       <p:sp>
         <p:nvSpPr>
@@ -16598,7 +17233,7 @@
           <a:bodyPr wrap="square" lIns="0" tIns="0" rIns="0" bIns="0" rtlCol="0" anchor="ctr"/>
           <a:lstStyle/>
           <a:p>
-            <a:pPr indent="0" marL="0">
+            <a:pPr marL="0" indent="0">
               <a:buNone/>
             </a:pPr>
             <a:r>
@@ -16637,7 +17272,7 @@
           <a:bodyPr wrap="square" lIns="0" tIns="0" rIns="0" bIns="0" rtlCol="0" anchor="ctr"/>
           <a:lstStyle/>
           <a:p>
-            <a:pPr indent="0" marL="0">
+            <a:pPr marL="0" indent="0">
               <a:buNone/>
             </a:pPr>
             <a:r>
@@ -16676,7 +17311,7 @@
           <a:bodyPr wrap="square" lIns="0" tIns="0" rIns="0" bIns="0" rtlCol="0" anchor="ctr"/>
           <a:lstStyle/>
           <a:p>
-            <a:pPr indent="0" marL="0">
+            <a:pPr marL="0" indent="0">
               <a:buNone/>
             </a:pPr>
             <a:r>
@@ -16715,7 +17350,7 @@
           <a:bodyPr wrap="square" lIns="0" tIns="0" rIns="0" bIns="0" rtlCol="0" anchor="ctr"/>
           <a:lstStyle/>
           <a:p>
-            <a:pPr indent="0" marL="0">
+            <a:pPr marL="0" indent="0">
               <a:buNone/>
             </a:pPr>
             <a:r>
@@ -16732,7 +17367,7 @@
             <a:endParaRPr lang="en-US" sz="1200" dirty="0"/>
           </a:p>
           <a:p>
-            <a:pPr indent="0" marL="0">
+            <a:pPr marL="0" indent="0">
               <a:buNone/>
             </a:pPr>
             <a:r>
@@ -16774,13 +17409,20 @@
             <a:prstDash val="solid"/>
           </a:ln>
           <a:effectLst>
-            <a:outerShdw sx="100000" sy="100000" kx="0" ky="0" algn="bl" rotWithShape="0" blurRad="50800" dist="25400" dir="8100000">
+            <a:outerShdw blurRad="50800" dist="25400" dir="8100000" algn="bl" rotWithShape="0">
               <a:srgbClr val="000000">
                 <a:alpha val="12000"/>
               </a:srgbClr>
             </a:outerShdw>
           </a:effectLst>
         </p:spPr>
+        <p:txBody>
+          <a:bodyPr/>
+          <a:lstStyle/>
+          <a:p>
+            <a:endParaRPr lang="zh-TW" altLang="en-US"/>
+          </a:p>
+        </p:txBody>
       </p:sp>
       <p:sp>
         <p:nvSpPr>
@@ -16801,6 +17443,13 @@
           </a:solidFill>
           <a:ln/>
         </p:spPr>
+        <p:txBody>
+          <a:bodyPr/>
+          <a:lstStyle/>
+          <a:p>
+            <a:endParaRPr lang="zh-TW" altLang="en-US"/>
+          </a:p>
+        </p:txBody>
       </p:sp>
       <p:sp>
         <p:nvSpPr>
@@ -16823,7 +17472,7 @@
           <a:bodyPr wrap="square" lIns="0" tIns="0" rIns="0" bIns="0" rtlCol="0" anchor="ctr"/>
           <a:lstStyle/>
           <a:p>
-            <a:pPr indent="0" marL="0">
+            <a:pPr marL="0" indent="0">
               <a:buNone/>
             </a:pPr>
             <a:r>
@@ -16862,7 +17511,7 @@
           <a:bodyPr wrap="square" lIns="0" tIns="0" rIns="0" bIns="0" rtlCol="0" anchor="ctr"/>
           <a:lstStyle/>
           <a:p>
-            <a:pPr indent="0" marL="0">
+            <a:pPr marL="0" indent="0">
               <a:buNone/>
             </a:pPr>
             <a:r>
@@ -16901,7 +17550,7 @@
           <a:bodyPr wrap="square" lIns="0" tIns="0" rIns="0" bIns="0" rtlCol="0" anchor="ctr"/>
           <a:lstStyle/>
           <a:p>
-            <a:pPr indent="0" marL="0">
+            <a:pPr marL="0" indent="0">
               <a:buNone/>
             </a:pPr>
             <a:r>
@@ -16940,7 +17589,7 @@
           <a:bodyPr wrap="square" lIns="0" tIns="0" rIns="0" bIns="0" rtlCol="0" anchor="ctr"/>
           <a:lstStyle/>
           <a:p>
-            <a:pPr indent="0" marL="0">
+            <a:pPr marL="0" indent="0">
               <a:buNone/>
             </a:pPr>
             <a:r>
@@ -16957,7 +17606,7 @@
             <a:endParaRPr lang="en-US" sz="1200" dirty="0"/>
           </a:p>
           <a:p>
-            <a:pPr indent="0" marL="0">
+            <a:pPr marL="0" indent="0">
               <a:buNone/>
             </a:pPr>
             <a:r>
@@ -17019,6 +17668,13 @@
           </a:solidFill>
           <a:ln/>
         </p:spPr>
+        <p:txBody>
+          <a:bodyPr/>
+          <a:lstStyle/>
+          <a:p>
+            <a:endParaRPr lang="zh-TW" altLang="en-US"/>
+          </a:p>
+        </p:txBody>
       </p:sp>
       <p:sp>
         <p:nvSpPr>
@@ -17041,7 +17697,7 @@
           <a:bodyPr wrap="square" lIns="0" tIns="0" rIns="0" bIns="0" rtlCol="0" anchor="ctr"/>
           <a:lstStyle/>
           <a:p>
-            <a:pPr indent="0" marL="0">
+            <a:pPr marL="0" indent="0">
               <a:buNone/>
             </a:pPr>
             <a:r>
@@ -17080,7 +17736,7 @@
           <a:bodyPr wrap="square" rtlCol="0" anchor="ctr"/>
           <a:lstStyle/>
           <a:p>
-            <a:pPr algn="r" indent="0" marL="0">
+            <a:pPr marL="0" indent="0" algn="r">
               <a:buNone/>
             </a:pPr>
             <a:r>
@@ -17122,13 +17778,20 @@
             <a:prstDash val="solid"/>
           </a:ln>
           <a:effectLst>
-            <a:outerShdw sx="100000" sy="100000" kx="0" ky="0" algn="bl" rotWithShape="0" blurRad="50800" dist="25400" dir="8100000">
+            <a:outerShdw blurRad="50800" dist="25400" dir="8100000" algn="bl" rotWithShape="0">
               <a:srgbClr val="000000">
                 <a:alpha val="12000"/>
               </a:srgbClr>
             </a:outerShdw>
           </a:effectLst>
         </p:spPr>
+        <p:txBody>
+          <a:bodyPr/>
+          <a:lstStyle/>
+          <a:p>
+            <a:endParaRPr lang="zh-TW" altLang="en-US"/>
+          </a:p>
+        </p:txBody>
       </p:sp>
       <p:sp>
         <p:nvSpPr>
@@ -17151,7 +17814,7 @@
           <a:bodyPr wrap="square" lIns="0" tIns="0" rIns="0" bIns="0" rtlCol="0" anchor="ctr"/>
           <a:lstStyle/>
           <a:p>
-            <a:pPr indent="0" marL="0">
+            <a:pPr marL="0" indent="0">
               <a:buNone/>
             </a:pPr>
             <a:r>
@@ -17336,13 +17999,20 @@
           </a:solidFill>
           <a:ln/>
           <a:effectLst>
-            <a:outerShdw sx="100000" sy="100000" kx="0" ky="0" algn="bl" rotWithShape="0" blurRad="50800" dist="25400" dir="8100000">
+            <a:outerShdw blurRad="50800" dist="25400" dir="8100000" algn="bl" rotWithShape="0">
               <a:srgbClr val="000000">
                 <a:alpha val="12000"/>
               </a:srgbClr>
             </a:outerShdw>
           </a:effectLst>
         </p:spPr>
+        <p:txBody>
+          <a:bodyPr/>
+          <a:lstStyle/>
+          <a:p>
+            <a:endParaRPr lang="zh-TW" altLang="en-US"/>
+          </a:p>
+        </p:txBody>
       </p:sp>
       <p:sp>
         <p:nvSpPr>
@@ -17365,7 +18035,7 @@
           <a:bodyPr wrap="square" lIns="0" tIns="0" rIns="0" bIns="0" rtlCol="0" anchor="ctr"/>
           <a:lstStyle/>
           <a:p>
-            <a:pPr algn="ctr" indent="0" marL="0">
+            <a:pPr marL="0" indent="0" algn="ctr">
               <a:buNone/>
             </a:pPr>
             <a:r>
@@ -17382,7 +18052,7 @@
             <a:endParaRPr lang="en-US" sz="1300" dirty="0"/>
           </a:p>
           <a:p>
-            <a:pPr algn="ctr" indent="0" marL="0">
+            <a:pPr marL="0" indent="0" algn="ctr">
               <a:buNone/>
             </a:pPr>
             <a:r>
@@ -17421,7 +18091,7 @@
           <a:bodyPr wrap="square" lIns="0" tIns="0" rIns="0" bIns="0" rtlCol="0" anchor="ctr"/>
           <a:lstStyle/>
           <a:p>
-            <a:pPr algn="ctr" indent="0" marL="0">
+            <a:pPr marL="0" indent="0" algn="ctr">
               <a:buNone/>
             </a:pPr>
             <a:r>
@@ -17455,13 +18125,20 @@
           </a:solidFill>
           <a:ln/>
           <a:effectLst>
-            <a:outerShdw sx="100000" sy="100000" kx="0" ky="0" algn="bl" rotWithShape="0" blurRad="50800" dist="25400" dir="8100000">
+            <a:outerShdw blurRad="50800" dist="25400" dir="8100000" algn="bl" rotWithShape="0">
               <a:srgbClr val="000000">
                 <a:alpha val="12000"/>
               </a:srgbClr>
             </a:outerShdw>
           </a:effectLst>
         </p:spPr>
+        <p:txBody>
+          <a:bodyPr/>
+          <a:lstStyle/>
+          <a:p>
+            <a:endParaRPr lang="zh-TW" altLang="en-US"/>
+          </a:p>
+        </p:txBody>
       </p:sp>
       <p:sp>
         <p:nvSpPr>
@@ -17484,7 +18161,7 @@
           <a:bodyPr wrap="square" lIns="0" tIns="0" rIns="0" bIns="0" rtlCol="0" anchor="ctr"/>
           <a:lstStyle/>
           <a:p>
-            <a:pPr algn="ctr" indent="0" marL="0">
+            <a:pPr marL="0" indent="0" algn="ctr">
               <a:buNone/>
             </a:pPr>
             <a:r>
@@ -17501,7 +18178,7 @@
             <a:endParaRPr lang="en-US" sz="1300" dirty="0"/>
           </a:p>
           <a:p>
-            <a:pPr algn="ctr" indent="0" marL="0">
+            <a:pPr marL="0" indent="0" algn="ctr">
               <a:buNone/>
             </a:pPr>
             <a:r>
@@ -17540,7 +18217,7 @@
           <a:bodyPr wrap="square" lIns="0" tIns="0" rIns="0" bIns="0" rtlCol="0" anchor="ctr"/>
           <a:lstStyle/>
           <a:p>
-            <a:pPr algn="ctr" indent="0" marL="0">
+            <a:pPr marL="0" indent="0" algn="ctr">
               <a:buNone/>
             </a:pPr>
             <a:r>
@@ -17574,13 +18251,20 @@
           </a:solidFill>
           <a:ln/>
           <a:effectLst>
-            <a:outerShdw sx="100000" sy="100000" kx="0" ky="0" algn="bl" rotWithShape="0" blurRad="50800" dist="25400" dir="8100000">
+            <a:outerShdw blurRad="50800" dist="25400" dir="8100000" algn="bl" rotWithShape="0">
               <a:srgbClr val="000000">
                 <a:alpha val="12000"/>
               </a:srgbClr>
             </a:outerShdw>
           </a:effectLst>
         </p:spPr>
+        <p:txBody>
+          <a:bodyPr/>
+          <a:lstStyle/>
+          <a:p>
+            <a:endParaRPr lang="zh-TW" altLang="en-US"/>
+          </a:p>
+        </p:txBody>
       </p:sp>
       <p:sp>
         <p:nvSpPr>
@@ -17603,7 +18287,7 @@
           <a:bodyPr wrap="square" lIns="0" tIns="0" rIns="0" bIns="0" rtlCol="0" anchor="ctr"/>
           <a:lstStyle/>
           <a:p>
-            <a:pPr algn="ctr" indent="0" marL="0">
+            <a:pPr marL="0" indent="0" algn="ctr">
               <a:buNone/>
             </a:pPr>
             <a:r>
@@ -17620,7 +18304,7 @@
             <a:endParaRPr lang="en-US" sz="1300" dirty="0"/>
           </a:p>
           <a:p>
-            <a:pPr algn="ctr" indent="0" marL="0">
+            <a:pPr marL="0" indent="0" algn="ctr">
               <a:buNone/>
             </a:pPr>
             <a:r>
@@ -17659,7 +18343,7 @@
           <a:bodyPr wrap="square" lIns="0" tIns="0" rIns="0" bIns="0" rtlCol="0" anchor="ctr"/>
           <a:lstStyle/>
           <a:p>
-            <a:pPr algn="ctr" indent="0" marL="0">
+            <a:pPr marL="0" indent="0" algn="ctr">
               <a:buNone/>
             </a:pPr>
             <a:r>
@@ -17693,13 +18377,20 @@
           </a:solidFill>
           <a:ln/>
           <a:effectLst>
-            <a:outerShdw sx="100000" sy="100000" kx="0" ky="0" algn="bl" rotWithShape="0" blurRad="50800" dist="25400" dir="8100000">
+            <a:outerShdw blurRad="50800" dist="25400" dir="8100000" algn="bl" rotWithShape="0">
               <a:srgbClr val="000000">
                 <a:alpha val="12000"/>
               </a:srgbClr>
             </a:outerShdw>
           </a:effectLst>
         </p:spPr>
+        <p:txBody>
+          <a:bodyPr/>
+          <a:lstStyle/>
+          <a:p>
+            <a:endParaRPr lang="zh-TW" altLang="en-US"/>
+          </a:p>
+        </p:txBody>
       </p:sp>
       <p:sp>
         <p:nvSpPr>
@@ -17722,7 +18413,7 @@
           <a:bodyPr wrap="square" lIns="0" tIns="0" rIns="0" bIns="0" rtlCol="0" anchor="ctr"/>
           <a:lstStyle/>
           <a:p>
-            <a:pPr algn="ctr" indent="0" marL="0">
+            <a:pPr marL="0" indent="0" algn="ctr">
               <a:buNone/>
             </a:pPr>
             <a:r>
@@ -17739,7 +18430,7 @@
             <a:endParaRPr lang="en-US" sz="1300" dirty="0"/>
           </a:p>
           <a:p>
-            <a:pPr algn="ctr" indent="0" marL="0">
+            <a:pPr marL="0" indent="0" algn="ctr">
               <a:buNone/>
             </a:pPr>
             <a:r>
@@ -17801,6 +18492,13 @@
           </a:solidFill>
           <a:ln/>
         </p:spPr>
+        <p:txBody>
+          <a:bodyPr/>
+          <a:lstStyle/>
+          <a:p>
+            <a:endParaRPr lang="zh-TW" altLang="en-US"/>
+          </a:p>
+        </p:txBody>
       </p:sp>
       <p:sp>
         <p:nvSpPr>
@@ -17823,7 +18521,7 @@
           <a:bodyPr wrap="square" lIns="0" tIns="0" rIns="0" bIns="0" rtlCol="0" anchor="ctr"/>
           <a:lstStyle/>
           <a:p>
-            <a:pPr indent="0" marL="0">
+            <a:pPr marL="0" indent="0">
               <a:buNone/>
             </a:pPr>
             <a:r>
@@ -17862,7 +18560,7 @@
           <a:bodyPr wrap="square" rtlCol="0" anchor="ctr"/>
           <a:lstStyle/>
           <a:p>
-            <a:pPr algn="r" indent="0" marL="0">
+            <a:pPr marL="0" indent="0" algn="r">
               <a:buNone/>
             </a:pPr>
             <a:r>
@@ -17904,13 +18602,20 @@
             <a:prstDash val="solid"/>
           </a:ln>
           <a:effectLst>
-            <a:outerShdw sx="100000" sy="100000" kx="0" ky="0" algn="bl" rotWithShape="0" blurRad="50800" dist="25400" dir="8100000">
+            <a:outerShdw blurRad="50800" dist="25400" dir="8100000" algn="bl" rotWithShape="0">
               <a:srgbClr val="000000">
                 <a:alpha val="12000"/>
               </a:srgbClr>
             </a:outerShdw>
           </a:effectLst>
         </p:spPr>
+        <p:txBody>
+          <a:bodyPr/>
+          <a:lstStyle/>
+          <a:p>
+            <a:endParaRPr lang="zh-TW" altLang="en-US"/>
+          </a:p>
+        </p:txBody>
       </p:sp>
       <p:sp>
         <p:nvSpPr>
@@ -17931,6 +18636,13 @@
           </a:solidFill>
           <a:ln/>
         </p:spPr>
+        <p:txBody>
+          <a:bodyPr/>
+          <a:lstStyle/>
+          <a:p>
+            <a:endParaRPr lang="zh-TW" altLang="en-US"/>
+          </a:p>
+        </p:txBody>
       </p:sp>
       <p:sp>
         <p:nvSpPr>
@@ -17953,7 +18665,7 @@
           <a:bodyPr wrap="square" lIns="0" tIns="0" rIns="0" bIns="0" rtlCol="0" anchor="ctr"/>
           <a:lstStyle/>
           <a:p>
-            <a:pPr algn="ctr" indent="0" marL="0">
+            <a:pPr marL="0" indent="0" algn="ctr">
               <a:buNone/>
             </a:pPr>
             <a:r>
@@ -17992,7 +18704,7 @@
           <a:bodyPr wrap="square" lIns="0" tIns="0" rIns="0" bIns="0" rtlCol="0" anchor="ctr"/>
           <a:lstStyle/>
           <a:p>
-            <a:pPr indent="0" marL="0">
+            <a:pPr marL="0" indent="0">
               <a:buNone/>
             </a:pPr>
             <a:r>
@@ -18031,7 +18743,7 @@
           <a:bodyPr wrap="square" lIns="0" tIns="0" rIns="0" bIns="0" rtlCol="0" anchor="ctr"/>
           <a:lstStyle/>
           <a:p>
-            <a:pPr indent="0" marL="0">
+            <a:pPr marL="0" indent="0">
               <a:buNone/>
             </a:pPr>
             <a:r>
@@ -18073,13 +18785,20 @@
             <a:prstDash val="solid"/>
           </a:ln>
           <a:effectLst>
-            <a:outerShdw sx="100000" sy="100000" kx="0" ky="0" algn="bl" rotWithShape="0" blurRad="50800" dist="25400" dir="8100000">
+            <a:outerShdw blurRad="50800" dist="25400" dir="8100000" algn="bl" rotWithShape="0">
               <a:srgbClr val="000000">
                 <a:alpha val="12000"/>
               </a:srgbClr>
             </a:outerShdw>
           </a:effectLst>
         </p:spPr>
+        <p:txBody>
+          <a:bodyPr/>
+          <a:lstStyle/>
+          <a:p>
+            <a:endParaRPr lang="zh-TW" altLang="en-US"/>
+          </a:p>
+        </p:txBody>
       </p:sp>
       <p:sp>
         <p:nvSpPr>
@@ -18100,6 +18819,13 @@
           </a:solidFill>
           <a:ln/>
         </p:spPr>
+        <p:txBody>
+          <a:bodyPr/>
+          <a:lstStyle/>
+          <a:p>
+            <a:endParaRPr lang="zh-TW" altLang="en-US"/>
+          </a:p>
+        </p:txBody>
       </p:sp>
       <p:sp>
         <p:nvSpPr>
@@ -18122,7 +18848,7 @@
           <a:bodyPr wrap="square" lIns="0" tIns="0" rIns="0" bIns="0" rtlCol="0" anchor="ctr"/>
           <a:lstStyle/>
           <a:p>
-            <a:pPr algn="ctr" indent="0" marL="0">
+            <a:pPr marL="0" indent="0" algn="ctr">
               <a:buNone/>
             </a:pPr>
             <a:r>
@@ -18161,7 +18887,7 @@
           <a:bodyPr wrap="square" lIns="0" tIns="0" rIns="0" bIns="0" rtlCol="0" anchor="ctr"/>
           <a:lstStyle/>
           <a:p>
-            <a:pPr indent="0" marL="0">
+            <a:pPr marL="0" indent="0">
               <a:buNone/>
             </a:pPr>
             <a:r>
@@ -18200,7 +18926,7 @@
           <a:bodyPr wrap="square" lIns="0" tIns="0" rIns="0" bIns="0" rtlCol="0" anchor="ctr"/>
           <a:lstStyle/>
           <a:p>
-            <a:pPr indent="0" marL="0">
+            <a:pPr marL="0" indent="0">
               <a:buNone/>
             </a:pPr>
             <a:r>
@@ -18242,13 +18968,20 @@
             <a:prstDash val="solid"/>
           </a:ln>
           <a:effectLst>
-            <a:outerShdw sx="100000" sy="100000" kx="0" ky="0" algn="bl" rotWithShape="0" blurRad="50800" dist="25400" dir="8100000">
+            <a:outerShdw blurRad="50800" dist="25400" dir="8100000" algn="bl" rotWithShape="0">
               <a:srgbClr val="000000">
                 <a:alpha val="12000"/>
               </a:srgbClr>
             </a:outerShdw>
           </a:effectLst>
         </p:spPr>
+        <p:txBody>
+          <a:bodyPr/>
+          <a:lstStyle/>
+          <a:p>
+            <a:endParaRPr lang="zh-TW" altLang="en-US"/>
+          </a:p>
+        </p:txBody>
       </p:sp>
       <p:sp>
         <p:nvSpPr>
@@ -18269,6 +19002,13 @@
           </a:solidFill>
           <a:ln/>
         </p:spPr>
+        <p:txBody>
+          <a:bodyPr/>
+          <a:lstStyle/>
+          <a:p>
+            <a:endParaRPr lang="zh-TW" altLang="en-US"/>
+          </a:p>
+        </p:txBody>
       </p:sp>
       <p:sp>
         <p:nvSpPr>
@@ -18291,7 +19031,7 @@
           <a:bodyPr wrap="square" lIns="0" tIns="0" rIns="0" bIns="0" rtlCol="0" anchor="ctr"/>
           <a:lstStyle/>
           <a:p>
-            <a:pPr algn="ctr" indent="0" marL="0">
+            <a:pPr marL="0" indent="0" algn="ctr">
               <a:buNone/>
             </a:pPr>
             <a:r>
@@ -18330,7 +19070,7 @@
           <a:bodyPr wrap="square" lIns="0" tIns="0" rIns="0" bIns="0" rtlCol="0" anchor="ctr"/>
           <a:lstStyle/>
           <a:p>
-            <a:pPr indent="0" marL="0">
+            <a:pPr marL="0" indent="0">
               <a:buNone/>
             </a:pPr>
             <a:r>
@@ -18369,7 +19109,7 @@
           <a:bodyPr wrap="square" lIns="0" tIns="0" rIns="0" bIns="0" rtlCol="0" anchor="ctr"/>
           <a:lstStyle/>
           <a:p>
-            <a:pPr indent="0" marL="0">
+            <a:pPr marL="0" indent="0">
               <a:buNone/>
             </a:pPr>
             <a:r>
@@ -18411,13 +19151,20 @@
             <a:prstDash val="solid"/>
           </a:ln>
           <a:effectLst>
-            <a:outerShdw sx="100000" sy="100000" kx="0" ky="0" algn="bl" rotWithShape="0" blurRad="50800" dist="25400" dir="8100000">
+            <a:outerShdw blurRad="50800" dist="25400" dir="8100000" algn="bl" rotWithShape="0">
               <a:srgbClr val="000000">
                 <a:alpha val="12000"/>
               </a:srgbClr>
             </a:outerShdw>
           </a:effectLst>
         </p:spPr>
+        <p:txBody>
+          <a:bodyPr/>
+          <a:lstStyle/>
+          <a:p>
+            <a:endParaRPr lang="zh-TW" altLang="en-US"/>
+          </a:p>
+        </p:txBody>
       </p:sp>
       <p:sp>
         <p:nvSpPr>
@@ -18438,6 +19185,13 @@
           </a:solidFill>
           <a:ln/>
         </p:spPr>
+        <p:txBody>
+          <a:bodyPr/>
+          <a:lstStyle/>
+          <a:p>
+            <a:endParaRPr lang="zh-TW" altLang="en-US"/>
+          </a:p>
+        </p:txBody>
       </p:sp>
       <p:sp>
         <p:nvSpPr>
@@ -18460,7 +19214,7 @@
           <a:bodyPr wrap="square" lIns="0" tIns="0" rIns="0" bIns="0" rtlCol="0" anchor="ctr"/>
           <a:lstStyle/>
           <a:p>
-            <a:pPr algn="ctr" indent="0" marL="0">
+            <a:pPr marL="0" indent="0" algn="ctr">
               <a:buNone/>
             </a:pPr>
             <a:r>
@@ -18499,7 +19253,7 @@
           <a:bodyPr wrap="square" lIns="0" tIns="0" rIns="0" bIns="0" rtlCol="0" anchor="ctr"/>
           <a:lstStyle/>
           <a:p>
-            <a:pPr indent="0" marL="0">
+            <a:pPr marL="0" indent="0">
               <a:buNone/>
             </a:pPr>
             <a:r>
@@ -18538,7 +19292,7 @@
           <a:bodyPr wrap="square" lIns="0" tIns="0" rIns="0" bIns="0" rtlCol="0" anchor="ctr"/>
           <a:lstStyle/>
           <a:p>
-            <a:pPr indent="0" marL="0">
+            <a:pPr marL="0" indent="0">
               <a:buNone/>
             </a:pPr>
             <a:r>
@@ -18580,13 +19334,20 @@
             <a:prstDash val="solid"/>
           </a:ln>
           <a:effectLst>
-            <a:outerShdw sx="100000" sy="100000" kx="0" ky="0" algn="bl" rotWithShape="0" blurRad="50800" dist="25400" dir="8100000">
+            <a:outerShdw blurRad="50800" dist="25400" dir="8100000" algn="bl" rotWithShape="0">
               <a:srgbClr val="000000">
                 <a:alpha val="12000"/>
               </a:srgbClr>
             </a:outerShdw>
           </a:effectLst>
         </p:spPr>
+        <p:txBody>
+          <a:bodyPr/>
+          <a:lstStyle/>
+          <a:p>
+            <a:endParaRPr lang="zh-TW" altLang="en-US"/>
+          </a:p>
+        </p:txBody>
       </p:sp>
       <p:sp>
         <p:nvSpPr>
@@ -18607,6 +19368,13 @@
           </a:solidFill>
           <a:ln/>
         </p:spPr>
+        <p:txBody>
+          <a:bodyPr/>
+          <a:lstStyle/>
+          <a:p>
+            <a:endParaRPr lang="zh-TW" altLang="en-US"/>
+          </a:p>
+        </p:txBody>
       </p:sp>
       <p:sp>
         <p:nvSpPr>
@@ -18629,7 +19397,7 @@
           <a:bodyPr wrap="square" lIns="0" tIns="0" rIns="0" bIns="0" rtlCol="0" anchor="ctr"/>
           <a:lstStyle/>
           <a:p>
-            <a:pPr algn="ctr" indent="0" marL="0">
+            <a:pPr marL="0" indent="0" algn="ctr">
               <a:buNone/>
             </a:pPr>
             <a:r>
@@ -18668,7 +19436,7 @@
           <a:bodyPr wrap="square" lIns="0" tIns="0" rIns="0" bIns="0" rtlCol="0" anchor="ctr"/>
           <a:lstStyle/>
           <a:p>
-            <a:pPr indent="0" marL="0">
+            <a:pPr marL="0" indent="0">
               <a:buNone/>
             </a:pPr>
             <a:r>
@@ -18707,7 +19475,7 @@
           <a:bodyPr wrap="square" lIns="0" tIns="0" rIns="0" bIns="0" rtlCol="0" anchor="ctr"/>
           <a:lstStyle/>
           <a:p>
-            <a:pPr indent="0" marL="0">
+            <a:pPr marL="0" indent="0">
               <a:buNone/>
             </a:pPr>
             <a:r>
@@ -18769,6 +19537,13 @@
           </a:solidFill>
           <a:ln/>
         </p:spPr>
+        <p:txBody>
+          <a:bodyPr/>
+          <a:lstStyle/>
+          <a:p>
+            <a:endParaRPr lang="zh-TW" altLang="en-US"/>
+          </a:p>
+        </p:txBody>
       </p:sp>
       <p:sp>
         <p:nvSpPr>
@@ -18791,7 +19566,7 @@
           <a:bodyPr wrap="square" lIns="0" tIns="0" rIns="0" bIns="0" rtlCol="0" anchor="ctr"/>
           <a:lstStyle/>
           <a:p>
-            <a:pPr indent="0" marL="0">
+            <a:pPr marL="0" indent="0">
               <a:buNone/>
             </a:pPr>
             <a:r>
@@ -18830,7 +19605,7 @@
           <a:bodyPr wrap="square" rtlCol="0" anchor="ctr"/>
           <a:lstStyle/>
           <a:p>
-            <a:pPr algn="r" indent="0" marL="0">
+            <a:pPr marL="0" indent="0" algn="r">
               <a:buNone/>
             </a:pPr>
             <a:r>
@@ -18872,13 +19647,20 @@
             <a:prstDash val="solid"/>
           </a:ln>
           <a:effectLst>
-            <a:outerShdw sx="100000" sy="100000" kx="0" ky="0" algn="bl" rotWithShape="0" blurRad="50800" dist="25400" dir="8100000">
+            <a:outerShdw blurRad="50800" dist="25400" dir="8100000" algn="bl" rotWithShape="0">
               <a:srgbClr val="000000">
                 <a:alpha val="12000"/>
               </a:srgbClr>
             </a:outerShdw>
           </a:effectLst>
         </p:spPr>
+        <p:txBody>
+          <a:bodyPr/>
+          <a:lstStyle/>
+          <a:p>
+            <a:endParaRPr lang="zh-TW" altLang="en-US"/>
+          </a:p>
+        </p:txBody>
       </p:sp>
       <p:sp>
         <p:nvSpPr>
@@ -18901,7 +19683,7 @@
           <a:bodyPr wrap="square" lIns="0" tIns="0" rIns="0" bIns="0" rtlCol="0" anchor="ctr"/>
           <a:lstStyle/>
           <a:p>
-            <a:pPr indent="0" marL="0">
+            <a:pPr marL="0" indent="0">
               <a:buNone/>
             </a:pPr>
             <a:r>
@@ -18938,6 +19720,13 @@
           </a:solidFill>
           <a:ln/>
         </p:spPr>
+        <p:txBody>
+          <a:bodyPr/>
+          <a:lstStyle/>
+          <a:p>
+            <a:endParaRPr lang="zh-TW" altLang="en-US"/>
+          </a:p>
+        </p:txBody>
       </p:sp>
       <p:sp>
         <p:nvSpPr>
@@ -18960,7 +19749,7 @@
           <a:bodyPr wrap="square" lIns="0" tIns="0" rIns="0" bIns="0" rtlCol="0" anchor="ctr"/>
           <a:lstStyle/>
           <a:p>
-            <a:pPr indent="0" marL="0">
+            <a:pPr marL="0" indent="0">
               <a:buNone/>
             </a:pPr>
             <a:r>
@@ -18997,6 +19786,13 @@
           </a:solidFill>
           <a:ln/>
         </p:spPr>
+        <p:txBody>
+          <a:bodyPr/>
+          <a:lstStyle/>
+          <a:p>
+            <a:endParaRPr lang="zh-TW" altLang="en-US"/>
+          </a:p>
+        </p:txBody>
       </p:sp>
       <p:sp>
         <p:nvSpPr>
@@ -19019,7 +19815,7 @@
           <a:bodyPr wrap="square" lIns="0" tIns="0" rIns="0" bIns="0" rtlCol="0" anchor="ctr"/>
           <a:lstStyle/>
           <a:p>
-            <a:pPr indent="0" marL="0">
+            <a:pPr marL="0" indent="0">
               <a:buNone/>
             </a:pPr>
             <a:r>
@@ -19036,7 +19832,7 @@
             <a:endParaRPr lang="en-US" sz="1100" dirty="0"/>
           </a:p>
           <a:p>
-            <a:pPr indent="0" marL="0">
+            <a:pPr marL="0" indent="0">
               <a:buNone/>
             </a:pPr>
             <a:r>
@@ -19053,7 +19849,7 @@
             <a:endParaRPr lang="en-US" sz="1100" dirty="0"/>
           </a:p>
           <a:p>
-            <a:pPr indent="0" marL="0">
+            <a:pPr marL="0" indent="0">
               <a:buNone/>
             </a:pPr>
             <a:r>
@@ -19070,7 +19866,7 @@
             <a:endParaRPr lang="en-US" sz="1100" dirty="0"/>
           </a:p>
           <a:p>
-            <a:pPr indent="0" marL="0">
+            <a:pPr marL="0" indent="0">
               <a:buNone/>
             </a:pPr>
             <a:r>
@@ -19087,13 +19883,13 @@
             <a:endParaRPr lang="en-US" sz="1100" dirty="0"/>
           </a:p>
           <a:p>
-            <a:pPr indent="0" marL="0">
+            <a:pPr marL="0" indent="0">
               <a:buNone/>
             </a:pPr>
             <a:endParaRPr lang="en-US" sz="1100" dirty="0"/>
           </a:p>
           <a:p>
-            <a:pPr indent="0" marL="0">
+            <a:pPr marL="0" indent="0">
               <a:buNone/>
             </a:pPr>
             <a:r>
@@ -19135,13 +19931,20 @@
             <a:prstDash val="solid"/>
           </a:ln>
           <a:effectLst>
-            <a:outerShdw sx="100000" sy="100000" kx="0" ky="0" algn="bl" rotWithShape="0" blurRad="50800" dist="25400" dir="8100000">
+            <a:outerShdw blurRad="50800" dist="25400" dir="8100000" algn="bl" rotWithShape="0">
               <a:srgbClr val="000000">
                 <a:alpha val="12000"/>
               </a:srgbClr>
             </a:outerShdw>
           </a:effectLst>
         </p:spPr>
+        <p:txBody>
+          <a:bodyPr/>
+          <a:lstStyle/>
+          <a:p>
+            <a:endParaRPr lang="zh-TW" altLang="en-US"/>
+          </a:p>
+        </p:txBody>
       </p:sp>
       <p:sp>
         <p:nvSpPr>
@@ -19164,7 +19967,7 @@
           <a:bodyPr wrap="square" lIns="0" tIns="0" rIns="0" bIns="0" rtlCol="0" anchor="ctr"/>
           <a:lstStyle/>
           <a:p>
-            <a:pPr indent="0" marL="0">
+            <a:pPr marL="0" indent="0">
               <a:buNone/>
             </a:pPr>
             <a:r>
@@ -19201,6 +20004,13 @@
           </a:solidFill>
           <a:ln/>
         </p:spPr>
+        <p:txBody>
+          <a:bodyPr/>
+          <a:lstStyle/>
+          <a:p>
+            <a:endParaRPr lang="zh-TW" altLang="en-US"/>
+          </a:p>
+        </p:txBody>
       </p:sp>
       <p:sp>
         <p:nvSpPr>
@@ -19223,7 +20033,7 @@
           <a:bodyPr wrap="square" lIns="0" tIns="0" rIns="0" bIns="0" rtlCol="0" anchor="ctr"/>
           <a:lstStyle/>
           <a:p>
-            <a:pPr indent="0" marL="0">
+            <a:pPr marL="0" indent="0">
               <a:buNone/>
             </a:pPr>
             <a:r>
@@ -19260,6 +20070,13 @@
           </a:solidFill>
           <a:ln/>
         </p:spPr>
+        <p:txBody>
+          <a:bodyPr/>
+          <a:lstStyle/>
+          <a:p>
+            <a:endParaRPr lang="zh-TW" altLang="en-US"/>
+          </a:p>
+        </p:txBody>
       </p:sp>
       <p:sp>
         <p:nvSpPr>
@@ -19282,7 +20099,7 @@
           <a:bodyPr wrap="square" lIns="0" tIns="0" rIns="0" bIns="0" rtlCol="0" anchor="ctr"/>
           <a:lstStyle/>
           <a:p>
-            <a:pPr indent="0" marL="0">
+            <a:pPr marL="0" indent="0">
               <a:buNone/>
             </a:pPr>
             <a:r>
@@ -19299,7 +20116,7 @@
             <a:endParaRPr lang="en-US" sz="1100" dirty="0"/>
           </a:p>
           <a:p>
-            <a:pPr indent="0" marL="0">
+            <a:pPr marL="0" indent="0">
               <a:buNone/>
             </a:pPr>
             <a:r>
@@ -19316,13 +20133,13 @@
             <a:endParaRPr lang="en-US" sz="1100" dirty="0"/>
           </a:p>
           <a:p>
-            <a:pPr indent="0" marL="0">
+            <a:pPr marL="0" indent="0">
               <a:buNone/>
             </a:pPr>
             <a:endParaRPr lang="en-US" sz="1100" dirty="0"/>
           </a:p>
           <a:p>
-            <a:pPr indent="0" marL="0">
+            <a:pPr marL="0" indent="0">
               <a:buNone/>
             </a:pPr>
             <a:r>
@@ -19339,7 +20156,7 @@
             <a:endParaRPr lang="en-US" sz="1100" dirty="0"/>
           </a:p>
           <a:p>
-            <a:pPr indent="0" marL="0">
+            <a:pPr marL="0" indent="0">
               <a:buNone/>
             </a:pPr>
             <a:r>
@@ -19356,13 +20173,13 @@
             <a:endParaRPr lang="en-US" sz="1100" dirty="0"/>
           </a:p>
           <a:p>
-            <a:pPr indent="0" marL="0">
+            <a:pPr marL="0" indent="0">
               <a:buNone/>
             </a:pPr>
             <a:endParaRPr lang="en-US" sz="1100" dirty="0"/>
           </a:p>
           <a:p>
-            <a:pPr indent="0" marL="0">
+            <a:pPr marL="0" indent="0">
               <a:buNone/>
             </a:pPr>
             <a:r>
@@ -19681,4 +20498,319 @@
     </a:ext>
   </a:extLst>
 </a:theme>
+</file>
+
+<file path=ppt/theme/theme2.xml><?xml version="1.0" encoding="utf-8"?>
+<a:theme xmlns:a="http://schemas.openxmlformats.org/drawingml/2006/main" name="Office 佈景主題">
+  <a:themeElements>
+    <a:clrScheme name="Office">
+      <a:dk1>
+        <a:sysClr val="windowText" lastClr="000000"/>
+      </a:dk1>
+      <a:lt1>
+        <a:sysClr val="window" lastClr="FFFFFF"/>
+      </a:lt1>
+      <a:dk2>
+        <a:srgbClr val="0E2841"/>
+      </a:dk2>
+      <a:lt2>
+        <a:srgbClr val="E8E8E8"/>
+      </a:lt2>
+      <a:accent1>
+        <a:srgbClr val="156082"/>
+      </a:accent1>
+      <a:accent2>
+        <a:srgbClr val="E97132"/>
+      </a:accent2>
+      <a:accent3>
+        <a:srgbClr val="196B24"/>
+      </a:accent3>
+      <a:accent4>
+        <a:srgbClr val="0F9ED5"/>
+      </a:accent4>
+      <a:accent5>
+        <a:srgbClr val="A02B93"/>
+      </a:accent5>
+      <a:accent6>
+        <a:srgbClr val="4EA72E"/>
+      </a:accent6>
+      <a:hlink>
+        <a:srgbClr val="467886"/>
+      </a:hlink>
+      <a:folHlink>
+        <a:srgbClr val="96607D"/>
+      </a:folHlink>
+    </a:clrScheme>
+    <a:fontScheme name="Office">
+      <a:majorFont>
+        <a:latin typeface="Aptos Display" panose="02110004020202020204"/>
+        <a:ea typeface=""/>
+        <a:cs typeface=""/>
+        <a:font script="Jpan" typeface="游ゴシック Light"/>
+        <a:font script="Hang" typeface="맑은 고딕"/>
+        <a:font script="Hans" typeface="等线 Light"/>
+        <a:font script="Hant" typeface="新細明體"/>
+        <a:font script="Arab" typeface="Times New Roman"/>
+        <a:font script="Hebr" typeface="Times New Roman"/>
+        <a:font script="Thai" typeface="Angsana New"/>
+        <a:font script="Ethi" typeface="Nyala"/>
+        <a:font script="Beng" typeface="Vrinda"/>
+        <a:font script="Gujr" typeface="Shruti"/>
+        <a:font script="Khmr" typeface="MoolBoran"/>
+        <a:font script="Knda" typeface="Tunga"/>
+        <a:font script="Guru" typeface="Raavi"/>
+        <a:font script="Cans" typeface="Euphemia"/>
+        <a:font script="Cher" typeface="Plantagenet Cherokee"/>
+        <a:font script="Yiii" typeface="Microsoft Yi Baiti"/>
+        <a:font script="Tibt" typeface="Microsoft Himalaya"/>
+        <a:font script="Thaa" typeface="MV Boli"/>
+        <a:font script="Deva" typeface="Mangal"/>
+        <a:font script="Telu" typeface="Gautami"/>
+        <a:font script="Taml" typeface="Latha"/>
+        <a:font script="Syrc" typeface="Estrangelo Edessa"/>
+        <a:font script="Orya" typeface="Kalinga"/>
+        <a:font script="Mlym" typeface="Kartika"/>
+        <a:font script="Laoo" typeface="DokChampa"/>
+        <a:font script="Sinh" typeface="Iskoola Pota"/>
+        <a:font script="Mong" typeface="Mongolian Baiti"/>
+        <a:font script="Viet" typeface="Times New Roman"/>
+        <a:font script="Uigh" typeface="Microsoft Uighur"/>
+        <a:font script="Geor" typeface="Sylfaen"/>
+        <a:font script="Armn" typeface="Arial"/>
+        <a:font script="Bugi" typeface="Leelawadee UI"/>
+        <a:font script="Bopo" typeface="Microsoft JhengHei"/>
+        <a:font script="Java" typeface="Javanese Text"/>
+        <a:font script="Lisu" typeface="Segoe UI"/>
+        <a:font script="Mymr" typeface="Myanmar Text"/>
+        <a:font script="Nkoo" typeface="Ebrima"/>
+        <a:font script="Olck" typeface="Nirmala UI"/>
+        <a:font script="Osma" typeface="Ebrima"/>
+        <a:font script="Phag" typeface="Phagspa"/>
+        <a:font script="Syrn" typeface="Estrangelo Edessa"/>
+        <a:font script="Syrj" typeface="Estrangelo Edessa"/>
+        <a:font script="Syre" typeface="Estrangelo Edessa"/>
+        <a:font script="Sora" typeface="Nirmala UI"/>
+        <a:font script="Tale" typeface="Microsoft Tai Le"/>
+        <a:font script="Talu" typeface="Microsoft New Tai Lue"/>
+        <a:font script="Tfng" typeface="Ebrima"/>
+      </a:majorFont>
+      <a:minorFont>
+        <a:latin typeface="Aptos" panose="02110004020202020204"/>
+        <a:ea typeface=""/>
+        <a:cs typeface=""/>
+        <a:font script="Jpan" typeface="游ゴシック"/>
+        <a:font script="Hang" typeface="맑은 고딕"/>
+        <a:font script="Hans" typeface="等线"/>
+        <a:font script="Hant" typeface="新細明體"/>
+        <a:font script="Arab" typeface="Arial"/>
+        <a:font script="Hebr" typeface="Arial"/>
+        <a:font script="Thai" typeface="Cordia New"/>
+        <a:font script="Ethi" typeface="Nyala"/>
+        <a:font script="Beng" typeface="Vrinda"/>
+        <a:font script="Gujr" typeface="Shruti"/>
+        <a:font script="Khmr" typeface="DaunPenh"/>
+        <a:font script="Knda" typeface="Tunga"/>
+        <a:font script="Guru" typeface="Raavi"/>
+        <a:font script="Cans" typeface="Euphemia"/>
+        <a:font script="Cher" typeface="Plantagenet Cherokee"/>
+        <a:font script="Yiii" typeface="Microsoft Yi Baiti"/>
+        <a:font script="Tibt" typeface="Microsoft Himalaya"/>
+        <a:font script="Thaa" typeface="MV Boli"/>
+        <a:font script="Deva" typeface="Mangal"/>
+        <a:font script="Telu" typeface="Gautami"/>
+        <a:font script="Taml" typeface="Latha"/>
+        <a:font script="Syrc" typeface="Estrangelo Edessa"/>
+        <a:font script="Orya" typeface="Kalinga"/>
+        <a:font script="Mlym" typeface="Kartika"/>
+        <a:font script="Laoo" typeface="DokChampa"/>
+        <a:font script="Sinh" typeface="Iskoola Pota"/>
+        <a:font script="Mong" typeface="Mongolian Baiti"/>
+        <a:font script="Viet" typeface="Arial"/>
+        <a:font script="Uigh" typeface="Microsoft Uighur"/>
+        <a:font script="Geor" typeface="Sylfaen"/>
+        <a:font script="Armn" typeface="Arial"/>
+        <a:font script="Bugi" typeface="Leelawadee UI"/>
+        <a:font script="Bopo" typeface="Microsoft JhengHei"/>
+        <a:font script="Java" typeface="Javanese Text"/>
+        <a:font script="Lisu" typeface="Segoe UI"/>
+        <a:font script="Mymr" typeface="Myanmar Text"/>
+        <a:font script="Nkoo" typeface="Ebrima"/>
+        <a:font script="Olck" typeface="Nirmala UI"/>
+        <a:font script="Osma" typeface="Ebrima"/>
+        <a:font script="Phag" typeface="Phagspa"/>
+        <a:font script="Syrn" typeface="Estrangelo Edessa"/>
+        <a:font script="Syrj" typeface="Estrangelo Edessa"/>
+        <a:font script="Syre" typeface="Estrangelo Edessa"/>
+        <a:font script="Sora" typeface="Nirmala UI"/>
+        <a:font script="Tale" typeface="Microsoft Tai Le"/>
+        <a:font script="Talu" typeface="Microsoft New Tai Lue"/>
+        <a:font script="Tfng" typeface="Ebrima"/>
+      </a:minorFont>
+    </a:fontScheme>
+    <a:fmtScheme name="Office">
+      <a:fillStyleLst>
+        <a:solidFill>
+          <a:schemeClr val="phClr"/>
+        </a:solidFill>
+        <a:gradFill rotWithShape="1">
+          <a:gsLst>
+            <a:gs pos="0">
+              <a:schemeClr val="phClr">
+                <a:lumMod val="110000"/>
+                <a:satMod val="105000"/>
+                <a:tint val="67000"/>
+              </a:schemeClr>
+            </a:gs>
+            <a:gs pos="50000">
+              <a:schemeClr val="phClr">
+                <a:lumMod val="105000"/>
+                <a:satMod val="103000"/>
+                <a:tint val="73000"/>
+              </a:schemeClr>
+            </a:gs>
+            <a:gs pos="100000">
+              <a:schemeClr val="phClr">
+                <a:lumMod val="105000"/>
+                <a:satMod val="109000"/>
+                <a:tint val="81000"/>
+              </a:schemeClr>
+            </a:gs>
+          </a:gsLst>
+          <a:lin ang="5400000" scaled="0"/>
+        </a:gradFill>
+        <a:gradFill rotWithShape="1">
+          <a:gsLst>
+            <a:gs pos="0">
+              <a:schemeClr val="phClr">
+                <a:satMod val="103000"/>
+                <a:lumMod val="102000"/>
+                <a:tint val="94000"/>
+              </a:schemeClr>
+            </a:gs>
+            <a:gs pos="50000">
+              <a:schemeClr val="phClr">
+                <a:satMod val="110000"/>
+                <a:lumMod val="100000"/>
+                <a:shade val="100000"/>
+              </a:schemeClr>
+            </a:gs>
+            <a:gs pos="100000">
+              <a:schemeClr val="phClr">
+                <a:lumMod val="99000"/>
+                <a:satMod val="120000"/>
+                <a:shade val="78000"/>
+              </a:schemeClr>
+            </a:gs>
+          </a:gsLst>
+          <a:lin ang="5400000" scaled="0"/>
+        </a:gradFill>
+      </a:fillStyleLst>
+      <a:lnStyleLst>
+        <a:ln w="12700" cap="flat" cmpd="sng" algn="ctr">
+          <a:solidFill>
+            <a:schemeClr val="phClr"/>
+          </a:solidFill>
+          <a:prstDash val="solid"/>
+          <a:miter lim="800000"/>
+        </a:ln>
+        <a:ln w="19050" cap="flat" cmpd="sng" algn="ctr">
+          <a:solidFill>
+            <a:schemeClr val="phClr"/>
+          </a:solidFill>
+          <a:prstDash val="solid"/>
+          <a:miter lim="800000"/>
+        </a:ln>
+        <a:ln w="25400" cap="flat" cmpd="sng" algn="ctr">
+          <a:solidFill>
+            <a:schemeClr val="phClr"/>
+          </a:solidFill>
+          <a:prstDash val="solid"/>
+          <a:miter lim="800000"/>
+        </a:ln>
+      </a:lnStyleLst>
+      <a:effectStyleLst>
+        <a:effectStyle>
+          <a:effectLst/>
+        </a:effectStyle>
+        <a:effectStyle>
+          <a:effectLst/>
+        </a:effectStyle>
+        <a:effectStyle>
+          <a:effectLst>
+            <a:outerShdw blurRad="57150" dist="19050" dir="5400000" algn="ctr" rotWithShape="0">
+              <a:srgbClr val="000000">
+                <a:alpha val="63000"/>
+              </a:srgbClr>
+            </a:outerShdw>
+          </a:effectLst>
+        </a:effectStyle>
+      </a:effectStyleLst>
+      <a:bgFillStyleLst>
+        <a:solidFill>
+          <a:schemeClr val="phClr"/>
+        </a:solidFill>
+        <a:solidFill>
+          <a:schemeClr val="phClr">
+            <a:tint val="95000"/>
+            <a:satMod val="170000"/>
+          </a:schemeClr>
+        </a:solidFill>
+        <a:gradFill rotWithShape="1">
+          <a:gsLst>
+            <a:gs pos="0">
+              <a:schemeClr val="phClr">
+                <a:tint val="93000"/>
+                <a:satMod val="150000"/>
+                <a:shade val="98000"/>
+                <a:lumMod val="102000"/>
+              </a:schemeClr>
+            </a:gs>
+            <a:gs pos="50000">
+              <a:schemeClr val="phClr">
+                <a:tint val="98000"/>
+                <a:satMod val="130000"/>
+                <a:shade val="90000"/>
+                <a:lumMod val="103000"/>
+              </a:schemeClr>
+            </a:gs>
+            <a:gs pos="100000">
+              <a:schemeClr val="phClr">
+                <a:shade val="63000"/>
+                <a:satMod val="120000"/>
+              </a:schemeClr>
+            </a:gs>
+          </a:gsLst>
+          <a:lin ang="5400000" scaled="0"/>
+        </a:gradFill>
+      </a:bgFillStyleLst>
+    </a:fmtScheme>
+  </a:themeElements>
+  <a:objectDefaults>
+    <a:lnDef>
+      <a:spPr/>
+      <a:bodyPr/>
+      <a:lstStyle/>
+      <a:style>
+        <a:lnRef idx="2">
+          <a:schemeClr val="accent1"/>
+        </a:lnRef>
+        <a:fillRef idx="0">
+          <a:schemeClr val="accent1"/>
+        </a:fillRef>
+        <a:effectRef idx="1">
+          <a:schemeClr val="accent1"/>
+        </a:effectRef>
+        <a:fontRef idx="minor">
+          <a:schemeClr val="tx1"/>
+        </a:fontRef>
+      </a:style>
+    </a:lnDef>
+  </a:objectDefaults>
+  <a:extraClrSchemeLst/>
+  <a:extLst>
+    <a:ext uri="{05A4C25C-085E-4340-85A3-A5531E510DB2}">
+      <thm15:themeFamily xmlns:thm15="http://schemas.microsoft.com/office/thememl/2012/main" name="Office Theme" id="{2E142A2C-CD16-42D6-873A-C26D2A0506FA}" vid="{1BDDFF52-6CD6-40A5-AB3C-68EB2F1E4D0A}"/>
+    </a:ext>
+  </a:extLst>
+</a:theme>
 </file>